--- a/src/reports/report-templates/june-2026/dicomm-29-June-2026.pptx
+++ b/src/reports/report-templates/june-2026/dicomm-29-June-2026.pptx
@@ -19,6 +19,8 @@
     <p:sldId id="260" r:id="rId8"/>
     <p:sldId id="267" r:id="rId19"/>
     <p:sldId id="264" r:id="rId9"/>
+    <p:sldId id="269" r:id="rId11"/>
+    <p:sldId id="270" r:id="rId10"/>
   </p:sldIdLst>
   <p:sldSz cx="9144000" cy="5149850"/>
   <p:notesSz cx="9144000" cy="5149850"/>
@@ -2279,8 +2281,8 @@
 </p:sld>
 </file>
 
-<file path=ppt/slides/slide3.xml><?xml version="1.0" encoding="utf-8"?>
-<p:sld xmlns:a="http://schemas.openxmlformats.org/drawingml/2006/main" xmlns:r="http://schemas.openxmlformats.org/officeDocument/2006/relationships" xmlns:p="http://schemas.openxmlformats.org/presentationml/2006/main">
+<file path=ppt/slides/slide10.xml><?xml version="1.0" encoding="utf-8"?>
+<p:sld xmlns:a="http://schemas.openxmlformats.org/drawingml/2006/main" xmlns:p="http://schemas.openxmlformats.org/presentationml/2006/main" xmlns:r="http://schemas.openxmlformats.org/officeDocument/2006/relationships">
   <p:cSld>
     <p:spTree>
       <p:nvGrpSpPr>
@@ -2288,70 +2290,10 @@
         <p:cNvGrpSpPr/>
         <p:nvPr/>
       </p:nvGrpSpPr>
-      <p:grpSpPr>
-        <a:xfrm>
-          <a:off x="0" y="0"/>
-          <a:ext cx="0" cy="0"/>
-          <a:chOff x="0" y="0"/>
-          <a:chExt cx="0" cy="0"/>
-        </a:xfrm>
-      </p:grpSpPr>
+      <p:grpSpPr/>
       <p:sp>
         <p:nvSpPr>
           <p:cNvPr id="2" name="object 2"/>
-          <p:cNvSpPr/>
-          <p:nvPr/>
-        </p:nvSpPr>
-        <p:spPr>
-          <a:xfrm>
-            <a:off x="429768" y="430148"/>
-            <a:ext cx="55244" cy="714375"/>
-          </a:xfrm>
-          <a:custGeom>
-            <a:avLst/>
-            <a:gdLst/>
-            <a:ahLst/>
-            <a:cxnLst/>
-            <a:rect l="l" t="t" r="r" b="b"/>
-            <a:pathLst>
-              <a:path w="55245" h="714375">
-                <a:moveTo>
-                  <a:pt x="54864" y="0"/>
-                </a:moveTo>
-                <a:lnTo>
-                  <a:pt x="0" y="0"/>
-                </a:lnTo>
-                <a:lnTo>
-                  <a:pt x="0" y="713866"/>
-                </a:lnTo>
-                <a:lnTo>
-                  <a:pt x="54864" y="713866"/>
-                </a:lnTo>
-                <a:lnTo>
-                  <a:pt x="54864" y="0"/>
-                </a:lnTo>
-                <a:close/>
-              </a:path>
-            </a:pathLst>
-          </a:custGeom>
-          <a:solidFill>
-            <a:srgbClr val="3A82F6"/>
-          </a:solidFill>
-        </p:spPr>
-        <p:txBody>
-          <a:bodyPr wrap="square" lIns="0" tIns="0" rIns="0" bIns="0" rtlCol="0"/>
-          <a:lstStyle/>
-          <a:p>
-            <a:endParaRPr>
-              <a:latin typeface="Raleway" pitchFamily="2" charset="77"/>
-              <a:cs typeface="Times New Roman" panose="02020603050405020304"/>
-            </a:endParaRPr>
-          </a:p>
-        </p:txBody>
-      </p:sp>
-      <p:sp>
-        <p:nvSpPr>
-          <p:cNvPr id="3" name="object 3"/>
           <p:cNvSpPr txBox="1">
             <a:spLocks noGrp="1"/>
           </p:cNvSpPr>
@@ -2361,20 +2303,20 @@
         </p:nvSpPr>
         <p:spPr>
           <a:xfrm>
-            <a:off x="401612" y="165009"/>
-            <a:ext cx="4932464" cy="589867"/>
+            <a:off x="401612" y="346709"/>
+            <a:ext cx="2722588" cy="334707"/>
           </a:xfrm>
           <a:prstGeom prst="rect">
             <a:avLst/>
           </a:prstGeom>
         </p:spPr>
         <p:txBody>
-          <a:bodyPr vert="horz" wrap="square" lIns="0" tIns="264122" rIns="0" bIns="0" rtlCol="0">
+          <a:bodyPr vert="horz" wrap="square" lIns="0" tIns="11430" rIns="0" bIns="0" rtlCol="0">
             <a:spAutoFit/>
           </a:bodyPr>
           <a:lstStyle/>
           <a:p>
-            <a:pPr marL="456565">
+            <a:pPr marL="12700">
               <a:lnSpc>
                 <a:spcPct val="100000"/>
               </a:lnSpc>
@@ -2383,27 +2325,13 @@
               </a:spcBef>
             </a:pPr>
             <a:r>
-              <a:rPr>
+              <a:rPr spc="60">
                 <a:latin typeface="Raleway" pitchFamily="2" charset="77"/>
                 <a:cs typeface="Times New Roman" panose="02020603050405020304"/>
               </a:rPr>
-              <a:t>Executive</a:t>
-            </a:r>
-            <a:r>
-              <a:rPr spc="125">
-                <a:latin typeface="Raleway" pitchFamily="2" charset="77"/>
-                <a:cs typeface="Times New Roman" panose="02020603050405020304"/>
-              </a:rPr>
-              <a:t> </a:t>
-            </a:r>
-            <a:r>
-              <a:rPr spc="75">
-                <a:latin typeface="Raleway" pitchFamily="2" charset="77"/>
-                <a:cs typeface="Times New Roman" panose="02020603050405020304"/>
-              </a:rPr>
-              <a:t>Summary</a:t>
-            </a:r>
-            <a:endParaRPr spc="75">
+              <a:t>Recommendations</a:t>
+            </a:r>
+            <a:endParaRPr spc="60">
               <a:latin typeface="Raleway" pitchFamily="2" charset="77"/>
               <a:cs typeface="Times New Roman" panose="02020603050405020304"/>
             </a:endParaRPr>
@@ -2412,77 +2340,51 @@
       </p:sp>
       <p:sp>
         <p:nvSpPr>
-          <p:cNvPr id="4" name="object 4"/>
+          <p:cNvPr id="3" name="object 3"/>
           <p:cNvSpPr txBox="1"/>
           <p:nvPr/>
         </p:nvSpPr>
         <p:spPr>
           <a:xfrm>
-            <a:off x="845578" y="890714"/>
-            <a:ext cx="5632450" cy="212090"/>
+            <a:off x="616660" y="745680"/>
+            <a:ext cx="3817709" cy="212238"/>
           </a:xfrm>
           <a:prstGeom prst="rect">
             <a:avLst/>
           </a:prstGeom>
         </p:spPr>
         <p:txBody>
-          <a:bodyPr vert="horz" wrap="square" lIns="0" tIns="12065" rIns="0" bIns="0" rtlCol="0">
+          <a:bodyPr vert="horz" wrap="square" lIns="0" tIns="12065" rIns="0" bIns="0" rtlCol="0" anchor="t">
             <a:spAutoFit/>
           </a:bodyPr>
           <a:lstStyle/>
-          <a:p>
-            <a:pPr marL="12700">
-              <a:lnSpc>
-                <a:spcPct val="100000"/>
-              </a:lnSpc>
-              <a:spcBef>
-                <a:spcPts val="95"/>
-              </a:spcBef>
-            </a:pPr>
-            <a:r>
-              <a:rPr sz="1300">
-                <a:solidFill>
-                  <a:srgbClr val="334154"/>
-                </a:solidFill>
-                <a:latin typeface="Raleway" pitchFamily="2" charset="77"/>
-                <a:cs typeface="Times New Roman" panose="02020603050405020304"/>
-              </a:rPr>
-              <a:t>Performance metrics indicate 96.7% of users are first-time visitors.</a:t>
-            </a:r>
-            <a:endParaRPr sz="1300">
-              <a:solidFill>
-                <a:srgbClr val="334154"/>
-              </a:solidFill>
-              <a:latin typeface="Raleway" pitchFamily="2" charset="77"/>
-              <a:cs typeface="Times New Roman" panose="02020603050405020304"/>
-            </a:endParaRPr>
-          </a:p>
+          <a:p/>
         </p:txBody>
       </p:sp>
       <p:grpSp>
         <p:nvGrpSpPr>
-          <p:cNvPr id="5" name="object 5"/>
+          <p:cNvPr id="4" name="object 4"/>
           <p:cNvGrpSpPr/>
           <p:nvPr/>
         </p:nvGrpSpPr>
         <p:grpSpPr>
           <a:xfrm>
-            <a:off x="381000" y="1427480"/>
-            <a:ext cx="4291965" cy="2632710"/>
-            <a:chOff x="429768" y="1427683"/>
-            <a:chExt cx="3931920" cy="3523615"/>
+            <a:off x="152400" y="1117600"/>
+            <a:ext cx="5112385" cy="3714750"/>
+            <a:chOff x="222076" y="1217269"/>
+            <a:chExt cx="5182282" cy="3469004"/>
           </a:xfrm>
         </p:grpSpPr>
         <p:sp>
           <p:nvSpPr>
-            <p:cNvPr id="6" name="object 6"/>
+            <p:cNvPr id="5" name="object 5"/>
             <p:cNvSpPr/>
             <p:nvPr/>
           </p:nvSpPr>
           <p:spPr>
             <a:xfrm>
-              <a:off x="429768" y="1427683"/>
-              <a:ext cx="3931920" cy="3523615"/>
+              <a:off x="429768" y="1217269"/>
+              <a:ext cx="4974590" cy="3469004"/>
             </a:xfrm>
             <a:custGeom>
               <a:avLst/>
@@ -2491,21 +2393,21 @@
               <a:cxnLst/>
               <a:rect l="l" t="t" r="r" b="b"/>
               <a:pathLst>
-                <a:path w="3931920" h="3523615">
+                <a:path w="4974590" h="3469004">
                   <a:moveTo>
-                    <a:pt x="3931920" y="0"/>
+                    <a:pt x="4974335" y="0"/>
                   </a:moveTo>
                   <a:lnTo>
                     <a:pt x="0" y="0"/>
                   </a:lnTo>
                   <a:lnTo>
-                    <a:pt x="0" y="3523614"/>
-                  </a:lnTo>
-                  <a:lnTo>
-                    <a:pt x="3931920" y="3523614"/>
-                  </a:lnTo>
-                  <a:lnTo>
-                    <a:pt x="3931920" y="0"/>
+                    <a:pt x="0" y="3468624"/>
+                  </a:lnTo>
+                  <a:lnTo>
+                    <a:pt x="4974335" y="3468624"/>
+                  </a:lnTo>
+                  <a:lnTo>
+                    <a:pt x="4974335" y="0"/>
                   </a:lnTo>
                   <a:close/>
                 </a:path>
@@ -2528,14 +2430,14 @@
         </p:sp>
         <p:sp>
           <p:nvSpPr>
-            <p:cNvPr id="7" name="object 7"/>
+            <p:cNvPr id="6" name="object 6"/>
             <p:cNvSpPr/>
             <p:nvPr/>
           </p:nvSpPr>
           <p:spPr>
             <a:xfrm>
-              <a:off x="429768" y="1427683"/>
-              <a:ext cx="27940" cy="3523615"/>
+              <a:off x="222076" y="1217269"/>
+              <a:ext cx="27940" cy="3469004"/>
             </a:xfrm>
             <a:custGeom>
               <a:avLst/>
@@ -2544,7 +2446,7 @@
               <a:cxnLst/>
               <a:rect l="l" t="t" r="r" b="b"/>
               <a:pathLst>
-                <a:path w="27940" h="3523615">
+                <a:path w="27940" h="3469004">
                   <a:moveTo>
                     <a:pt x="27431" y="0"/>
                   </a:moveTo>
@@ -2552,10 +2454,10 @@
                     <a:pt x="0" y="0"/>
                   </a:lnTo>
                   <a:lnTo>
-                    <a:pt x="0" y="3523614"/>
-                  </a:lnTo>
-                  <a:lnTo>
-                    <a:pt x="27431" y="3523614"/>
+                    <a:pt x="0" y="3468624"/>
+                  </a:lnTo>
+                  <a:lnTo>
+                    <a:pt x="27431" y="3468624"/>
                   </a:lnTo>
                   <a:lnTo>
                     <a:pt x="27431" y="0"/>
@@ -2582,264 +2484,73 @@
       </p:grpSp>
       <p:sp>
         <p:nvSpPr>
-          <p:cNvPr id="8" name="object 8"/>
-          <p:cNvSpPr txBox="1">
-            <a:spLocks noGrp="1"/>
-          </p:cNvSpPr>
-          <p:nvPr>
-            <p:ph type="body" idx="1"/>
-          </p:nvPr>
+          <p:cNvPr id="7" name="object 7"/>
+          <p:cNvSpPr txBox="1"/>
+          <p:nvPr/>
         </p:nvSpPr>
         <p:spPr>
           <a:xfrm>
-            <a:off x="477579" y="1431875"/>
-            <a:ext cx="4122007" cy="1704975"/>
+            <a:off x="240030" y="1217295"/>
+            <a:ext cx="5195570" cy="152400"/>
           </a:xfrm>
           <a:prstGeom prst="rect">
             <a:avLst/>
           </a:prstGeom>
         </p:spPr>
         <p:txBody>
-          <a:bodyPr vert="horz" wrap="square" lIns="0" tIns="12700" rIns="0" bIns="0" rtlCol="0" anchor="t">
+          <a:bodyPr vert="horz" wrap="square" lIns="0" tIns="14604" rIns="0" bIns="0" rtlCol="0" anchor="t">
             <a:spAutoFit/>
           </a:bodyPr>
           <a:lstStyle/>
-          <a:p>
-            <a:r>
-              <a:rPr lang="en-US" altLang="en-US" spc="-50">
-                <a:latin typeface="Raleway" pitchFamily="2" charset="77"/>
-                <a:cs typeface="Times New Roman" panose="02020603050405020304"/>
-              </a:rPr>
-              <a:t>The Dicomm website exhibited solid overall performance, attracting 633 active users, of whom 612 (96.7%) were new visitors. This substantial proportion of first-time users reflects effective audience acquisition and sustained brand visibility across digital channels.</a:t>
-            </a:r>
-            <a:endParaRPr lang="en-US" altLang="en-US" spc="-50">
-              <a:latin typeface="Raleway" pitchFamily="2" charset="77"/>
-              <a:cs typeface="Times New Roman" panose="02020603050405020304"/>
-            </a:endParaRPr>
-          </a:p>
-          <a:p>
-            <a:endParaRPr lang="en-US" altLang="en-US" spc="-50">
-              <a:latin typeface="Raleway" pitchFamily="2" charset="77"/>
-              <a:cs typeface="Times New Roman" panose="02020603050405020304"/>
-            </a:endParaRPr>
-          </a:p>
-          <a:p>
-            <a:r>
-              <a:rPr lang="en-US" altLang="en-US" spc="-50">
-                <a:latin typeface="Raleway" pitchFamily="2" charset="77"/>
-                <a:cs typeface="Times New Roman" panose="02020603050405020304"/>
-              </a:rPr>
-              <a:t>An average engagement time of 1m 08s signifies meaningful content interaction. Users are engaging with the platform's content rather than exiting promptly, demonstrating relevant and compelling material, irrespective of current audience size.</a:t>
-            </a:r>
-            <a:endParaRPr lang="en-US" altLang="en-US" spc="-50">
-              <a:latin typeface="Raleway" pitchFamily="2" charset="77"/>
-              <a:cs typeface="Times New Roman" panose="02020603050405020304"/>
-            </a:endParaRPr>
-          </a:p>
-          <a:p>
-            <a:endParaRPr lang="en-US" altLang="en-US" spc="-50">
-              <a:latin typeface="Raleway" pitchFamily="2" charset="77"/>
-              <a:cs typeface="Times New Roman" panose="02020603050405020304"/>
-            </a:endParaRPr>
-          </a:p>
-          <a:p>
-            <a:endParaRPr lang="en-US" altLang="en-US" spc="-50">
-              <a:latin typeface="Raleway" pitchFamily="2" charset="77"/>
-              <a:cs typeface="Times New Roman" panose="02020603050405020304"/>
-            </a:endParaRPr>
-          </a:p>
+          <a:p/>
         </p:txBody>
       </p:sp>
       <p:sp>
         <p:nvSpPr>
-          <p:cNvPr id="9" name="object 9"/>
-          <p:cNvSpPr txBox="1"/>
+          <p:cNvPr id="8" name="object 8"/>
+          <p:cNvSpPr/>
           <p:nvPr/>
         </p:nvSpPr>
         <p:spPr>
           <a:xfrm>
-            <a:off x="5354314" y="1533290"/>
-            <a:ext cx="2266249" cy="666115"/>
-          </a:xfrm>
-          <a:prstGeom prst="rect">
+            <a:off x="5486400" y="0"/>
+            <a:ext cx="3657600" cy="5148580"/>
+          </a:xfrm>
+          <a:custGeom>
             <a:avLst/>
-          </a:prstGeom>
+            <a:gdLst/>
+            <a:ahLst/>
+            <a:cxnLst/>
+            <a:rect l="l" t="t" r="r" b="b"/>
+            <a:pathLst>
+              <a:path w="3657600" h="5148580">
+                <a:moveTo>
+                  <a:pt x="0" y="0"/>
+                </a:moveTo>
+                <a:lnTo>
+                  <a:pt x="0" y="5148071"/>
+                </a:lnTo>
+                <a:lnTo>
+                  <a:pt x="3657600" y="5148071"/>
+                </a:lnTo>
+                <a:lnTo>
+                  <a:pt x="3657600" y="3"/>
+                </a:lnTo>
+                <a:lnTo>
+                  <a:pt x="0" y="0"/>
+                </a:lnTo>
+                <a:close/>
+              </a:path>
+            </a:pathLst>
+          </a:custGeom>
           <a:solidFill>
             <a:srgbClr val="1E3989"/>
           </a:solidFill>
         </p:spPr>
         <p:txBody>
-          <a:bodyPr vert="horz" wrap="square" lIns="0" tIns="175260" rIns="0" bIns="0" rtlCol="0" anchor="t">
-            <a:spAutoFit/>
-          </a:bodyPr>
+          <a:bodyPr wrap="square" lIns="0" tIns="0" rIns="0" bIns="0" rtlCol="0"/>
           <a:lstStyle/>
-          <a:p>
-            <a:pPr marL="409575" algn="ctr">
-              <a:lnSpc>
-                <a:spcPct val="100000"/>
-              </a:lnSpc>
-              <a:spcBef>
-                <a:spcPts val="1380"/>
-              </a:spcBef>
-            </a:pPr>
-            <a:r>
-              <a:rPr lang="en-US" altLang="en-GB" b="1" spc="-25">
-                <a:solidFill>
-                  <a:srgbClr val="FFFFFF"/>
-                </a:solidFill>
-                <a:latin typeface="Raleway" pitchFamily="2" charset="77"/>
-                <a:cs typeface="Times New Roman" panose="02020603050405020304"/>
-              </a:rPr>
-              <a:t>633</a:t>
-            </a:r>
-            <a:endParaRPr lang="en-US" altLang="en-GB" b="1" spc="-25">
-              <a:solidFill>
-                <a:srgbClr val="FFFFFF"/>
-              </a:solidFill>
-              <a:latin typeface="Raleway" pitchFamily="2" charset="77"/>
-              <a:cs typeface="Times New Roman" panose="02020603050405020304"/>
-            </a:endParaRPr>
-          </a:p>
-          <a:p>
-            <a:pPr marL="347980" algn="ctr">
-              <a:lnSpc>
-                <a:spcPct val="100000"/>
-              </a:lnSpc>
-              <a:spcBef>
-                <a:spcPts val="830"/>
-              </a:spcBef>
-            </a:pPr>
-            <a:r>
-              <a:rPr sz="700">
-                <a:solidFill>
-                  <a:srgbClr val="FFFFFF"/>
-                </a:solidFill>
-                <a:latin typeface="Raleway" pitchFamily="2" charset="77"/>
-                <a:cs typeface="Times New Roman" panose="02020603050405020304"/>
-              </a:rPr>
-              <a:t>Active</a:t>
-            </a:r>
-            <a:r>
-              <a:rPr sz="700" spc="105">
-                <a:solidFill>
-                  <a:srgbClr val="FFFFFF"/>
-                </a:solidFill>
-                <a:latin typeface="Raleway" pitchFamily="2" charset="77"/>
-                <a:cs typeface="Times New Roman" panose="02020603050405020304"/>
-              </a:rPr>
-              <a:t> </a:t>
-            </a:r>
-            <a:r>
-              <a:rPr sz="700" spc="-10">
-                <a:solidFill>
-                  <a:srgbClr val="FFFFFF"/>
-                </a:solidFill>
-                <a:latin typeface="Raleway" pitchFamily="2" charset="77"/>
-                <a:cs typeface="Times New Roman" panose="02020603050405020304"/>
-              </a:rPr>
-              <a:t>Users</a:t>
-            </a:r>
-            <a:endParaRPr sz="700">
-              <a:latin typeface="Raleway" pitchFamily="2" charset="77"/>
-              <a:cs typeface="Times New Roman" panose="02020603050405020304"/>
-            </a:endParaRPr>
-          </a:p>
-        </p:txBody>
-      </p:sp>
-      <p:sp>
-        <p:nvSpPr>
-          <p:cNvPr id="10" name="object 10"/>
-          <p:cNvSpPr txBox="1"/>
-          <p:nvPr/>
-        </p:nvSpPr>
-        <p:spPr>
-          <a:xfrm>
-            <a:off x="5354857" y="2566308"/>
-            <a:ext cx="2269646" cy="666115"/>
-          </a:xfrm>
-          <a:prstGeom prst="rect">
-            <a:avLst/>
-          </a:prstGeom>
-          <a:solidFill>
-            <a:srgbClr val="1E3989"/>
-          </a:solidFill>
-        </p:spPr>
-        <p:txBody>
-          <a:bodyPr vert="horz" wrap="square" lIns="0" tIns="175260" rIns="0" bIns="0" rtlCol="0" anchor="t">
-            <a:spAutoFit/>
-          </a:bodyPr>
-          <a:lstStyle/>
-          <a:p>
-            <a:pPr marL="290830" algn="ctr">
-              <a:lnSpc>
-                <a:spcPct val="100000"/>
-              </a:lnSpc>
-              <a:spcBef>
-                <a:spcPts val="1380"/>
-              </a:spcBef>
-            </a:pPr>
-            <a:r>
-              <a:rPr lang="en-US" altLang="en-GB" b="1" spc="-10">
-                <a:solidFill>
-                  <a:srgbClr val="FFFFFF"/>
-                </a:solidFill>
-                <a:latin typeface="Raleway" pitchFamily="2" charset="77"/>
-                <a:cs typeface="Times New Roman" panose="02020603050405020304"/>
-              </a:rPr>
-              <a:t>96.7%</a:t>
-            </a:r>
-            <a:endParaRPr lang="en-US" altLang="en-GB" b="1" spc="-10">
-              <a:solidFill>
-                <a:srgbClr val="FFFFFF"/>
-              </a:solidFill>
-              <a:latin typeface="Raleway" pitchFamily="2" charset="77"/>
-              <a:cs typeface="Times New Roman" panose="02020603050405020304"/>
-            </a:endParaRPr>
-          </a:p>
-          <a:p>
-            <a:pPr marL="344805" algn="ctr">
-              <a:lnSpc>
-                <a:spcPct val="100000"/>
-              </a:lnSpc>
-              <a:spcBef>
-                <a:spcPts val="830"/>
-              </a:spcBef>
-            </a:pPr>
-            <a:r>
-              <a:rPr sz="700" spc="70">
-                <a:solidFill>
-                  <a:srgbClr val="FFFFFF"/>
-                </a:solidFill>
-                <a:latin typeface="Raleway" pitchFamily="2" charset="77"/>
-                <a:cs typeface="Times New Roman" panose="02020603050405020304"/>
-              </a:rPr>
-              <a:t>New</a:t>
-            </a:r>
-            <a:r>
-              <a:rPr sz="700" spc="-5">
-                <a:solidFill>
-                  <a:srgbClr val="FFFFFF"/>
-                </a:solidFill>
-                <a:latin typeface="Raleway" pitchFamily="2" charset="77"/>
-                <a:cs typeface="Times New Roman" panose="02020603050405020304"/>
-              </a:rPr>
-              <a:t> </a:t>
-            </a:r>
-            <a:r>
-              <a:rPr sz="700" spc="-10">
-                <a:solidFill>
-                  <a:srgbClr val="FFFFFF"/>
-                </a:solidFill>
-                <a:latin typeface="Raleway" pitchFamily="2" charset="77"/>
-                <a:cs typeface="Times New Roman" panose="02020603050405020304"/>
-              </a:rPr>
-              <a:t>Visitors</a:t>
-            </a:r>
-            <a:endParaRPr sz="700">
-              <a:latin typeface="Raleway" pitchFamily="2" charset="77"/>
-              <a:cs typeface="Times New Roman" panose="02020603050405020304"/>
-            </a:endParaRPr>
-          </a:p>
+          <a:p/>
         </p:txBody>
       </p:sp>
     </p:spTree>
@@ -2850,2710 +2561,7 @@
 </p:sld>
 </file>
 
-<file path=ppt/slides/slide4.xml><?xml version="1.0" encoding="utf-8"?>
-<p:sld xmlns:a="http://schemas.openxmlformats.org/drawingml/2006/main" xmlns:r="http://schemas.openxmlformats.org/officeDocument/2006/relationships" xmlns:p="http://schemas.openxmlformats.org/presentationml/2006/main" showMasterSp="0">
-  <p:cSld>
-    <p:spTree>
-      <p:nvGrpSpPr>
-        <p:cNvPr id="1" name=""/>
-        <p:cNvGrpSpPr/>
-        <p:nvPr/>
-      </p:nvGrpSpPr>
-      <p:grpSpPr>
-        <a:xfrm>
-          <a:off x="0" y="0"/>
-          <a:ext cx="0" cy="0"/>
-          <a:chOff x="0" y="0"/>
-          <a:chExt cx="0" cy="0"/>
-        </a:xfrm>
-      </p:grpSpPr>
-      <p:sp>
-        <p:nvSpPr>
-          <p:cNvPr id="2" name="object 2"/>
-          <p:cNvSpPr txBox="1">
-            <a:spLocks noGrp="1"/>
-          </p:cNvSpPr>
-          <p:nvPr>
-            <p:ph type="title"/>
-          </p:nvPr>
-        </p:nvSpPr>
-        <p:spPr>
-          <a:xfrm>
-            <a:off x="401612" y="165009"/>
-            <a:ext cx="4932464" cy="828040"/>
-          </a:xfrm>
-          <a:prstGeom prst="rect">
-            <a:avLst/>
-          </a:prstGeom>
-        </p:spPr>
-        <p:txBody>
-          <a:bodyPr vert="horz" wrap="square" lIns="0" tIns="69215" rIns="0" bIns="0" rtlCol="0" anchor="t">
-            <a:spAutoFit/>
-          </a:bodyPr>
-          <a:lstStyle/>
-          <a:p>
-            <a:pPr marL="226695">
-              <a:lnSpc>
-                <a:spcPct val="100000"/>
-              </a:lnSpc>
-              <a:spcBef>
-                <a:spcPts val="545"/>
-              </a:spcBef>
-            </a:pPr>
-            <a:r>
-              <a:rPr>
-                <a:latin typeface="Raleway" pitchFamily="2" charset="77"/>
-                <a:cs typeface="Times New Roman" panose="02020603050405020304"/>
-              </a:rPr>
-              <a:t>Site</a:t>
-            </a:r>
-            <a:r>
-              <a:rPr spc="40">
-                <a:latin typeface="Raleway" pitchFamily="2" charset="77"/>
-                <a:cs typeface="Times New Roman" panose="02020603050405020304"/>
-              </a:rPr>
-              <a:t> </a:t>
-            </a:r>
-            <a:r>
-              <a:rPr spc="-10">
-                <a:latin typeface="Raleway" pitchFamily="2" charset="77"/>
-                <a:cs typeface="Times New Roman" panose="02020603050405020304"/>
-              </a:rPr>
-              <a:t>Overview</a:t>
-            </a:r>
-            <a:endParaRPr lang="en-US">
-              <a:latin typeface="Raleway" pitchFamily="2" charset="77"/>
-            </a:endParaRPr>
-          </a:p>
-          <a:p>
-            <a:pPr marL="226695">
-              <a:spcBef>
-                <a:spcPts val="280"/>
-              </a:spcBef>
-            </a:pPr>
-            <a:r>
-              <a:rPr sz="1300" b="0">
-                <a:solidFill>
-                  <a:srgbClr val="334154"/>
-                </a:solidFill>
-                <a:latin typeface="Raleway" pitchFamily="2" charset="77"/>
-                <a:cs typeface="Times New Roman" panose="02020603050405020304"/>
-              </a:rPr>
-              <a:t>User engagement metrics confirm a baseline of 633 active users.</a:t>
-            </a:r>
-            <a:endParaRPr sz="1300" b="0">
-              <a:solidFill>
-                <a:srgbClr val="334154"/>
-              </a:solidFill>
-              <a:latin typeface="Raleway" pitchFamily="2" charset="77"/>
-              <a:cs typeface="Times New Roman" panose="02020603050405020304"/>
-            </a:endParaRPr>
-          </a:p>
-        </p:txBody>
-      </p:sp>
-      <p:grpSp>
-        <p:nvGrpSpPr>
-          <p:cNvPr id="3" name="object 3"/>
-          <p:cNvGrpSpPr/>
-          <p:nvPr/>
-        </p:nvGrpSpPr>
-        <p:grpSpPr>
-          <a:xfrm>
-            <a:off x="429768" y="1043355"/>
-            <a:ext cx="2670175" cy="942975"/>
-            <a:chOff x="429768" y="1043355"/>
-            <a:chExt cx="2670175" cy="942975"/>
-          </a:xfrm>
-        </p:grpSpPr>
-        <p:sp>
-          <p:nvSpPr>
-            <p:cNvPr id="4" name="object 4"/>
-            <p:cNvSpPr/>
-            <p:nvPr/>
-          </p:nvSpPr>
-          <p:spPr>
-            <a:xfrm>
-              <a:off x="429768" y="1043355"/>
-              <a:ext cx="2670175" cy="942975"/>
-            </a:xfrm>
-            <a:custGeom>
-              <a:avLst/>
-              <a:gdLst/>
-              <a:ahLst/>
-              <a:cxnLst/>
-              <a:rect l="l" t="t" r="r" b="b"/>
-              <a:pathLst>
-                <a:path w="2670175" h="942975">
-                  <a:moveTo>
-                    <a:pt x="2670048" y="0"/>
-                  </a:moveTo>
-                  <a:lnTo>
-                    <a:pt x="0" y="0"/>
-                  </a:lnTo>
-                  <a:lnTo>
-                    <a:pt x="0" y="942670"/>
-                  </a:lnTo>
-                  <a:lnTo>
-                    <a:pt x="2670048" y="942670"/>
-                  </a:lnTo>
-                  <a:lnTo>
-                    <a:pt x="2670048" y="0"/>
-                  </a:lnTo>
-                  <a:close/>
-                </a:path>
-              </a:pathLst>
-            </a:custGeom>
-            <a:solidFill>
-              <a:srgbClr val="F0F5F8"/>
-            </a:solidFill>
-          </p:spPr>
-          <p:txBody>
-            <a:bodyPr wrap="square" lIns="0" tIns="0" rIns="0" bIns="0" rtlCol="0"/>
-            <a:lstStyle/>
-            <a:p>
-              <a:endParaRPr>
-                <a:latin typeface="Raleway" pitchFamily="2" charset="77"/>
-                <a:cs typeface="Times New Roman" panose="02020603050405020304"/>
-              </a:endParaRPr>
-            </a:p>
-          </p:txBody>
-        </p:sp>
-        <p:sp>
-          <p:nvSpPr>
-            <p:cNvPr id="5" name="object 5"/>
-            <p:cNvSpPr/>
-            <p:nvPr/>
-          </p:nvSpPr>
-          <p:spPr>
-            <a:xfrm>
-              <a:off x="429768" y="1958569"/>
-              <a:ext cx="2670175" cy="27940"/>
-            </a:xfrm>
-            <a:custGeom>
-              <a:avLst/>
-              <a:gdLst/>
-              <a:ahLst/>
-              <a:cxnLst/>
-              <a:rect l="l" t="t" r="r" b="b"/>
-              <a:pathLst>
-                <a:path w="2670175" h="27939">
-                  <a:moveTo>
-                    <a:pt x="2670048" y="0"/>
-                  </a:moveTo>
-                  <a:lnTo>
-                    <a:pt x="0" y="0"/>
-                  </a:lnTo>
-                  <a:lnTo>
-                    <a:pt x="0" y="27456"/>
-                  </a:lnTo>
-                  <a:lnTo>
-                    <a:pt x="2670048" y="27456"/>
-                  </a:lnTo>
-                  <a:lnTo>
-                    <a:pt x="2670048" y="0"/>
-                  </a:lnTo>
-                  <a:close/>
-                </a:path>
-              </a:pathLst>
-            </a:custGeom>
-            <a:solidFill>
-              <a:srgbClr val="1E3989"/>
-            </a:solidFill>
-          </p:spPr>
-          <p:txBody>
-            <a:bodyPr wrap="square" lIns="0" tIns="0" rIns="0" bIns="0" rtlCol="0"/>
-            <a:lstStyle/>
-            <a:p>
-              <a:endParaRPr>
-                <a:latin typeface="Raleway" pitchFamily="2" charset="77"/>
-                <a:cs typeface="Times New Roman" panose="02020603050405020304"/>
-              </a:endParaRPr>
-            </a:p>
-          </p:txBody>
-        </p:sp>
-      </p:grpSp>
-      <p:sp>
-        <p:nvSpPr>
-          <p:cNvPr id="6" name="object 6"/>
-          <p:cNvSpPr txBox="1"/>
-          <p:nvPr/>
-        </p:nvSpPr>
-        <p:spPr>
-          <a:xfrm>
-            <a:off x="429768" y="1170634"/>
-            <a:ext cx="2670175" cy="616585"/>
-          </a:xfrm>
-          <a:prstGeom prst="rect">
-            <a:avLst/>
-          </a:prstGeom>
-        </p:spPr>
-        <p:txBody>
-          <a:bodyPr vert="horz" wrap="square" lIns="0" tIns="13335" rIns="0" bIns="0" rtlCol="0" anchor="t">
-            <a:spAutoFit/>
-          </a:bodyPr>
-          <a:lstStyle/>
-          <a:p>
-            <a:pPr marL="141605">
-              <a:lnSpc>
-                <a:spcPct val="100000"/>
-              </a:lnSpc>
-              <a:spcBef>
-                <a:spcPts val="105"/>
-              </a:spcBef>
-            </a:pPr>
-            <a:r>
-              <a:rPr lang="en-US" altLang="en-GB" sz="2450" b="1" spc="-10">
-                <a:solidFill>
-                  <a:srgbClr val="1E3989"/>
-                </a:solidFill>
-                <a:latin typeface="Raleway" pitchFamily="2" charset="77"/>
-                <a:cs typeface="Times New Roman" panose="02020603050405020304"/>
-              </a:rPr>
-              <a:t>633</a:t>
-            </a:r>
-            <a:endParaRPr lang="en-US" altLang="en-GB" sz="2450" b="1" spc="-10">
-              <a:solidFill>
-                <a:srgbClr val="1E3989"/>
-              </a:solidFill>
-              <a:latin typeface="Raleway" pitchFamily="2" charset="77"/>
-              <a:cs typeface="Times New Roman" panose="02020603050405020304"/>
-            </a:endParaRPr>
-          </a:p>
-          <a:p>
-            <a:pPr marL="141605">
-              <a:lnSpc>
-                <a:spcPct val="100000"/>
-              </a:lnSpc>
-              <a:spcBef>
-                <a:spcPts val="805"/>
-              </a:spcBef>
-            </a:pPr>
-            <a:r>
-              <a:rPr sz="800" b="1">
-                <a:solidFill>
-                  <a:srgbClr val="63748A"/>
-                </a:solidFill>
-                <a:latin typeface="Raleway" pitchFamily="2" charset="77"/>
-                <a:cs typeface="Times New Roman" panose="02020603050405020304"/>
-              </a:rPr>
-              <a:t>Total Active Users</a:t>
-            </a:r>
-            <a:endParaRPr sz="800" b="1">
-              <a:solidFill>
-                <a:srgbClr val="63748A"/>
-              </a:solidFill>
-              <a:latin typeface="Raleway" pitchFamily="2" charset="77"/>
-              <a:cs typeface="Times New Roman" panose="02020603050405020304"/>
-            </a:endParaRPr>
-          </a:p>
-        </p:txBody>
-      </p:sp>
-      <p:grpSp>
-        <p:nvGrpSpPr>
-          <p:cNvPr id="7" name="object 7"/>
-          <p:cNvGrpSpPr/>
-          <p:nvPr/>
-        </p:nvGrpSpPr>
-        <p:grpSpPr>
-          <a:xfrm>
-            <a:off x="3236976" y="1043355"/>
-            <a:ext cx="2670175" cy="942975"/>
-            <a:chOff x="3236976" y="1043355"/>
-            <a:chExt cx="2670175" cy="942975"/>
-          </a:xfrm>
-        </p:grpSpPr>
-        <p:sp>
-          <p:nvSpPr>
-            <p:cNvPr id="8" name="object 8"/>
-            <p:cNvSpPr/>
-            <p:nvPr/>
-          </p:nvSpPr>
-          <p:spPr>
-            <a:xfrm>
-              <a:off x="3236976" y="1043355"/>
-              <a:ext cx="2670175" cy="942975"/>
-            </a:xfrm>
-            <a:custGeom>
-              <a:avLst/>
-              <a:gdLst/>
-              <a:ahLst/>
-              <a:cxnLst/>
-              <a:rect l="l" t="t" r="r" b="b"/>
-              <a:pathLst>
-                <a:path w="2670175" h="942975">
-                  <a:moveTo>
-                    <a:pt x="2670048" y="0"/>
-                  </a:moveTo>
-                  <a:lnTo>
-                    <a:pt x="0" y="0"/>
-                  </a:lnTo>
-                  <a:lnTo>
-                    <a:pt x="0" y="942670"/>
-                  </a:lnTo>
-                  <a:lnTo>
-                    <a:pt x="2670048" y="942670"/>
-                  </a:lnTo>
-                  <a:lnTo>
-                    <a:pt x="2670048" y="0"/>
-                  </a:lnTo>
-                  <a:close/>
-                </a:path>
-              </a:pathLst>
-            </a:custGeom>
-            <a:solidFill>
-              <a:srgbClr val="F0F5F8"/>
-            </a:solidFill>
-          </p:spPr>
-          <p:txBody>
-            <a:bodyPr wrap="square" lIns="0" tIns="0" rIns="0" bIns="0" rtlCol="0"/>
-            <a:lstStyle/>
-            <a:p>
-              <a:endParaRPr>
-                <a:latin typeface="Raleway" pitchFamily="2" charset="77"/>
-                <a:cs typeface="Times New Roman" panose="02020603050405020304"/>
-              </a:endParaRPr>
-            </a:p>
-          </p:txBody>
-        </p:sp>
-        <p:sp>
-          <p:nvSpPr>
-            <p:cNvPr id="9" name="object 9"/>
-            <p:cNvSpPr/>
-            <p:nvPr/>
-          </p:nvSpPr>
-          <p:spPr>
-            <a:xfrm>
-              <a:off x="3236976" y="1958569"/>
-              <a:ext cx="2670175" cy="27940"/>
-            </a:xfrm>
-            <a:custGeom>
-              <a:avLst/>
-              <a:gdLst/>
-              <a:ahLst/>
-              <a:cxnLst/>
-              <a:rect l="l" t="t" r="r" b="b"/>
-              <a:pathLst>
-                <a:path w="2670175" h="27939">
-                  <a:moveTo>
-                    <a:pt x="2670048" y="0"/>
-                  </a:moveTo>
-                  <a:lnTo>
-                    <a:pt x="0" y="0"/>
-                  </a:lnTo>
-                  <a:lnTo>
-                    <a:pt x="0" y="27456"/>
-                  </a:lnTo>
-                  <a:lnTo>
-                    <a:pt x="2670048" y="27456"/>
-                  </a:lnTo>
-                  <a:lnTo>
-                    <a:pt x="2670048" y="0"/>
-                  </a:lnTo>
-                  <a:close/>
-                </a:path>
-              </a:pathLst>
-            </a:custGeom>
-            <a:solidFill>
-              <a:srgbClr val="1E3989"/>
-            </a:solidFill>
-          </p:spPr>
-          <p:txBody>
-            <a:bodyPr wrap="square" lIns="0" tIns="0" rIns="0" bIns="0" rtlCol="0"/>
-            <a:lstStyle/>
-            <a:p>
-              <a:endParaRPr>
-                <a:latin typeface="Raleway" pitchFamily="2" charset="77"/>
-                <a:cs typeface="Times New Roman" panose="02020603050405020304"/>
-              </a:endParaRPr>
-            </a:p>
-          </p:txBody>
-        </p:sp>
-      </p:grpSp>
-      <p:sp>
-        <p:nvSpPr>
-          <p:cNvPr id="10" name="object 10"/>
-          <p:cNvSpPr txBox="1"/>
-          <p:nvPr/>
-        </p:nvSpPr>
-        <p:spPr>
-          <a:xfrm>
-            <a:off x="3236976" y="1170634"/>
-            <a:ext cx="2670175" cy="616585"/>
-          </a:xfrm>
-          <a:prstGeom prst="rect">
-            <a:avLst/>
-          </a:prstGeom>
-        </p:spPr>
-        <p:txBody>
-          <a:bodyPr vert="horz" wrap="square" lIns="0" tIns="13335" rIns="0" bIns="0" rtlCol="0" anchor="t">
-            <a:spAutoFit/>
-          </a:bodyPr>
-          <a:lstStyle/>
-          <a:p>
-            <a:pPr marL="147320">
-              <a:lnSpc>
-                <a:spcPct val="100000"/>
-              </a:lnSpc>
-              <a:spcBef>
-                <a:spcPts val="105"/>
-              </a:spcBef>
-            </a:pPr>
-            <a:r>
-              <a:rPr lang="en-US" altLang="en-GB" sz="2450" b="1" spc="-10">
-                <a:solidFill>
-                  <a:srgbClr val="1E3989"/>
-                </a:solidFill>
-                <a:latin typeface="Raleway" pitchFamily="2" charset="77"/>
-                <a:cs typeface="Times New Roman" panose="02020603050405020304"/>
-              </a:rPr>
-              <a:t>613</a:t>
-            </a:r>
-            <a:endParaRPr lang="en-US" altLang="en-GB" sz="2450" b="1" spc="-10">
-              <a:solidFill>
-                <a:srgbClr val="1E3989"/>
-              </a:solidFill>
-              <a:latin typeface="Raleway" pitchFamily="2" charset="77"/>
-              <a:cs typeface="Times New Roman" panose="02020603050405020304"/>
-            </a:endParaRPr>
-          </a:p>
-          <a:p>
-            <a:pPr marL="147320">
-              <a:lnSpc>
-                <a:spcPct val="100000"/>
-              </a:lnSpc>
-              <a:spcBef>
-                <a:spcPts val="805"/>
-              </a:spcBef>
-            </a:pPr>
-            <a:r>
-              <a:rPr sz="800" b="1">
-                <a:solidFill>
-                  <a:srgbClr val="63748A"/>
-                </a:solidFill>
-                <a:latin typeface="Raleway" pitchFamily="2" charset="77"/>
-                <a:cs typeface="Times New Roman" panose="02020603050405020304"/>
-              </a:rPr>
-              <a:t>New Users (96.7%)</a:t>
-            </a:r>
-            <a:endParaRPr sz="800" b="1">
-              <a:solidFill>
-                <a:srgbClr val="63748A"/>
-              </a:solidFill>
-              <a:latin typeface="Raleway" pitchFamily="2" charset="77"/>
-              <a:cs typeface="Times New Roman" panose="02020603050405020304"/>
-            </a:endParaRPr>
-          </a:p>
-        </p:txBody>
-      </p:sp>
-      <p:grpSp>
-        <p:nvGrpSpPr>
-          <p:cNvPr id="11" name="object 11"/>
-          <p:cNvGrpSpPr/>
-          <p:nvPr/>
-        </p:nvGrpSpPr>
-        <p:grpSpPr>
-          <a:xfrm>
-            <a:off x="6044184" y="1043355"/>
-            <a:ext cx="2670175" cy="942975"/>
-            <a:chOff x="6044184" y="1043355"/>
-            <a:chExt cx="2670175" cy="942975"/>
-          </a:xfrm>
-        </p:grpSpPr>
-        <p:sp>
-          <p:nvSpPr>
-            <p:cNvPr id="12" name="object 12"/>
-            <p:cNvSpPr/>
-            <p:nvPr/>
-          </p:nvSpPr>
-          <p:spPr>
-            <a:xfrm>
-              <a:off x="6044184" y="1043355"/>
-              <a:ext cx="2670175" cy="942975"/>
-            </a:xfrm>
-            <a:custGeom>
-              <a:avLst/>
-              <a:gdLst/>
-              <a:ahLst/>
-              <a:cxnLst/>
-              <a:rect l="l" t="t" r="r" b="b"/>
-              <a:pathLst>
-                <a:path w="2670175" h="942975">
-                  <a:moveTo>
-                    <a:pt x="2670048" y="0"/>
-                  </a:moveTo>
-                  <a:lnTo>
-                    <a:pt x="0" y="0"/>
-                  </a:lnTo>
-                  <a:lnTo>
-                    <a:pt x="0" y="942670"/>
-                  </a:lnTo>
-                  <a:lnTo>
-                    <a:pt x="2670048" y="942670"/>
-                  </a:lnTo>
-                  <a:lnTo>
-                    <a:pt x="2670048" y="0"/>
-                  </a:lnTo>
-                  <a:close/>
-                </a:path>
-              </a:pathLst>
-            </a:custGeom>
-            <a:solidFill>
-              <a:srgbClr val="F0F5F8"/>
-            </a:solidFill>
-          </p:spPr>
-          <p:txBody>
-            <a:bodyPr wrap="square" lIns="0" tIns="0" rIns="0" bIns="0" rtlCol="0"/>
-            <a:lstStyle/>
-            <a:p>
-              <a:endParaRPr>
-                <a:latin typeface="Raleway" pitchFamily="2" charset="77"/>
-                <a:cs typeface="Times New Roman" panose="02020603050405020304"/>
-              </a:endParaRPr>
-            </a:p>
-          </p:txBody>
-        </p:sp>
-        <p:sp>
-          <p:nvSpPr>
-            <p:cNvPr id="13" name="object 13"/>
-            <p:cNvSpPr/>
-            <p:nvPr/>
-          </p:nvSpPr>
-          <p:spPr>
-            <a:xfrm>
-              <a:off x="6044184" y="1958569"/>
-              <a:ext cx="2670175" cy="27940"/>
-            </a:xfrm>
-            <a:custGeom>
-              <a:avLst/>
-              <a:gdLst/>
-              <a:ahLst/>
-              <a:cxnLst/>
-              <a:rect l="l" t="t" r="r" b="b"/>
-              <a:pathLst>
-                <a:path w="2670175" h="27939">
-                  <a:moveTo>
-                    <a:pt x="2670048" y="0"/>
-                  </a:moveTo>
-                  <a:lnTo>
-                    <a:pt x="0" y="0"/>
-                  </a:lnTo>
-                  <a:lnTo>
-                    <a:pt x="0" y="27456"/>
-                  </a:lnTo>
-                  <a:lnTo>
-                    <a:pt x="2670048" y="27456"/>
-                  </a:lnTo>
-                  <a:lnTo>
-                    <a:pt x="2670048" y="0"/>
-                  </a:lnTo>
-                  <a:close/>
-                </a:path>
-              </a:pathLst>
-            </a:custGeom>
-            <a:solidFill>
-              <a:srgbClr val="1E3989"/>
-            </a:solidFill>
-          </p:spPr>
-          <p:txBody>
-            <a:bodyPr wrap="square" lIns="0" tIns="0" rIns="0" bIns="0" rtlCol="0"/>
-            <a:lstStyle/>
-            <a:p>
-              <a:endParaRPr>
-                <a:latin typeface="Raleway" pitchFamily="2" charset="77"/>
-                <a:cs typeface="Times New Roman" panose="02020603050405020304"/>
-              </a:endParaRPr>
-            </a:p>
-          </p:txBody>
-        </p:sp>
-      </p:grpSp>
-      <p:sp>
-        <p:nvSpPr>
-          <p:cNvPr id="14" name="object 14"/>
-          <p:cNvSpPr txBox="1"/>
-          <p:nvPr/>
-        </p:nvSpPr>
-        <p:spPr>
-          <a:xfrm>
-            <a:off x="5969635" y="1170940"/>
-            <a:ext cx="2744470" cy="616585"/>
-          </a:xfrm>
-          <a:prstGeom prst="rect">
-            <a:avLst/>
-          </a:prstGeom>
-        </p:spPr>
-        <p:txBody>
-          <a:bodyPr vert="horz" wrap="square" lIns="0" tIns="13335" rIns="0" bIns="0" rtlCol="0" anchor="t">
-            <a:spAutoFit/>
-          </a:bodyPr>
-          <a:lstStyle/>
-          <a:p>
-            <a:pPr marL="153035">
-              <a:spcBef>
-                <a:spcPts val="105"/>
-              </a:spcBef>
-            </a:pPr>
-            <a:r>
-              <a:rPr lang="en-US" altLang="en-GB" sz="2450" b="1" spc="-25">
-                <a:solidFill>
-                  <a:srgbClr val="1E3989"/>
-                </a:solidFill>
-                <a:latin typeface="Raleway" pitchFamily="2" charset="77"/>
-                <a:cs typeface="Times New Roman" panose="02020603050405020304"/>
-              </a:rPr>
-              <a:t>1m 08s</a:t>
-            </a:r>
-            <a:endParaRPr lang="en-US" altLang="en-GB" sz="2450" b="1" spc="-25">
-              <a:solidFill>
-                <a:srgbClr val="1E3989"/>
-              </a:solidFill>
-              <a:latin typeface="Raleway" pitchFamily="2" charset="77"/>
-              <a:cs typeface="Times New Roman" panose="02020603050405020304"/>
-            </a:endParaRPr>
-          </a:p>
-          <a:p>
-            <a:pPr marL="153035">
-              <a:lnSpc>
-                <a:spcPct val="100000"/>
-              </a:lnSpc>
-              <a:spcBef>
-                <a:spcPts val="805"/>
-              </a:spcBef>
-            </a:pPr>
-            <a:r>
-              <a:rPr sz="800" b="1" spc="10">
-                <a:solidFill>
-                  <a:srgbClr val="63748A"/>
-                </a:solidFill>
-                <a:latin typeface="Raleway" pitchFamily="2" charset="77"/>
-                <a:cs typeface="Times New Roman" panose="02020603050405020304"/>
-              </a:rPr>
-              <a:t>Avg Engagement Time</a:t>
-            </a:r>
-            <a:endParaRPr sz="800" b="1" spc="10">
-              <a:solidFill>
-                <a:srgbClr val="63748A"/>
-              </a:solidFill>
-              <a:latin typeface="Raleway" pitchFamily="2" charset="77"/>
-              <a:cs typeface="Times New Roman" panose="02020603050405020304"/>
-            </a:endParaRPr>
-          </a:p>
-        </p:txBody>
-      </p:sp>
-      <p:sp>
-        <p:nvSpPr>
-          <p:cNvPr id="15" name="object 15"/>
-          <p:cNvSpPr txBox="1"/>
-          <p:nvPr/>
-        </p:nvSpPr>
-        <p:spPr>
-          <a:xfrm>
-            <a:off x="434340" y="2127897"/>
-            <a:ext cx="3816733" cy="1752600"/>
-          </a:xfrm>
-          <a:prstGeom prst="rect">
-            <a:avLst/>
-          </a:prstGeom>
-          <a:ln w="9152">
-            <a:solidFill>
-              <a:srgbClr val="E1E8EF"/>
-            </a:solidFill>
-          </a:ln>
-        </p:spPr>
-        <p:txBody>
-          <a:bodyPr vert="horz" wrap="square" lIns="0" tIns="60325" rIns="0" bIns="0" rtlCol="0" anchor="t">
-            <a:spAutoFit/>
-          </a:bodyPr>
-          <a:lstStyle/>
-          <a:p>
-            <a:r>
-              <a:rPr lang="en-US" altLang="en-US" sz="1000" spc="-10">
-                <a:solidFill>
-                  <a:srgbClr val="334154"/>
-                </a:solidFill>
-                <a:latin typeface="Raleway" pitchFamily="2" charset="77"/>
-                <a:cs typeface="Times New Roman" panose="02020603050405020304"/>
-              </a:rPr>
-              <a:t>The reporting period indicates solid and encouraging performance for the Dicomm website, with 633 active users documented. Of this total, 612 users (96.7%) were new visitors, emphasizing continued strong brand discovery and effective reach and awareness initiatives.</a:t>
-            </a:r>
-            <a:endParaRPr lang="en-US" altLang="en-US" sz="1000" spc="-10">
-              <a:solidFill>
-                <a:srgbClr val="334154"/>
-              </a:solidFill>
-              <a:latin typeface="Raleway" pitchFamily="2" charset="77"/>
-              <a:cs typeface="Times New Roman" panose="02020603050405020304"/>
-            </a:endParaRPr>
-          </a:p>
-          <a:p>
-            <a:endParaRPr lang="en-US" altLang="en-US" sz="1000" spc="-10">
-              <a:solidFill>
-                <a:srgbClr val="334154"/>
-              </a:solidFill>
-              <a:latin typeface="Raleway" pitchFamily="2" charset="77"/>
-              <a:cs typeface="Times New Roman" panose="02020603050405020304"/>
-            </a:endParaRPr>
-          </a:p>
-          <a:p>
-            <a:r>
-              <a:rPr lang="en-US" altLang="en-US" sz="1000" spc="-10">
-                <a:solidFill>
-                  <a:srgbClr val="334154"/>
-                </a:solidFill>
-                <a:latin typeface="Raleway" pitchFamily="2" charset="77"/>
-                <a:cs typeface="Times New Roman" panose="02020603050405020304"/>
-              </a:rPr>
-              <a:t>An average engagement time of 1m 08s signifies moderate yet meaningful user interaction. Although marginally below longer-form corporate engagement benchmarks, this duration indicates users are reviewing essential information instead of immediate departure.</a:t>
-            </a:r>
-            <a:endParaRPr lang="en-US" altLang="en-US" sz="1000" spc="-10">
-              <a:solidFill>
-                <a:srgbClr val="334154"/>
-              </a:solidFill>
-              <a:latin typeface="Raleway" pitchFamily="2" charset="77"/>
-              <a:cs typeface="Times New Roman" panose="02020603050405020304"/>
-            </a:endParaRPr>
-          </a:p>
-        </p:txBody>
-      </p:sp>
-      <p:grpSp>
-        <p:nvGrpSpPr>
-          <p:cNvPr id="16" name="object 16"/>
-          <p:cNvGrpSpPr/>
-          <p:nvPr/>
-        </p:nvGrpSpPr>
-        <p:grpSpPr>
-          <a:xfrm>
-            <a:off x="4251073" y="2127897"/>
-            <a:ext cx="4681855" cy="2892425"/>
-            <a:chOff x="4384547" y="2127897"/>
-            <a:chExt cx="4681855" cy="2892425"/>
-          </a:xfrm>
-        </p:grpSpPr>
-        <p:sp>
-          <p:nvSpPr>
-            <p:cNvPr id="17" name="object 17"/>
-            <p:cNvSpPr/>
-            <p:nvPr/>
-          </p:nvSpPr>
-          <p:spPr>
-            <a:xfrm>
-              <a:off x="4384547" y="2127897"/>
-              <a:ext cx="4681855" cy="2892425"/>
-            </a:xfrm>
-            <a:custGeom>
-              <a:avLst/>
-              <a:gdLst/>
-              <a:ahLst/>
-              <a:cxnLst/>
-              <a:rect l="l" t="t" r="r" b="b"/>
-              <a:pathLst>
-                <a:path w="4681855" h="2892425">
-                  <a:moveTo>
-                    <a:pt x="4681728" y="0"/>
-                  </a:moveTo>
-                  <a:lnTo>
-                    <a:pt x="0" y="0"/>
-                  </a:lnTo>
-                  <a:lnTo>
-                    <a:pt x="0" y="2892044"/>
-                  </a:lnTo>
-                  <a:lnTo>
-                    <a:pt x="4681728" y="2892044"/>
-                  </a:lnTo>
-                  <a:lnTo>
-                    <a:pt x="4681728" y="0"/>
-                  </a:lnTo>
-                  <a:close/>
-                </a:path>
-              </a:pathLst>
-            </a:custGeom>
-            <a:solidFill>
-              <a:srgbClr val="F8F9FB"/>
-            </a:solidFill>
-          </p:spPr>
-          <p:txBody>
-            <a:bodyPr wrap="square" lIns="0" tIns="0" rIns="0" bIns="0" rtlCol="0"/>
-            <a:lstStyle/>
-            <a:p>
-              <a:endParaRPr>
-                <a:latin typeface="Raleway" pitchFamily="2" charset="77"/>
-                <a:cs typeface="Times New Roman" panose="02020603050405020304"/>
-              </a:endParaRPr>
-            </a:p>
-          </p:txBody>
-        </p:sp>
-        <p:sp>
-          <p:nvSpPr>
-            <p:cNvPr id="18" name="object 18"/>
-            <p:cNvSpPr/>
-            <p:nvPr/>
-          </p:nvSpPr>
-          <p:spPr>
-            <a:xfrm>
-              <a:off x="4384547" y="2127897"/>
-              <a:ext cx="4681855" cy="2892425"/>
-            </a:xfrm>
-            <a:custGeom>
-              <a:avLst/>
-              <a:gdLst/>
-              <a:ahLst/>
-              <a:cxnLst/>
-              <a:rect l="l" t="t" r="r" b="b"/>
-              <a:pathLst>
-                <a:path w="4681855" h="2892425">
-                  <a:moveTo>
-                    <a:pt x="0" y="2892044"/>
-                  </a:moveTo>
-                  <a:lnTo>
-                    <a:pt x="4681728" y="2892044"/>
-                  </a:lnTo>
-                  <a:lnTo>
-                    <a:pt x="4681728" y="0"/>
-                  </a:lnTo>
-                  <a:lnTo>
-                    <a:pt x="0" y="0"/>
-                  </a:lnTo>
-                  <a:lnTo>
-                    <a:pt x="0" y="2892044"/>
-                  </a:lnTo>
-                  <a:close/>
-                </a:path>
-              </a:pathLst>
-            </a:custGeom>
-            <a:ln w="9152">
-              <a:solidFill>
-                <a:srgbClr val="E1E8EF"/>
-              </a:solidFill>
-            </a:ln>
-          </p:spPr>
-          <p:txBody>
-            <a:bodyPr wrap="square" lIns="0" tIns="0" rIns="0" bIns="0" rtlCol="0"/>
-            <a:lstStyle/>
-            <a:p>
-              <a:endParaRPr>
-                <a:latin typeface="Raleway" pitchFamily="2" charset="77"/>
-                <a:cs typeface="Times New Roman" panose="02020603050405020304"/>
-              </a:endParaRPr>
-            </a:p>
-          </p:txBody>
-        </p:sp>
-      </p:grpSp>
-      <p:pic>
-        <p:nvPicPr>
-          <p:cNvPr id="20" name="Picture 19" descr="Screenshot 2026-06-29 at 19.02.55"/>
-          <p:cNvPicPr>
-            <a:picLocks noChangeAspect="1"/>
-          </p:cNvPicPr>
-          <p:nvPr/>
-        </p:nvPicPr>
-        <p:blipFill>
-          <a:blip r:embed="rId1"/>
-          <a:stretch>
-            <a:fillRect/>
-          </a:stretch>
-        </p:blipFill>
-        <p:spPr>
-          <a:xfrm>
-            <a:off x="4495800" y="2433320"/>
-            <a:ext cx="4244975" cy="2413000"/>
-          </a:xfrm>
-          <a:prstGeom prst="rect">
-            <a:avLst/>
-          </a:prstGeom>
-        </p:spPr>
-      </p:pic>
-    </p:spTree>
-  </p:cSld>
-  <p:clrMapOvr>
-    <a:masterClrMapping/>
-  </p:clrMapOvr>
-</p:sld>
-</file>
-
-<file path=ppt/slides/slide5.xml><?xml version="1.0" encoding="utf-8"?>
-<p:sld xmlns:a="http://schemas.openxmlformats.org/drawingml/2006/main" xmlns:r="http://schemas.openxmlformats.org/officeDocument/2006/relationships" xmlns:p="http://schemas.openxmlformats.org/presentationml/2006/main" showMasterSp="0">
-  <p:cSld>
-    <p:spTree>
-      <p:nvGrpSpPr>
-        <p:cNvPr id="1" name=""/>
-        <p:cNvGrpSpPr/>
-        <p:nvPr/>
-      </p:nvGrpSpPr>
-      <p:grpSpPr>
-        <a:xfrm>
-          <a:off x="0" y="0"/>
-          <a:ext cx="0" cy="0"/>
-          <a:chOff x="0" y="0"/>
-          <a:chExt cx="0" cy="0"/>
-        </a:xfrm>
-      </p:grpSpPr>
-      <p:sp>
-        <p:nvSpPr>
-          <p:cNvPr id="2" name="object 2"/>
-          <p:cNvSpPr txBox="1">
-            <a:spLocks noGrp="1"/>
-          </p:cNvSpPr>
-          <p:nvPr>
-            <p:ph type="title"/>
-          </p:nvPr>
-        </p:nvSpPr>
-        <p:spPr>
-          <a:prstGeom prst="rect">
-            <a:avLst/>
-          </a:prstGeom>
-        </p:spPr>
-        <p:txBody>
-          <a:bodyPr vert="horz" wrap="square" lIns="0" tIns="70485" rIns="0" bIns="0" rtlCol="0" anchor="t">
-            <a:spAutoFit/>
-          </a:bodyPr>
-          <a:lstStyle/>
-          <a:p>
-            <a:pPr marL="26670">
-              <a:lnSpc>
-                <a:spcPct val="100000"/>
-              </a:lnSpc>
-              <a:spcBef>
-                <a:spcPts val="555"/>
-              </a:spcBef>
-            </a:pPr>
-            <a:r>
-              <a:rPr spc="65">
-                <a:latin typeface="Raleway" pitchFamily="2" charset="77"/>
-                <a:cs typeface="Times New Roman" panose="02020603050405020304"/>
-              </a:rPr>
-              <a:t>Geographic</a:t>
-            </a:r>
-            <a:r>
-              <a:rPr spc="-50">
-                <a:latin typeface="Raleway" pitchFamily="2" charset="77"/>
-                <a:cs typeface="Times New Roman" panose="02020603050405020304"/>
-              </a:rPr>
-              <a:t> </a:t>
-            </a:r>
-            <a:r>
-              <a:rPr spc="-10">
-                <a:latin typeface="Raleway" pitchFamily="2" charset="77"/>
-                <a:cs typeface="Times New Roman" panose="02020603050405020304"/>
-              </a:rPr>
-              <a:t>Performance</a:t>
-            </a:r>
-            <a:endParaRPr lang="en-US" spc="-10">
-              <a:latin typeface="Raleway" pitchFamily="2" charset="77"/>
-              <a:cs typeface="Times New Roman" panose="02020603050405020304"/>
-            </a:endParaRPr>
-          </a:p>
-          <a:p>
-            <a:pPr marL="26670">
-              <a:lnSpc>
-                <a:spcPct val="100000"/>
-              </a:lnSpc>
-              <a:spcBef>
-                <a:spcPts val="285"/>
-              </a:spcBef>
-            </a:pPr>
-            <a:r>
-              <a:rPr sz="1300" b="0">
-                <a:solidFill>
-                  <a:srgbClr val="334154"/>
-                </a:solidFill>
-                <a:latin typeface="Raleway" pitchFamily="2" charset="77"/>
-                <a:cs typeface="Times New Roman" panose="02020603050405020304"/>
-              </a:rPr>
-              <a:t>Zimbabwe's Market Dominance and International Growth Opportunity.</a:t>
-            </a:r>
-            <a:endParaRPr sz="1300" b="0">
-              <a:solidFill>
-                <a:srgbClr val="334154"/>
-              </a:solidFill>
-              <a:latin typeface="Raleway" pitchFamily="2" charset="77"/>
-              <a:cs typeface="Times New Roman" panose="02020603050405020304"/>
-            </a:endParaRPr>
-          </a:p>
-        </p:txBody>
-      </p:sp>
-      <p:grpSp>
-        <p:nvGrpSpPr>
-          <p:cNvPr id="3" name="object 3"/>
-          <p:cNvGrpSpPr/>
-          <p:nvPr/>
-        </p:nvGrpSpPr>
-        <p:grpSpPr>
-          <a:xfrm>
-            <a:off x="183515" y="984885"/>
-            <a:ext cx="3987165" cy="4080510"/>
-            <a:chOff x="228600" y="988466"/>
-            <a:chExt cx="3987165" cy="3752850"/>
-          </a:xfrm>
-        </p:grpSpPr>
-        <p:sp>
-          <p:nvSpPr>
-            <p:cNvPr id="4" name="object 4"/>
-            <p:cNvSpPr/>
-            <p:nvPr/>
-          </p:nvSpPr>
-          <p:spPr>
-            <a:xfrm>
-              <a:off x="228600" y="988466"/>
-              <a:ext cx="3987165" cy="3752850"/>
-            </a:xfrm>
-            <a:custGeom>
-              <a:avLst/>
-              <a:gdLst/>
-              <a:ahLst/>
-              <a:cxnLst/>
-              <a:rect l="l" t="t" r="r" b="b"/>
-              <a:pathLst>
-                <a:path w="3987165" h="3752850">
-                  <a:moveTo>
-                    <a:pt x="3986784" y="0"/>
-                  </a:moveTo>
-                  <a:lnTo>
-                    <a:pt x="0" y="0"/>
-                  </a:lnTo>
-                  <a:lnTo>
-                    <a:pt x="0" y="3752341"/>
-                  </a:lnTo>
-                  <a:lnTo>
-                    <a:pt x="3986784" y="3752341"/>
-                  </a:lnTo>
-                  <a:lnTo>
-                    <a:pt x="3986784" y="0"/>
-                  </a:lnTo>
-                  <a:close/>
-                </a:path>
-              </a:pathLst>
-            </a:custGeom>
-            <a:solidFill>
-              <a:srgbClr val="F8F9FB"/>
-            </a:solidFill>
-          </p:spPr>
-          <p:txBody>
-            <a:bodyPr wrap="square" lIns="0" tIns="0" rIns="0" bIns="0" rtlCol="0"/>
-            <a:lstStyle/>
-            <a:p>
-              <a:endParaRPr>
-                <a:latin typeface="Raleway" pitchFamily="2" charset="77"/>
-              </a:endParaRPr>
-            </a:p>
-          </p:txBody>
-        </p:sp>
-        <p:sp>
-          <p:nvSpPr>
-            <p:cNvPr id="5" name="object 5"/>
-            <p:cNvSpPr/>
-            <p:nvPr/>
-          </p:nvSpPr>
-          <p:spPr>
-            <a:xfrm>
-              <a:off x="228600" y="988466"/>
-              <a:ext cx="45720" cy="3752850"/>
-            </a:xfrm>
-            <a:custGeom>
-              <a:avLst/>
-              <a:gdLst/>
-              <a:ahLst/>
-              <a:cxnLst/>
-              <a:rect l="l" t="t" r="r" b="b"/>
-              <a:pathLst>
-                <a:path w="45720" h="3752850">
-                  <a:moveTo>
-                    <a:pt x="45720" y="0"/>
-                  </a:moveTo>
-                  <a:lnTo>
-                    <a:pt x="0" y="0"/>
-                  </a:lnTo>
-                  <a:lnTo>
-                    <a:pt x="0" y="3752341"/>
-                  </a:lnTo>
-                  <a:lnTo>
-                    <a:pt x="45720" y="3752341"/>
-                  </a:lnTo>
-                  <a:lnTo>
-                    <a:pt x="45720" y="0"/>
-                  </a:lnTo>
-                  <a:close/>
-                </a:path>
-              </a:pathLst>
-            </a:custGeom>
-            <a:solidFill>
-              <a:srgbClr val="1E3989"/>
-            </a:solidFill>
-          </p:spPr>
-          <p:txBody>
-            <a:bodyPr wrap="square" lIns="0" tIns="0" rIns="0" bIns="0" rtlCol="0"/>
-            <a:lstStyle/>
-            <a:p>
-              <a:endParaRPr>
-                <a:latin typeface="Raleway" pitchFamily="2" charset="77"/>
-              </a:endParaRPr>
-            </a:p>
-          </p:txBody>
-        </p:sp>
-      </p:grpSp>
-      <p:sp>
-        <p:nvSpPr>
-          <p:cNvPr id="6" name="object 6"/>
-          <p:cNvSpPr txBox="1"/>
-          <p:nvPr/>
-        </p:nvSpPr>
-        <p:spPr>
-          <a:xfrm>
-            <a:off x="295910" y="1508125"/>
-            <a:ext cx="3888105" cy="2678430"/>
-          </a:xfrm>
-          <a:prstGeom prst="rect">
-            <a:avLst/>
-          </a:prstGeom>
-        </p:spPr>
-        <p:txBody>
-          <a:bodyPr vert="horz" wrap="square" lIns="0" tIns="11430" rIns="0" bIns="0" rtlCol="0" anchor="t">
-            <a:noAutofit/>
-          </a:bodyPr>
-          <a:lstStyle/>
-          <a:p>
-            <a:r>
-              <a:rPr lang="en-US" altLang="en-US" sz="1000" spc="-10">
-                <a:solidFill>
-                  <a:srgbClr val="334154"/>
-                </a:solidFill>
-                <a:latin typeface="Raleway" pitchFamily="2" charset="77"/>
-                <a:cs typeface="Times New Roman" panose="02020603050405020304"/>
-              </a:rPr>
-              <a:t>Zimbabwe leads geographic performance as the dominant market, contributing 366 users (57.82% of total traffic), with a 60.88% engagement rate and 0.91 engaged sessions per active user, demonstrating substantial volume and consistent interaction.</a:t>
-            </a:r>
-            <a:endParaRPr lang="en-US" altLang="en-US" sz="1000" spc="-10">
-              <a:solidFill>
-                <a:srgbClr val="334154"/>
-              </a:solidFill>
-              <a:latin typeface="Raleway" pitchFamily="2" charset="77"/>
-              <a:cs typeface="Times New Roman" panose="02020603050405020304"/>
-            </a:endParaRPr>
-          </a:p>
-          <a:p>
-            <a:endParaRPr lang="en-US" altLang="en-US" sz="1000" spc="-10">
-              <a:solidFill>
-                <a:srgbClr val="334154"/>
-              </a:solidFill>
-              <a:latin typeface="Raleway" pitchFamily="2" charset="77"/>
-              <a:cs typeface="Times New Roman" panose="02020603050405020304"/>
-            </a:endParaRPr>
-          </a:p>
-          <a:p>
-            <a:r>
-              <a:rPr lang="en-US" altLang="en-US" sz="1000" spc="-10">
-                <a:solidFill>
-                  <a:srgbClr val="334154"/>
-                </a:solidFill>
-                <a:latin typeface="Raleway" pitchFamily="2" charset="77"/>
-                <a:cs typeface="Times New Roman" panose="02020603050405020304"/>
-              </a:rPr>
-              <a:t>The United States (78 users) achieved a 16.67% engagement rate, while Singapore (46 users) recorded 2.17%, indicating limited engagement from both markets.</a:t>
-            </a:r>
-            <a:endParaRPr lang="en-US" altLang="en-US" sz="1000" spc="-10">
-              <a:solidFill>
-                <a:srgbClr val="334154"/>
-              </a:solidFill>
-              <a:latin typeface="Raleway" pitchFamily="2" charset="77"/>
-              <a:cs typeface="Times New Roman" panose="02020603050405020304"/>
-            </a:endParaRPr>
-          </a:p>
-          <a:p>
-            <a:endParaRPr lang="en-US" altLang="en-US" sz="1000" spc="-10">
-              <a:solidFill>
-                <a:srgbClr val="334154"/>
-              </a:solidFill>
-              <a:latin typeface="Raleway" pitchFamily="2" charset="77"/>
-              <a:cs typeface="Times New Roman" panose="02020603050405020304"/>
-            </a:endParaRPr>
-          </a:p>
-          <a:p>
-            <a:r>
-              <a:rPr lang="en-US" altLang="en-US" sz="1000" spc="-10">
-                <a:solidFill>
-                  <a:srgbClr val="334154"/>
-                </a:solidFill>
-                <a:latin typeface="Raleway" pitchFamily="2" charset="77"/>
-                <a:cs typeface="Times New Roman" panose="02020603050405020304"/>
-              </a:rPr>
-              <a:t>Smaller markets, including India (66.67%), the United Kingdom (58.33%), and South Africa (58%), demonstrate strong engagement efficiency, although India’s result is based on limited traffic.</a:t>
-            </a:r>
-            <a:endParaRPr lang="en-US" altLang="en-US" sz="1000" spc="-10">
-              <a:solidFill>
-                <a:srgbClr val="334154"/>
-              </a:solidFill>
-              <a:latin typeface="Raleway" pitchFamily="2" charset="77"/>
-              <a:cs typeface="Times New Roman" panose="02020603050405020304"/>
-            </a:endParaRPr>
-          </a:p>
-        </p:txBody>
-      </p:sp>
-      <p:grpSp>
-        <p:nvGrpSpPr>
-          <p:cNvPr id="7" name="object 7"/>
-          <p:cNvGrpSpPr/>
-          <p:nvPr/>
-        </p:nvGrpSpPr>
-        <p:grpSpPr>
-          <a:xfrm>
-            <a:off x="4206550" y="1061384"/>
-            <a:ext cx="4552546" cy="3760704"/>
-            <a:chOff x="4402835" y="985184"/>
-            <a:chExt cx="4552546" cy="3760704"/>
-          </a:xfrm>
-        </p:grpSpPr>
-        <p:sp>
-          <p:nvSpPr>
-            <p:cNvPr id="8" name="object 8"/>
-            <p:cNvSpPr/>
-            <p:nvPr/>
-          </p:nvSpPr>
-          <p:spPr>
-            <a:xfrm>
-              <a:off x="4410686" y="985184"/>
-              <a:ext cx="4544695" cy="3752850"/>
-            </a:xfrm>
-            <a:custGeom>
-              <a:avLst/>
-              <a:gdLst/>
-              <a:ahLst/>
-              <a:cxnLst/>
-              <a:rect l="l" t="t" r="r" b="b"/>
-              <a:pathLst>
-                <a:path w="4544695" h="3752850">
-                  <a:moveTo>
-                    <a:pt x="4544568" y="0"/>
-                  </a:moveTo>
-                  <a:lnTo>
-                    <a:pt x="0" y="0"/>
-                  </a:lnTo>
-                  <a:lnTo>
-                    <a:pt x="0" y="3752342"/>
-                  </a:lnTo>
-                  <a:lnTo>
-                    <a:pt x="4544568" y="3752342"/>
-                  </a:lnTo>
-                  <a:lnTo>
-                    <a:pt x="4544568" y="0"/>
-                  </a:lnTo>
-                  <a:close/>
-                </a:path>
-              </a:pathLst>
-            </a:custGeom>
-            <a:solidFill>
-              <a:srgbClr val="F0F5F8"/>
-            </a:solidFill>
-          </p:spPr>
-          <p:txBody>
-            <a:bodyPr wrap="square" lIns="0" tIns="0" rIns="0" bIns="0" rtlCol="0"/>
-            <a:lstStyle/>
-            <a:p>
-              <a:endParaRPr>
-                <a:latin typeface="Raleway" pitchFamily="2" charset="77"/>
-              </a:endParaRPr>
-            </a:p>
-          </p:txBody>
-        </p:sp>
-        <p:sp>
-          <p:nvSpPr>
-            <p:cNvPr id="9" name="object 9"/>
-            <p:cNvSpPr/>
-            <p:nvPr/>
-          </p:nvSpPr>
-          <p:spPr>
-            <a:xfrm>
-              <a:off x="4402835" y="993038"/>
-              <a:ext cx="4544695" cy="3752850"/>
-            </a:xfrm>
-            <a:custGeom>
-              <a:avLst/>
-              <a:gdLst/>
-              <a:ahLst/>
-              <a:cxnLst/>
-              <a:rect l="l" t="t" r="r" b="b"/>
-              <a:pathLst>
-                <a:path w="4544695" h="3752850">
-                  <a:moveTo>
-                    <a:pt x="0" y="3752342"/>
-                  </a:moveTo>
-                  <a:lnTo>
-                    <a:pt x="4544568" y="3752342"/>
-                  </a:lnTo>
-                  <a:lnTo>
-                    <a:pt x="4544568" y="0"/>
-                  </a:lnTo>
-                  <a:lnTo>
-                    <a:pt x="0" y="0"/>
-                  </a:lnTo>
-                  <a:lnTo>
-                    <a:pt x="0" y="3752342"/>
-                  </a:lnTo>
-                  <a:close/>
-                </a:path>
-              </a:pathLst>
-            </a:custGeom>
-            <a:ln w="9152">
-              <a:solidFill>
-                <a:srgbClr val="E1E8EF"/>
-              </a:solidFill>
-            </a:ln>
-          </p:spPr>
-          <p:txBody>
-            <a:bodyPr wrap="square" lIns="0" tIns="0" rIns="0" bIns="0" rtlCol="0"/>
-            <a:lstStyle/>
-            <a:p>
-              <a:endParaRPr>
-                <a:latin typeface="Raleway" pitchFamily="2" charset="77"/>
-              </a:endParaRPr>
-            </a:p>
-          </p:txBody>
-        </p:sp>
-      </p:grpSp>
-      <p:pic>
-        <p:nvPicPr>
-          <p:cNvPr id="11" name="Picture 10" descr="Screenshot 2026-06-29 at 19.03.48"/>
-          <p:cNvPicPr>
-            <a:picLocks noChangeAspect="1"/>
-          </p:cNvPicPr>
-          <p:nvPr/>
-        </p:nvPicPr>
-        <p:blipFill>
-          <a:blip r:embed="rId1"/>
-          <a:stretch>
-            <a:fillRect/>
-          </a:stretch>
-        </p:blipFill>
-        <p:spPr>
-          <a:xfrm>
-            <a:off x="4335780" y="1508125"/>
-            <a:ext cx="4359910" cy="2760980"/>
-          </a:xfrm>
-          <a:prstGeom prst="rect">
-            <a:avLst/>
-          </a:prstGeom>
-        </p:spPr>
-      </p:pic>
-    </p:spTree>
-  </p:cSld>
-  <p:clrMapOvr>
-    <a:masterClrMapping/>
-  </p:clrMapOvr>
-</p:sld>
-</file>
-
-<file path=ppt/slides/slide6.xml><?xml version="1.0" encoding="utf-8"?>
-<p:sld xmlns:a="http://schemas.openxmlformats.org/drawingml/2006/main" xmlns:r="http://schemas.openxmlformats.org/officeDocument/2006/relationships" xmlns:p="http://schemas.openxmlformats.org/presentationml/2006/main" showMasterSp="0">
-  <p:cSld>
-    <p:spTree>
-      <p:nvGrpSpPr>
-        <p:cNvPr id="1" name=""/>
-        <p:cNvGrpSpPr/>
-        <p:nvPr/>
-      </p:nvGrpSpPr>
-      <p:grpSpPr>
-        <a:xfrm>
-          <a:off x="0" y="0"/>
-          <a:ext cx="0" cy="0"/>
-          <a:chOff x="0" y="0"/>
-          <a:chExt cx="0" cy="0"/>
-        </a:xfrm>
-      </p:grpSpPr>
-      <p:sp>
-        <p:nvSpPr>
-          <p:cNvPr id="2" name="object 2"/>
-          <p:cNvSpPr txBox="1">
-            <a:spLocks noGrp="1"/>
-          </p:cNvSpPr>
-          <p:nvPr>
-            <p:ph type="title"/>
-          </p:nvPr>
-        </p:nvSpPr>
-        <p:spPr>
-          <a:xfrm>
-            <a:off x="401612" y="165009"/>
-            <a:ext cx="4932464" cy="589867"/>
-          </a:xfrm>
-          <a:prstGeom prst="rect">
-            <a:avLst/>
-          </a:prstGeom>
-        </p:spPr>
-        <p:txBody>
-          <a:bodyPr vert="horz" wrap="square" lIns="0" tIns="264122" rIns="0" bIns="0" rtlCol="0" anchor="t">
-            <a:spAutoFit/>
-          </a:bodyPr>
-          <a:lstStyle/>
-          <a:p>
-            <a:pPr marL="27305">
-              <a:lnSpc>
-                <a:spcPct val="100000"/>
-              </a:lnSpc>
-              <a:spcBef>
-                <a:spcPts val="90"/>
-              </a:spcBef>
-            </a:pPr>
-            <a:r>
-              <a:rPr spc="120">
-                <a:latin typeface="Raleway" pitchFamily="2" charset="77"/>
-                <a:cs typeface="Times New Roman" panose="02020603050405020304"/>
-              </a:rPr>
-              <a:t>Page</a:t>
-            </a:r>
-            <a:r>
-              <a:rPr spc="-85">
-                <a:latin typeface="Raleway" pitchFamily="2" charset="77"/>
-                <a:cs typeface="Times New Roman" panose="02020603050405020304"/>
-              </a:rPr>
-              <a:t> </a:t>
-            </a:r>
-            <a:r>
-              <a:rPr spc="35">
-                <a:latin typeface="Raleway" pitchFamily="2" charset="77"/>
-                <a:cs typeface="Times New Roman" panose="02020603050405020304"/>
-              </a:rPr>
-              <a:t>Performance</a:t>
-            </a:r>
-            <a:endParaRPr lang="en-US" spc="35">
-              <a:latin typeface="Raleway" pitchFamily="2" charset="77"/>
-              <a:cs typeface="Times New Roman" panose="02020603050405020304"/>
-            </a:endParaRPr>
-          </a:p>
-        </p:txBody>
-      </p:sp>
-      <p:sp>
-        <p:nvSpPr>
-          <p:cNvPr id="3" name="object 3"/>
-          <p:cNvSpPr txBox="1"/>
-          <p:nvPr/>
-        </p:nvSpPr>
-        <p:spPr>
-          <a:xfrm>
-            <a:off x="428381" y="900929"/>
-            <a:ext cx="4219641" cy="377825"/>
-          </a:xfrm>
-          <a:prstGeom prst="rect">
-            <a:avLst/>
-          </a:prstGeom>
-        </p:spPr>
-        <p:txBody>
-          <a:bodyPr vert="horz" wrap="square" lIns="0" tIns="12065" rIns="0" bIns="0" rtlCol="0" anchor="t">
-            <a:spAutoFit/>
-          </a:bodyPr>
-          <a:lstStyle/>
-          <a:p>
-            <a:pPr algn="l"/>
-            <a:r>
-              <a:rPr lang="en-GB" sz="1000" spc="-10">
-                <a:solidFill>
-                  <a:srgbClr val="334154"/>
-                </a:solidFill>
-                <a:latin typeface="Raleway" pitchFamily="2" charset="77"/>
-                <a:cs typeface="Times New Roman" panose="02020603050405020304"/>
-              </a:rPr>
-              <a:t>The Homepage and Our Graft pages drive the most meaningful engagement.</a:t>
-            </a:r>
-            <a:endParaRPr lang="en-GB" sz="1000" spc="-10">
-              <a:solidFill>
-                <a:srgbClr val="334154"/>
-              </a:solidFill>
-              <a:latin typeface="Raleway" pitchFamily="2" charset="77"/>
-              <a:cs typeface="Times New Roman" panose="02020603050405020304"/>
-            </a:endParaRPr>
-          </a:p>
-          <a:p>
-            <a:pPr marL="12700">
-              <a:lnSpc>
-                <a:spcPct val="100000"/>
-              </a:lnSpc>
-              <a:spcBef>
-                <a:spcPts val="95"/>
-              </a:spcBef>
-            </a:pPr>
-            <a:endParaRPr sz="1300" spc="-10">
-              <a:solidFill>
-                <a:srgbClr val="334154"/>
-              </a:solidFill>
-              <a:latin typeface="Raleway" pitchFamily="2" charset="77"/>
-              <a:cs typeface="Times New Roman" panose="02020603050405020304"/>
-            </a:endParaRPr>
-          </a:p>
-        </p:txBody>
-      </p:sp>
-      <p:grpSp>
-        <p:nvGrpSpPr>
-          <p:cNvPr id="4" name="object 4"/>
-          <p:cNvGrpSpPr/>
-          <p:nvPr/>
-        </p:nvGrpSpPr>
-        <p:grpSpPr>
-          <a:xfrm>
-            <a:off x="303792" y="1342200"/>
-            <a:ext cx="3311476" cy="3659820"/>
-            <a:chOff x="429768" y="1090226"/>
-            <a:chExt cx="3438525" cy="3907338"/>
-          </a:xfrm>
-        </p:grpSpPr>
-        <p:sp>
-          <p:nvSpPr>
-            <p:cNvPr id="5" name="object 5"/>
-            <p:cNvSpPr/>
-            <p:nvPr/>
-          </p:nvSpPr>
-          <p:spPr>
-            <a:xfrm>
-              <a:off x="429768" y="1354569"/>
-              <a:ext cx="3438525" cy="3642995"/>
-            </a:xfrm>
-            <a:custGeom>
-              <a:avLst/>
-              <a:gdLst/>
-              <a:ahLst/>
-              <a:cxnLst/>
-              <a:rect l="l" t="t" r="r" b="b"/>
-              <a:pathLst>
-                <a:path w="3438525" h="3642995">
-                  <a:moveTo>
-                    <a:pt x="3438144" y="0"/>
-                  </a:moveTo>
-                  <a:lnTo>
-                    <a:pt x="0" y="0"/>
-                  </a:lnTo>
-                  <a:lnTo>
-                    <a:pt x="0" y="3642487"/>
-                  </a:lnTo>
-                  <a:lnTo>
-                    <a:pt x="3438144" y="3642487"/>
-                  </a:lnTo>
-                  <a:lnTo>
-                    <a:pt x="3438144" y="0"/>
-                  </a:lnTo>
-                  <a:close/>
-                </a:path>
-              </a:pathLst>
-            </a:custGeom>
-            <a:solidFill>
-              <a:srgbClr val="F8F9FB"/>
-            </a:solidFill>
-          </p:spPr>
-          <p:txBody>
-            <a:bodyPr wrap="square" lIns="0" tIns="0" rIns="0" bIns="0" rtlCol="0"/>
-            <a:lstStyle/>
-            <a:p>
-              <a:endParaRPr>
-                <a:latin typeface="Raleway" pitchFamily="2" charset="77"/>
-              </a:endParaRPr>
-            </a:p>
-          </p:txBody>
-        </p:sp>
-        <p:sp>
-          <p:nvSpPr>
-            <p:cNvPr id="6" name="object 6"/>
-            <p:cNvSpPr/>
-            <p:nvPr/>
-          </p:nvSpPr>
-          <p:spPr>
-            <a:xfrm>
-              <a:off x="576072" y="1090226"/>
-              <a:ext cx="3145790" cy="27940"/>
-            </a:xfrm>
-            <a:custGeom>
-              <a:avLst/>
-              <a:gdLst/>
-              <a:ahLst/>
-              <a:cxnLst/>
-              <a:rect l="l" t="t" r="r" b="b"/>
-              <a:pathLst>
-                <a:path w="3145790" h="27940">
-                  <a:moveTo>
-                    <a:pt x="3145536" y="0"/>
-                  </a:moveTo>
-                  <a:lnTo>
-                    <a:pt x="0" y="0"/>
-                  </a:lnTo>
-                  <a:lnTo>
-                    <a:pt x="0" y="27456"/>
-                  </a:lnTo>
-                  <a:lnTo>
-                    <a:pt x="3145536" y="27456"/>
-                  </a:lnTo>
-                  <a:lnTo>
-                    <a:pt x="3145536" y="0"/>
-                  </a:lnTo>
-                  <a:close/>
-                </a:path>
-              </a:pathLst>
-            </a:custGeom>
-            <a:solidFill>
-              <a:srgbClr val="1E3989"/>
-            </a:solidFill>
-          </p:spPr>
-          <p:txBody>
-            <a:bodyPr wrap="square" lIns="0" tIns="0" rIns="0" bIns="0" rtlCol="0"/>
-            <a:lstStyle/>
-            <a:p>
-              <a:endParaRPr>
-                <a:latin typeface="Raleway" pitchFamily="2" charset="77"/>
-              </a:endParaRPr>
-            </a:p>
-          </p:txBody>
-        </p:sp>
-      </p:grpSp>
-      <p:sp>
-        <p:nvSpPr>
-          <p:cNvPr id="7" name="object 7"/>
-          <p:cNvSpPr txBox="1"/>
-          <p:nvPr/>
-        </p:nvSpPr>
-        <p:spPr>
-          <a:xfrm>
-            <a:off x="429895" y="1501140"/>
-            <a:ext cx="3610610" cy="2382520"/>
-          </a:xfrm>
-          <a:prstGeom prst="rect">
-            <a:avLst/>
-          </a:prstGeom>
-        </p:spPr>
-        <p:txBody>
-          <a:bodyPr vert="horz" wrap="square" lIns="0" tIns="29209" rIns="0" bIns="0" rtlCol="0" anchor="t">
-            <a:spAutoFit/>
-          </a:bodyPr>
-          <a:lstStyle/>
-          <a:p>
-            <a:r>
-              <a:rPr lang="en-US" altLang="en-US" sz="900" spc="-10">
-                <a:solidFill>
-                  <a:schemeClr val="tx1"/>
-                </a:solidFill>
-                <a:latin typeface="Raleway" pitchFamily="2" charset="77"/>
-                <a:cs typeface="Times New Roman" panose="02020603050405020304"/>
-              </a:rPr>
-              <a:t>Overall Insight:</a:t>
-            </a:r>
-            <a:endParaRPr lang="en-US" altLang="en-US" sz="900" spc="-10">
-              <a:solidFill>
-                <a:schemeClr val="tx1"/>
-              </a:solidFill>
-              <a:latin typeface="Raleway" pitchFamily="2" charset="77"/>
-              <a:cs typeface="Times New Roman" panose="02020603050405020304"/>
-            </a:endParaRPr>
-          </a:p>
-          <a:p>
-            <a:endParaRPr lang="en-US" altLang="en-US" sz="900" spc="-10">
-              <a:solidFill>
-                <a:schemeClr val="tx1"/>
-              </a:solidFill>
-              <a:latin typeface="Raleway" pitchFamily="2" charset="77"/>
-              <a:cs typeface="Times New Roman" panose="02020603050405020304"/>
-            </a:endParaRPr>
-          </a:p>
-          <a:p>
-            <a:r>
-              <a:rPr lang="en-US" altLang="en-US" sz="900" spc="-10">
-                <a:solidFill>
-                  <a:schemeClr val="tx1"/>
-                </a:solidFill>
-                <a:latin typeface="Raleway" pitchFamily="2" charset="77"/>
-                <a:cs typeface="Times New Roman" panose="02020603050405020304"/>
-              </a:rPr>
-              <a:t>The Homepage drives the highest traffic, accounting for 37.73% of total views (595 views), with 1.36 views per active user and an average engagement time of 26 seconds.</a:t>
-            </a:r>
-            <a:endParaRPr lang="en-US" altLang="en-US" sz="900" spc="-10">
-              <a:solidFill>
-                <a:schemeClr val="tx1"/>
-              </a:solidFill>
-              <a:latin typeface="Raleway" pitchFamily="2" charset="77"/>
-              <a:cs typeface="Times New Roman" panose="02020603050405020304"/>
-            </a:endParaRPr>
-          </a:p>
-          <a:p>
-            <a:endParaRPr lang="en-US" altLang="en-US" sz="900" spc="-10">
-              <a:solidFill>
-                <a:schemeClr val="tx1"/>
-              </a:solidFill>
-              <a:latin typeface="Raleway" pitchFamily="2" charset="77"/>
-              <a:cs typeface="Times New Roman" panose="02020603050405020304"/>
-            </a:endParaRPr>
-          </a:p>
-          <a:p>
-            <a:r>
-              <a:rPr lang="en-US" altLang="en-US" sz="900" spc="-10">
-                <a:solidFill>
-                  <a:schemeClr val="tx1"/>
-                </a:solidFill>
-                <a:latin typeface="Raleway" pitchFamily="2" charset="77"/>
-                <a:cs typeface="Times New Roman" panose="02020603050405020304"/>
-              </a:rPr>
-              <a:t>Secondary pages such as About (120 views) and Our Graft (116 views) contribute meaningful traffic and record solid engagement.</a:t>
-            </a:r>
-            <a:endParaRPr lang="en-US" altLang="en-US" sz="900" spc="-10">
-              <a:solidFill>
-                <a:schemeClr val="tx1"/>
-              </a:solidFill>
-              <a:latin typeface="Raleway" pitchFamily="2" charset="77"/>
-              <a:cs typeface="Times New Roman" panose="02020603050405020304"/>
-            </a:endParaRPr>
-          </a:p>
-          <a:p>
-            <a:endParaRPr lang="en-US" altLang="en-US" sz="900" spc="-10">
-              <a:solidFill>
-                <a:schemeClr val="tx1"/>
-              </a:solidFill>
-              <a:latin typeface="Raleway" pitchFamily="2" charset="77"/>
-              <a:cs typeface="Times New Roman" panose="02020603050405020304"/>
-            </a:endParaRPr>
-          </a:p>
-          <a:p>
-            <a:r>
-              <a:rPr lang="en-US" altLang="en-US" sz="900" spc="-10">
-                <a:solidFill>
-                  <a:schemeClr val="tx1"/>
-                </a:solidFill>
-                <a:latin typeface="Raleway" pitchFamily="2" charset="77"/>
-                <a:cs typeface="Times New Roman" panose="02020603050405020304"/>
-              </a:rPr>
-              <a:t>Pages with the deepest browsing engagement include Blog (3.44 views per user), Work (2.65), and About (1.60), indicating stronger exploration and content interest.</a:t>
-            </a:r>
-            <a:endParaRPr lang="en-US" altLang="en-US" sz="900" spc="-10">
-              <a:solidFill>
-                <a:schemeClr val="tx1"/>
-              </a:solidFill>
-              <a:latin typeface="Raleway" pitchFamily="2" charset="77"/>
-              <a:cs typeface="Times New Roman" panose="02020603050405020304"/>
-            </a:endParaRPr>
-          </a:p>
-          <a:p>
-            <a:endParaRPr lang="en-US" altLang="en-US" sz="900" spc="-10">
-              <a:solidFill>
-                <a:schemeClr val="tx1"/>
-              </a:solidFill>
-              <a:latin typeface="Raleway" pitchFamily="2" charset="77"/>
-              <a:cs typeface="Times New Roman" panose="02020603050405020304"/>
-            </a:endParaRPr>
-          </a:p>
-          <a:p>
-            <a:r>
-              <a:rPr lang="en-US" altLang="en-US" sz="900" spc="-10">
-                <a:solidFill>
-                  <a:schemeClr val="tx1"/>
-                </a:solidFill>
-                <a:latin typeface="Raleway" pitchFamily="2" charset="77"/>
-                <a:cs typeface="Times New Roman" panose="02020603050405020304"/>
-              </a:rPr>
-              <a:t>Overall, the website generated 1,577 views from 633 active users, averaging 2.49 views per user and 1 minute 8 seconds of engagement. However, the Page Not Found screen received 122 views, highlighting a need to identify and repair broken links.</a:t>
-            </a:r>
-            <a:endParaRPr lang="en-US" altLang="en-US" sz="900" spc="-10">
-              <a:solidFill>
-                <a:schemeClr val="tx1"/>
-              </a:solidFill>
-              <a:latin typeface="Raleway" pitchFamily="2" charset="77"/>
-              <a:cs typeface="Times New Roman" panose="02020603050405020304"/>
-            </a:endParaRPr>
-          </a:p>
-        </p:txBody>
-      </p:sp>
-      <p:grpSp>
-        <p:nvGrpSpPr>
-          <p:cNvPr id="8" name="object 8"/>
-          <p:cNvGrpSpPr/>
-          <p:nvPr/>
-        </p:nvGrpSpPr>
-        <p:grpSpPr>
-          <a:xfrm>
-            <a:off x="4155947" y="1283380"/>
-            <a:ext cx="4948181" cy="3718640"/>
-            <a:chOff x="4155947" y="1377441"/>
-            <a:chExt cx="4846320" cy="3624579"/>
-          </a:xfrm>
-        </p:grpSpPr>
-        <p:sp>
-          <p:nvSpPr>
-            <p:cNvPr id="9" name="object 9"/>
-            <p:cNvSpPr/>
-            <p:nvPr/>
-          </p:nvSpPr>
-          <p:spPr>
-            <a:xfrm>
-              <a:off x="4155947" y="1377441"/>
-              <a:ext cx="4846320" cy="3624579"/>
-            </a:xfrm>
-            <a:custGeom>
-              <a:avLst/>
-              <a:gdLst/>
-              <a:ahLst/>
-              <a:cxnLst/>
-              <a:rect l="l" t="t" r="r" b="b"/>
-              <a:pathLst>
-                <a:path w="4846320" h="3624579">
-                  <a:moveTo>
-                    <a:pt x="4846320" y="0"/>
-                  </a:moveTo>
-                  <a:lnTo>
-                    <a:pt x="0" y="0"/>
-                  </a:lnTo>
-                  <a:lnTo>
-                    <a:pt x="0" y="3624199"/>
-                  </a:lnTo>
-                  <a:lnTo>
-                    <a:pt x="4846320" y="3624199"/>
-                  </a:lnTo>
-                  <a:lnTo>
-                    <a:pt x="4846320" y="0"/>
-                  </a:lnTo>
-                  <a:close/>
-                </a:path>
-              </a:pathLst>
-            </a:custGeom>
-            <a:solidFill>
-              <a:srgbClr val="F0F5F8"/>
-            </a:solidFill>
-          </p:spPr>
-          <p:txBody>
-            <a:bodyPr wrap="square" lIns="0" tIns="0" rIns="0" bIns="0" rtlCol="0"/>
-            <a:lstStyle/>
-            <a:p>
-              <a:endParaRPr>
-                <a:latin typeface="Raleway" pitchFamily="2" charset="77"/>
-              </a:endParaRPr>
-            </a:p>
-          </p:txBody>
-        </p:sp>
-        <p:sp>
-          <p:nvSpPr>
-            <p:cNvPr id="10" name="object 10"/>
-            <p:cNvSpPr/>
-            <p:nvPr/>
-          </p:nvSpPr>
-          <p:spPr>
-            <a:xfrm>
-              <a:off x="4155947" y="1377441"/>
-              <a:ext cx="4846320" cy="3624579"/>
-            </a:xfrm>
-            <a:custGeom>
-              <a:avLst/>
-              <a:gdLst/>
-              <a:ahLst/>
-              <a:cxnLst/>
-              <a:rect l="l" t="t" r="r" b="b"/>
-              <a:pathLst>
-                <a:path w="4846320" h="3624579">
-                  <a:moveTo>
-                    <a:pt x="0" y="3624199"/>
-                  </a:moveTo>
-                  <a:lnTo>
-                    <a:pt x="4846320" y="3624199"/>
-                  </a:lnTo>
-                  <a:lnTo>
-                    <a:pt x="4846320" y="0"/>
-                  </a:lnTo>
-                  <a:lnTo>
-                    <a:pt x="0" y="0"/>
-                  </a:lnTo>
-                  <a:lnTo>
-                    <a:pt x="0" y="3624199"/>
-                  </a:lnTo>
-                  <a:close/>
-                </a:path>
-              </a:pathLst>
-            </a:custGeom>
-            <a:ln w="9152">
-              <a:solidFill>
-                <a:srgbClr val="E1E8EF"/>
-              </a:solidFill>
-            </a:ln>
-          </p:spPr>
-          <p:txBody>
-            <a:bodyPr wrap="square" lIns="0" tIns="0" rIns="0" bIns="0" rtlCol="0"/>
-            <a:lstStyle/>
-            <a:p>
-              <a:endParaRPr>
-                <a:latin typeface="Raleway" pitchFamily="2" charset="77"/>
-              </a:endParaRPr>
-            </a:p>
-          </p:txBody>
-        </p:sp>
-      </p:grpSp>
-      <p:pic>
-        <p:nvPicPr>
-          <p:cNvPr id="12" name="Picture 11" descr="Screenshot 2026-06-29 at 19.05.49"/>
-          <p:cNvPicPr>
-            <a:picLocks noChangeAspect="1"/>
-          </p:cNvPicPr>
-          <p:nvPr/>
-        </p:nvPicPr>
-        <p:blipFill>
-          <a:blip r:embed="rId1"/>
-          <a:stretch>
-            <a:fillRect/>
-          </a:stretch>
-        </p:blipFill>
-        <p:spPr>
-          <a:xfrm>
-            <a:off x="4343400" y="1660525"/>
-            <a:ext cx="4672965" cy="2521585"/>
-          </a:xfrm>
-          <a:prstGeom prst="rect">
-            <a:avLst/>
-          </a:prstGeom>
-        </p:spPr>
-      </p:pic>
-    </p:spTree>
-  </p:cSld>
-  <p:clrMapOvr>
-    <a:masterClrMapping/>
-  </p:clrMapOvr>
-</p:sld>
-</file>
-
-<file path=ppt/slides/slide7.xml><?xml version="1.0" encoding="utf-8"?>
-<p:sld xmlns:a="http://schemas.openxmlformats.org/drawingml/2006/main" xmlns:p="http://schemas.openxmlformats.org/presentationml/2006/main" xmlns:r="http://schemas.openxmlformats.org/officeDocument/2006/relationships">
-  <p:cSld>
-    <p:spTree>
-      <p:nvGrpSpPr>
-        <p:cNvPr id="1" name=""/>
-        <p:cNvGrpSpPr/>
-        <p:nvPr/>
-      </p:nvGrpSpPr>
-      <p:grpSpPr/>
-      <p:sp>
-        <p:nvSpPr>
-          <p:cNvPr id="13" name="object 2"/>
-          <p:cNvSpPr txBox="1">
-            <a:spLocks noGrp="1"/>
-          </p:cNvSpPr>
-          <p:nvPr>
-            <p:ph type="title"/>
-          </p:nvPr>
-        </p:nvSpPr>
-        <p:spPr>
-          <a:xfrm>
-            <a:off x="401612" y="165009"/>
-            <a:ext cx="4932464" cy="586105"/>
-          </a:xfrm>
-          <a:prstGeom prst="rect">
-            <a:avLst/>
-          </a:prstGeom>
-        </p:spPr>
-        <p:txBody>
-          <a:bodyPr vert="horz" wrap="square" lIns="0" tIns="264122" rIns="0" bIns="0" rtlCol="0" anchor="t">
-            <a:spAutoFit/>
-          </a:bodyPr>
-          <a:lstStyle/>
-          <a:p>
-            <a:pPr marL="27305">
-              <a:lnSpc>
-                <a:spcPct val="100000"/>
-              </a:lnSpc>
-              <a:spcBef>
-                <a:spcPts val="90"/>
-              </a:spcBef>
-            </a:pPr>
-            <a:r>
-              <a:rPr lang="en-US" spc="35">
-                <a:latin typeface="Raleway" pitchFamily="2" charset="77"/>
-                <a:cs typeface="Times New Roman" panose="02020603050405020304"/>
-              </a:rPr>
-              <a:t>Traffic Acquisition</a:t>
-            </a:r>
-            <a:endParaRPr lang="en-US" spc="35">
-              <a:latin typeface="Raleway" pitchFamily="2" charset="77"/>
-              <a:cs typeface="Times New Roman" panose="02020603050405020304"/>
-            </a:endParaRPr>
-          </a:p>
-        </p:txBody>
-      </p:sp>
-      <p:sp>
-        <p:nvSpPr>
-          <p:cNvPr id="14" name="object 3"/>
-          <p:cNvSpPr txBox="1"/>
-          <p:nvPr/>
-        </p:nvSpPr>
-        <p:spPr>
-          <a:xfrm>
-            <a:off x="428381" y="900929"/>
-            <a:ext cx="4219641" cy="319405"/>
-          </a:xfrm>
-          <a:prstGeom prst="rect">
-            <a:avLst/>
-          </a:prstGeom>
-        </p:spPr>
-        <p:txBody>
-          <a:bodyPr vert="horz" wrap="square" lIns="0" tIns="12065" rIns="0" bIns="0" rtlCol="0" anchor="t">
-            <a:spAutoFit/>
-          </a:bodyPr>
-          <a:lstStyle/>
-          <a:p>
-            <a:pPr marL="12700">
-              <a:lnSpc>
-                <a:spcPct val="100000"/>
-              </a:lnSpc>
-              <a:spcBef>
-                <a:spcPts val="95"/>
-              </a:spcBef>
-            </a:pPr>
-            <a:endParaRPr lang="en-US" altLang="en-GB" sz="1300" spc="-10">
-              <a:solidFill>
-                <a:srgbClr val="334154"/>
-              </a:solidFill>
-              <a:latin typeface="Raleway" pitchFamily="2" charset="77"/>
-              <a:cs typeface="Times New Roman" panose="02020603050405020304"/>
-            </a:endParaRPr>
-          </a:p>
-        </p:txBody>
-      </p:sp>
-      <p:grpSp>
-        <p:nvGrpSpPr>
-          <p:cNvPr id="15" name="object 4"/>
-          <p:cNvGrpSpPr/>
-          <p:nvPr/>
-        </p:nvGrpSpPr>
-        <p:grpSpPr>
-          <a:xfrm>
-            <a:off x="303792" y="1342200"/>
-            <a:ext cx="3311476" cy="3659820"/>
-            <a:chOff x="429768" y="1090226"/>
-            <a:chExt cx="3438525" cy="3907338"/>
-          </a:xfrm>
-        </p:grpSpPr>
-        <p:sp>
-          <p:nvSpPr>
-            <p:cNvPr id="16" name="object 5"/>
-            <p:cNvSpPr/>
-            <p:nvPr/>
-          </p:nvSpPr>
-          <p:spPr>
-            <a:xfrm>
-              <a:off x="429768" y="1354569"/>
-              <a:ext cx="3438525" cy="3642995"/>
-            </a:xfrm>
-            <a:custGeom>
-              <a:avLst/>
-              <a:gdLst/>
-              <a:ahLst/>
-              <a:cxnLst/>
-              <a:rect l="l" t="t" r="r" b="b"/>
-              <a:pathLst>
-                <a:path w="3438525" h="3642995">
-                  <a:moveTo>
-                    <a:pt x="3438144" y="0"/>
-                  </a:moveTo>
-                  <a:lnTo>
-                    <a:pt x="0" y="0"/>
-                  </a:lnTo>
-                  <a:lnTo>
-                    <a:pt x="0" y="3642487"/>
-                  </a:lnTo>
-                  <a:lnTo>
-                    <a:pt x="3438144" y="3642487"/>
-                  </a:lnTo>
-                  <a:lnTo>
-                    <a:pt x="3438144" y="0"/>
-                  </a:lnTo>
-                  <a:close/>
-                </a:path>
-              </a:pathLst>
-            </a:custGeom>
-            <a:solidFill>
-              <a:srgbClr val="F8F9FB"/>
-            </a:solidFill>
-          </p:spPr>
-          <p:txBody>
-            <a:bodyPr wrap="square" lIns="0" tIns="0" rIns="0" bIns="0" rtlCol="0"/>
-            <a:lstStyle/>
-            <a:p>
-              <a:endParaRPr>
-                <a:latin typeface="Raleway" pitchFamily="2" charset="77"/>
-              </a:endParaRPr>
-            </a:p>
-          </p:txBody>
-        </p:sp>
-        <p:sp>
-          <p:nvSpPr>
-            <p:cNvPr id="17" name="object 6"/>
-            <p:cNvSpPr/>
-            <p:nvPr/>
-          </p:nvSpPr>
-          <p:spPr>
-            <a:xfrm>
-              <a:off x="576072" y="1090226"/>
-              <a:ext cx="3145790" cy="27940"/>
-            </a:xfrm>
-            <a:custGeom>
-              <a:avLst/>
-              <a:gdLst/>
-              <a:ahLst/>
-              <a:cxnLst/>
-              <a:rect l="l" t="t" r="r" b="b"/>
-              <a:pathLst>
-                <a:path w="3145790" h="27940">
-                  <a:moveTo>
-                    <a:pt x="3145536" y="0"/>
-                  </a:moveTo>
-                  <a:lnTo>
-                    <a:pt x="0" y="0"/>
-                  </a:lnTo>
-                  <a:lnTo>
-                    <a:pt x="0" y="27456"/>
-                  </a:lnTo>
-                  <a:lnTo>
-                    <a:pt x="3145536" y="27456"/>
-                  </a:lnTo>
-                  <a:lnTo>
-                    <a:pt x="3145536" y="0"/>
-                  </a:lnTo>
-                  <a:close/>
-                </a:path>
-              </a:pathLst>
-            </a:custGeom>
-            <a:solidFill>
-              <a:srgbClr val="1E3989"/>
-            </a:solidFill>
-          </p:spPr>
-          <p:txBody>
-            <a:bodyPr wrap="square" lIns="0" tIns="0" rIns="0" bIns="0" rtlCol="0"/>
-            <a:lstStyle/>
-            <a:p>
-              <a:endParaRPr>
-                <a:latin typeface="Raleway" pitchFamily="2" charset="77"/>
-              </a:endParaRPr>
-            </a:p>
-          </p:txBody>
-        </p:sp>
-      </p:grpSp>
-      <p:sp>
-        <p:nvSpPr>
-          <p:cNvPr id="18" name="object 7"/>
-          <p:cNvSpPr txBox="1"/>
-          <p:nvPr/>
-        </p:nvSpPr>
-        <p:spPr>
-          <a:xfrm>
-            <a:off x="429895" y="1501140"/>
-            <a:ext cx="3610610" cy="3629660"/>
-          </a:xfrm>
-          <a:prstGeom prst="rect">
-            <a:avLst/>
-          </a:prstGeom>
-        </p:spPr>
-        <p:txBody>
-          <a:bodyPr vert="horz" wrap="square" lIns="0" tIns="29209" rIns="0" bIns="0" rtlCol="0" anchor="t">
-            <a:spAutoFit/>
-          </a:bodyPr>
-          <a:lstStyle/>
-          <a:p>
-            <a:r>
-              <a:t>Overall Insight:</a:t>
-            </a:r>
-            <a:endParaRPr lang="en-US" sz="900" b="1">
-              <a:solidFill>
-                <a:schemeClr val="tx1"/>
-              </a:solidFill>
-              <a:latin typeface="Raleway" pitchFamily="2" charset="77"/>
-            </a:endParaRPr>
-          </a:p>
-          <a:p>
-            <a:endParaRPr lang="en-US" altLang="en-US" sz="900" b="0">
-              <a:solidFill>
-                <a:schemeClr val="tx1"/>
-              </a:solidFill>
-              <a:latin typeface="Raleway" charset="0"/>
-              <a:cs typeface="Raleway" charset="0"/>
-            </a:endParaRPr>
-          </a:p>
-          <a:p>
-            <a:endParaRPr lang="en-US" altLang="en-US" sz="900" b="0">
-              <a:solidFill>
-                <a:schemeClr val="tx1"/>
-              </a:solidFill>
-              <a:latin typeface="Raleway" charset="0"/>
-              <a:cs typeface="Raleway" charset="0"/>
-            </a:endParaRPr>
-          </a:p>
-          <a:p>
-            <a:endParaRPr lang="en-US" altLang="en-US" sz="900" b="0">
-              <a:solidFill>
-                <a:schemeClr val="tx1"/>
-              </a:solidFill>
-              <a:latin typeface="Raleway" charset="0"/>
-              <a:cs typeface="Raleway" charset="0"/>
-            </a:endParaRPr>
-          </a:p>
-          <a:p>
-            <a:endParaRPr lang="en-US" altLang="en-US" sz="900" b="0">
-              <a:solidFill>
-                <a:schemeClr val="tx1"/>
-              </a:solidFill>
-              <a:latin typeface="Raleway" charset="0"/>
-              <a:cs typeface="Raleway" charset="0"/>
-            </a:endParaRPr>
-          </a:p>
-          <a:p>
-            <a:endParaRPr lang="en-US" altLang="en-US" sz="900" b="0">
-              <a:solidFill>
-                <a:schemeClr val="tx1"/>
-              </a:solidFill>
-              <a:latin typeface="Raleway" charset="0"/>
-              <a:cs typeface="Raleway" charset="0"/>
-            </a:endParaRPr>
-          </a:p>
-          <a:p>
-            <a:endParaRPr lang="en-US" altLang="en-US" sz="900" b="0">
-              <a:solidFill>
-                <a:schemeClr val="tx1"/>
-              </a:solidFill>
-              <a:latin typeface="Raleway" charset="0"/>
-              <a:cs typeface="Raleway" charset="0"/>
-            </a:endParaRPr>
-          </a:p>
-          <a:p>
-            <a:endParaRPr lang="en-US" altLang="en-US" sz="900" b="0">
-              <a:solidFill>
-                <a:schemeClr val="tx1"/>
-              </a:solidFill>
-              <a:latin typeface="Raleway" charset="0"/>
-              <a:cs typeface="Raleway" charset="0"/>
-            </a:endParaRPr>
-          </a:p>
-        </p:txBody>
-      </p:sp>
-      <p:grpSp>
-        <p:nvGrpSpPr>
-          <p:cNvPr id="19" name="object 8"/>
-          <p:cNvGrpSpPr/>
-          <p:nvPr/>
-        </p:nvGrpSpPr>
-        <p:grpSpPr>
-          <a:xfrm>
-            <a:off x="4155947" y="1283380"/>
-            <a:ext cx="4948181" cy="3718640"/>
-            <a:chOff x="4155947" y="1377441"/>
-            <a:chExt cx="4846320" cy="3624579"/>
-          </a:xfrm>
-        </p:grpSpPr>
-        <p:sp>
-          <p:nvSpPr>
-            <p:cNvPr id="20" name="object 9"/>
-            <p:cNvSpPr/>
-            <p:nvPr/>
-          </p:nvSpPr>
-          <p:spPr>
-            <a:xfrm>
-              <a:off x="4155947" y="1377441"/>
-              <a:ext cx="4846320" cy="3624579"/>
-            </a:xfrm>
-            <a:custGeom>
-              <a:avLst/>
-              <a:gdLst/>
-              <a:ahLst/>
-              <a:cxnLst/>
-              <a:rect l="l" t="t" r="r" b="b"/>
-              <a:pathLst>
-                <a:path w="4846320" h="3624579">
-                  <a:moveTo>
-                    <a:pt x="4846320" y="0"/>
-                  </a:moveTo>
-                  <a:lnTo>
-                    <a:pt x="0" y="0"/>
-                  </a:lnTo>
-                  <a:lnTo>
-                    <a:pt x="0" y="3624199"/>
-                  </a:lnTo>
-                  <a:lnTo>
-                    <a:pt x="4846320" y="3624199"/>
-                  </a:lnTo>
-                  <a:lnTo>
-                    <a:pt x="4846320" y="0"/>
-                  </a:lnTo>
-                  <a:close/>
-                </a:path>
-              </a:pathLst>
-            </a:custGeom>
-            <a:solidFill>
-              <a:srgbClr val="F0F5F8"/>
-            </a:solidFill>
-          </p:spPr>
-          <p:txBody>
-            <a:bodyPr wrap="square" lIns="0" tIns="0" rIns="0" bIns="0" rtlCol="0"/>
-            <a:lstStyle/>
-            <a:p>
-              <a:endParaRPr>
-                <a:latin typeface="Raleway" pitchFamily="2" charset="77"/>
-              </a:endParaRPr>
-            </a:p>
-          </p:txBody>
-        </p:sp>
-        <p:sp>
-          <p:nvSpPr>
-            <p:cNvPr id="21" name="object 10"/>
-            <p:cNvSpPr/>
-            <p:nvPr/>
-          </p:nvSpPr>
-          <p:spPr>
-            <a:xfrm>
-              <a:off x="4155947" y="1377441"/>
-              <a:ext cx="4846320" cy="3624579"/>
-            </a:xfrm>
-            <a:custGeom>
-              <a:avLst/>
-              <a:gdLst/>
-              <a:ahLst/>
-              <a:cxnLst/>
-              <a:rect l="l" t="t" r="r" b="b"/>
-              <a:pathLst>
-                <a:path w="4846320" h="3624579">
-                  <a:moveTo>
-                    <a:pt x="0" y="3624199"/>
-                  </a:moveTo>
-                  <a:lnTo>
-                    <a:pt x="4846320" y="3624199"/>
-                  </a:lnTo>
-                  <a:lnTo>
-                    <a:pt x="4846320" y="0"/>
-                  </a:lnTo>
-                  <a:lnTo>
-                    <a:pt x="0" y="0"/>
-                  </a:lnTo>
-                  <a:lnTo>
-                    <a:pt x="0" y="3624199"/>
-                  </a:lnTo>
-                  <a:close/>
-                </a:path>
-              </a:pathLst>
-            </a:custGeom>
-            <a:ln w="9152">
-              <a:solidFill>
-                <a:srgbClr val="E1E8EF"/>
-              </a:solidFill>
-            </a:ln>
-          </p:spPr>
-          <p:txBody>
-            <a:bodyPr wrap="square" lIns="0" tIns="0" rIns="0" bIns="0" rtlCol="0"/>
-            <a:lstStyle/>
-            <a:p>
-              <a:endParaRPr>
-                <a:latin typeface="Raleway" pitchFamily="2" charset="77"/>
-              </a:endParaRPr>
-            </a:p>
-          </p:txBody>
-        </p:sp>
-      </p:grpSp>
-      <p:pic>
-        <p:nvPicPr>
-          <p:cNvPr id="22" name="Picture 32" descr="image.png"/>
-          <p:cNvPicPr>
-            <a:picLocks noChangeAspect="1"/>
-          </p:cNvPicPr>
-          <p:nvPr/>
-        </p:nvPicPr>
-        <p:blipFill>
-          <a:blip r:embed="rId2"/>
-          <a:stretch>
-            <a:fillRect/>
-          </a:stretch>
-        </p:blipFill>
-        <p:spPr>
-          <a:xfrm>
-            <a:off x="4258310" y="1501140"/>
-            <a:ext cx="4742815" cy="2962275"/>
-          </a:xfrm>
-          <a:prstGeom prst="rect">
-            <a:avLst/>
-          </a:prstGeom>
-        </p:spPr>
-      </p:pic>
-    </p:spTree>
-  </p:cSld>
-  <p:clrMapOvr>
-    <a:masterClrMapping/>
-  </p:clrMapOvr>
-</p:sld>
-</file>
-
-<file path=ppt/slides/slide8.xml><?xml version="1.0" encoding="utf-8"?>
-<p:sld xmlns:a="http://schemas.openxmlformats.org/drawingml/2006/main" xmlns:r="http://schemas.openxmlformats.org/officeDocument/2006/relationships" xmlns:p="http://schemas.openxmlformats.org/presentationml/2006/main">
-  <p:cSld>
-    <p:spTree>
-      <p:nvGrpSpPr>
-        <p:cNvPr id="1" name=""/>
-        <p:cNvGrpSpPr/>
-        <p:nvPr/>
-      </p:nvGrpSpPr>
-      <p:grpSpPr>
-        <a:xfrm>
-          <a:off x="0" y="0"/>
-          <a:ext cx="0" cy="0"/>
-          <a:chOff x="0" y="0"/>
-          <a:chExt cx="0" cy="0"/>
-        </a:xfrm>
-      </p:grpSpPr>
-      <p:sp>
-        <p:nvSpPr>
-          <p:cNvPr id="22" name="object 2"/>
-          <p:cNvSpPr/>
-          <p:nvPr/>
-        </p:nvSpPr>
-        <p:spPr>
-          <a:xfrm>
-            <a:off x="428625" y="428866"/>
-            <a:ext cx="57150" cy="609600"/>
-          </a:xfrm>
-          <a:custGeom>
-            <a:avLst/>
-            <a:gdLst/>
-            <a:ahLst/>
-            <a:cxnLst/>
-            <a:rect l="l" t="t" r="r" b="b"/>
-            <a:pathLst>
-              <a:path w="57150" h="609600">
-                <a:moveTo>
-                  <a:pt x="56756" y="0"/>
-                </a:moveTo>
-                <a:lnTo>
-                  <a:pt x="0" y="0"/>
-                </a:lnTo>
-                <a:lnTo>
-                  <a:pt x="0" y="609485"/>
-                </a:lnTo>
-                <a:lnTo>
-                  <a:pt x="56756" y="609485"/>
-                </a:lnTo>
-                <a:lnTo>
-                  <a:pt x="56756" y="0"/>
-                </a:lnTo>
-                <a:close/>
-              </a:path>
-            </a:pathLst>
-          </a:custGeom>
-          <a:solidFill>
-            <a:srgbClr val="1E3988"/>
-          </a:solidFill>
-        </p:spPr>
-        <p:txBody>
-          <a:bodyPr wrap="square" lIns="0" tIns="0" rIns="0" bIns="0" rtlCol="0"/>
-          <a:lstStyle/>
-          <a:p>
-            <a:endParaRPr>
-              <a:latin typeface="Raleway Regular" charset="0"/>
-              <a:cs typeface="Raleway Regular" charset="0"/>
-            </a:endParaRPr>
-          </a:p>
-        </p:txBody>
-      </p:sp>
-      <p:sp>
-        <p:nvSpPr>
-          <p:cNvPr id="23" name="object 3"/>
-          <p:cNvSpPr txBox="1">
-            <a:spLocks noGrp="1"/>
-          </p:cNvSpPr>
-          <p:nvPr>
-            <p:ph type="title"/>
-          </p:nvPr>
-        </p:nvSpPr>
-        <p:spPr>
-          <a:xfrm>
-            <a:off x="631190" y="381000"/>
-            <a:ext cx="3439795" cy="335915"/>
-          </a:xfrm>
-          <a:prstGeom prst="rect">
-            <a:avLst/>
-          </a:prstGeom>
-        </p:spPr>
-        <p:txBody>
-          <a:bodyPr vert="horz" wrap="square" lIns="0" tIns="13335" rIns="0" bIns="0" rtlCol="0">
-            <a:spAutoFit/>
-          </a:bodyPr>
-          <a:lstStyle/>
-          <a:p>
-            <a:pPr marL="12700">
-              <a:lnSpc>
-                <a:spcPct val="100000"/>
-              </a:lnSpc>
-              <a:spcBef>
-                <a:spcPts val="105"/>
-              </a:spcBef>
-            </a:pPr>
-            <a:r>
-              <a:rPr lang="en-US" dirty="0">
-                <a:latin typeface="Raleway Regular" charset="0"/>
-                <a:cs typeface="Raleway Regular" charset="0"/>
-              </a:rPr>
-              <a:t>SEO</a:t>
-            </a:r>
-            <a:endParaRPr lang="en-US" spc="-10" dirty="0">
-              <a:latin typeface="Raleway Regular" charset="0"/>
-              <a:cs typeface="Raleway Regular" charset="0"/>
-            </a:endParaRPr>
-          </a:p>
-        </p:txBody>
-      </p:sp>
-      <p:sp>
-        <p:nvSpPr>
-          <p:cNvPr id="24" name="object 5"/>
-          <p:cNvSpPr txBox="1"/>
-          <p:nvPr/>
-        </p:nvSpPr>
-        <p:spPr>
-          <a:xfrm>
-            <a:off x="176212" y="1815838"/>
-            <a:ext cx="3590925" cy="901065"/>
-          </a:xfrm>
-          <a:prstGeom prst="rect">
-            <a:avLst/>
-          </a:prstGeom>
-          <a:solidFill>
-            <a:srgbClr val="F8F8FA"/>
-          </a:solidFill>
-          <a:ln w="9157">
-            <a:solidFill>
-              <a:srgbClr val="E0E8EE"/>
-            </a:solidFill>
-          </a:ln>
-        </p:spPr>
-        <p:txBody>
-          <a:bodyPr vert="horz" wrap="square" lIns="0" tIns="12065" rIns="0" bIns="0" rtlCol="0">
-            <a:spAutoFit/>
-          </a:bodyPr>
-          <a:lstStyle/>
-          <a:p>
-            <a:pPr marL="171450" indent="-171450">
-              <a:lnSpc>
-                <a:spcPct val="100000"/>
-              </a:lnSpc>
-              <a:spcBef>
-                <a:spcPts val="95"/>
-              </a:spcBef>
-              <a:buFont typeface="Arial" panose="020B0704020202020204" pitchFamily="34" charset="0"/>
-              <a:buChar char="•"/>
-            </a:pPr>
-            <a:r>
-              <a:rPr lang="en-US" altLang="en-US" sz="950" dirty="0">
-                <a:solidFill>
-                  <a:srgbClr val="334153"/>
-                </a:solidFill>
-                <a:latin typeface="Raleway Regular" charset="0"/>
-                <a:cs typeface="Raleway Regular" charset="0"/>
-              </a:rPr>
-              <a:t>The search results for Dicomm are correctly pulling through relevant brand-owned and associated pages, with the official Dicomm website appearing prominently as the top result. This indicates that the brand has strong search visibility and is discoverable when users search for Dicomm directly. ​</a:t>
-            </a:r>
-            <a:endParaRPr lang="en-US" altLang="en-US" sz="950" dirty="0">
-              <a:solidFill>
-                <a:srgbClr val="334153"/>
-              </a:solidFill>
-              <a:latin typeface="Raleway Regular" charset="0"/>
-              <a:cs typeface="Raleway Regular" charset="0"/>
-            </a:endParaRPr>
-          </a:p>
-          <a:p>
-            <a:pPr marL="0" indent="0">
-              <a:lnSpc>
-                <a:spcPct val="100000"/>
-              </a:lnSpc>
-              <a:spcBef>
-                <a:spcPts val="95"/>
-              </a:spcBef>
-              <a:buFont typeface="Arial" panose="020B0704020202020204" pitchFamily="34" charset="0"/>
-              <a:buNone/>
-            </a:pPr>
-            <a:endParaRPr lang="en-US" altLang="en-US" sz="950" dirty="0">
-              <a:solidFill>
-                <a:srgbClr val="334153"/>
-              </a:solidFill>
-              <a:latin typeface="Raleway Regular" charset="0"/>
-              <a:cs typeface="Raleway Regular" charset="0"/>
-            </a:endParaRPr>
-          </a:p>
-        </p:txBody>
-      </p:sp>
-      <p:sp>
-        <p:nvSpPr>
-          <p:cNvPr id="25" name="object 3"/>
-          <p:cNvSpPr txBox="1">
-            <a:spLocks noGrp="1"/>
-          </p:cNvSpPr>
-          <p:nvPr/>
-        </p:nvSpPr>
-        <p:spPr>
-          <a:xfrm>
-            <a:off x="631190" y="749300"/>
-            <a:ext cx="3439795" cy="228600"/>
-          </a:xfrm>
-          <a:prstGeom prst="rect">
-            <a:avLst/>
-          </a:prstGeom>
-        </p:spPr>
-        <p:txBody>
-          <a:bodyPr vert="horz" wrap="square" lIns="0" tIns="13335" rIns="0" bIns="0" rtlCol="0">
-            <a:spAutoFit/>
-          </a:bodyPr>
-          <a:lstStyle>
-            <a:lvl1pPr>
-              <a:defRPr sz="2100" b="1" i="0">
-                <a:solidFill>
-                  <a:srgbClr val="1E3988"/>
-                </a:solidFill>
-                <a:latin typeface="Times New Roman" panose="02020603050405020304"/>
-                <a:ea typeface="+mj-ea"/>
-                <a:cs typeface="Times New Roman" panose="02020603050405020304"/>
-              </a:defRPr>
-            </a:lvl1pPr>
-          </a:lstStyle>
-          <a:p>
-            <a:pPr marL="12700">
-              <a:lnSpc>
-                <a:spcPct val="100000"/>
-              </a:lnSpc>
-              <a:spcBef>
-                <a:spcPts val="105"/>
-              </a:spcBef>
-            </a:pPr>
-            <a:r>
-              <a:rPr lang="en-US" sz="1400" dirty="0">
-                <a:solidFill>
-                  <a:schemeClr val="tx1"/>
-                </a:solidFill>
-                <a:latin typeface="Raleway Regular" charset="0"/>
-                <a:cs typeface="Raleway Regular" charset="0"/>
-              </a:rPr>
-              <a:t>Dicomm</a:t>
-            </a:r>
-            <a:endParaRPr lang="en-US" sz="1400" spc="-10" dirty="0">
-              <a:solidFill>
-                <a:schemeClr val="tx1"/>
-              </a:solidFill>
-              <a:latin typeface="Raleway Regular" charset="0"/>
-              <a:cs typeface="Raleway Regular" charset="0"/>
-            </a:endParaRPr>
-          </a:p>
-        </p:txBody>
-      </p:sp>
-      <p:pic>
-        <p:nvPicPr>
-          <p:cNvPr id="27" name="Picture 26" descr="Screenshot 2026-05-29 at 11.10.49"/>
-          <p:cNvPicPr>
-            <a:picLocks noChangeAspect="1"/>
-          </p:cNvPicPr>
-          <p:nvPr/>
-        </p:nvPicPr>
-        <p:blipFill>
-          <a:blip r:embed="rId1"/>
-          <a:stretch>
-            <a:fillRect/>
-          </a:stretch>
-        </p:blipFill>
-        <p:spPr>
-          <a:xfrm>
-            <a:off x="3962400" y="1203325"/>
-            <a:ext cx="5014595" cy="2670810"/>
-          </a:xfrm>
-          <a:prstGeom prst="rect">
-            <a:avLst/>
-          </a:prstGeom>
-        </p:spPr>
-      </p:pic>
-    </p:spTree>
-  </p:cSld>
-  <p:clrMapOvr>
-    <a:masterClrMapping/>
-  </p:clrMapOvr>
-</p:sld>
-</file>
-
-<file path=ppt/slides/slide9.xml><?xml version="1.0" encoding="utf-8"?>
+<file path=ppt/slides/slide2.xml><?xml version="1.0" encoding="utf-8"?>
 <p:sld xmlns:a="http://schemas.openxmlformats.org/drawingml/2006/main" xmlns:p="http://schemas.openxmlformats.org/presentationml/2006/main" xmlns:r="http://schemas.openxmlformats.org/officeDocument/2006/relationships">
   <p:cSld>
     <p:spTree>
@@ -5957,6 +2965,3848 @@
           </a:p>
         </p:txBody>
       </p:sp>
+    </p:spTree>
+  </p:cSld>
+  <p:clrMapOvr>
+    <a:masterClrMapping/>
+  </p:clrMapOvr>
+</p:sld>
+</file>
+
+<file path=ppt/slides/slide3.xml><?xml version="1.0" encoding="utf-8"?>
+<p:sld xmlns:a="http://schemas.openxmlformats.org/drawingml/2006/main" xmlns:r="http://schemas.openxmlformats.org/officeDocument/2006/relationships" xmlns:p="http://schemas.openxmlformats.org/presentationml/2006/main">
+  <p:cSld>
+    <p:spTree>
+      <p:nvGrpSpPr>
+        <p:cNvPr id="1" name=""/>
+        <p:cNvGrpSpPr/>
+        <p:nvPr/>
+      </p:nvGrpSpPr>
+      <p:grpSpPr>
+        <a:xfrm>
+          <a:off x="0" y="0"/>
+          <a:ext cx="0" cy="0"/>
+          <a:chOff x="0" y="0"/>
+          <a:chExt cx="0" cy="0"/>
+        </a:xfrm>
+      </p:grpSpPr>
+      <p:sp>
+        <p:nvSpPr>
+          <p:cNvPr id="2" name="object 2"/>
+          <p:cNvSpPr/>
+          <p:nvPr/>
+        </p:nvSpPr>
+        <p:spPr>
+          <a:xfrm>
+            <a:off x="429768" y="430148"/>
+            <a:ext cx="55244" cy="714375"/>
+          </a:xfrm>
+          <a:custGeom>
+            <a:avLst/>
+            <a:gdLst/>
+            <a:ahLst/>
+            <a:cxnLst/>
+            <a:rect l="l" t="t" r="r" b="b"/>
+            <a:pathLst>
+              <a:path w="55245" h="714375">
+                <a:moveTo>
+                  <a:pt x="54864" y="0"/>
+                </a:moveTo>
+                <a:lnTo>
+                  <a:pt x="0" y="0"/>
+                </a:lnTo>
+                <a:lnTo>
+                  <a:pt x="0" y="713866"/>
+                </a:lnTo>
+                <a:lnTo>
+                  <a:pt x="54864" y="713866"/>
+                </a:lnTo>
+                <a:lnTo>
+                  <a:pt x="54864" y="0"/>
+                </a:lnTo>
+                <a:close/>
+              </a:path>
+            </a:pathLst>
+          </a:custGeom>
+          <a:solidFill>
+            <a:srgbClr val="3A82F6"/>
+          </a:solidFill>
+        </p:spPr>
+        <p:txBody>
+          <a:bodyPr wrap="square" lIns="0" tIns="0" rIns="0" bIns="0" rtlCol="0"/>
+          <a:lstStyle/>
+          <a:p>
+            <a:endParaRPr>
+              <a:latin typeface="Raleway" pitchFamily="2" charset="77"/>
+              <a:cs typeface="Times New Roman" panose="02020603050405020304"/>
+            </a:endParaRPr>
+          </a:p>
+        </p:txBody>
+      </p:sp>
+      <p:sp>
+        <p:nvSpPr>
+          <p:cNvPr id="3" name="object 3"/>
+          <p:cNvSpPr txBox="1">
+            <a:spLocks noGrp="1"/>
+          </p:cNvSpPr>
+          <p:nvPr>
+            <p:ph type="title"/>
+          </p:nvPr>
+        </p:nvSpPr>
+        <p:spPr>
+          <a:xfrm>
+            <a:off x="401612" y="165009"/>
+            <a:ext cx="4932464" cy="589867"/>
+          </a:xfrm>
+          <a:prstGeom prst="rect">
+            <a:avLst/>
+          </a:prstGeom>
+        </p:spPr>
+        <p:txBody>
+          <a:bodyPr vert="horz" wrap="square" lIns="0" tIns="264122" rIns="0" bIns="0" rtlCol="0">
+            <a:spAutoFit/>
+          </a:bodyPr>
+          <a:lstStyle/>
+          <a:p>
+            <a:pPr marL="456565">
+              <a:lnSpc>
+                <a:spcPct val="100000"/>
+              </a:lnSpc>
+              <a:spcBef>
+                <a:spcPts val="90"/>
+              </a:spcBef>
+            </a:pPr>
+            <a:r>
+              <a:rPr>
+                <a:latin typeface="Raleway" pitchFamily="2" charset="77"/>
+                <a:cs typeface="Times New Roman" panose="02020603050405020304"/>
+              </a:rPr>
+              <a:t>Executive</a:t>
+            </a:r>
+            <a:r>
+              <a:rPr spc="125">
+                <a:latin typeface="Raleway" pitchFamily="2" charset="77"/>
+                <a:cs typeface="Times New Roman" panose="02020603050405020304"/>
+              </a:rPr>
+              <a:t> </a:t>
+            </a:r>
+            <a:r>
+              <a:rPr spc="75">
+                <a:latin typeface="Raleway" pitchFamily="2" charset="77"/>
+                <a:cs typeface="Times New Roman" panose="02020603050405020304"/>
+              </a:rPr>
+              <a:t>Summary</a:t>
+            </a:r>
+            <a:endParaRPr spc="75">
+              <a:latin typeface="Raleway" pitchFamily="2" charset="77"/>
+              <a:cs typeface="Times New Roman" panose="02020603050405020304"/>
+            </a:endParaRPr>
+          </a:p>
+        </p:txBody>
+      </p:sp>
+      <p:sp>
+        <p:nvSpPr>
+          <p:cNvPr id="4" name="object 4"/>
+          <p:cNvSpPr txBox="1"/>
+          <p:nvPr/>
+        </p:nvSpPr>
+        <p:spPr>
+          <a:xfrm>
+            <a:off x="845578" y="890714"/>
+            <a:ext cx="5632450" cy="212090"/>
+          </a:xfrm>
+          <a:prstGeom prst="rect">
+            <a:avLst/>
+          </a:prstGeom>
+        </p:spPr>
+        <p:txBody>
+          <a:bodyPr vert="horz" wrap="square" lIns="0" tIns="12065" rIns="0" bIns="0" rtlCol="0">
+            <a:spAutoFit/>
+          </a:bodyPr>
+          <a:lstStyle/>
+          <a:p>
+            <a:pPr marL="12700">
+              <a:lnSpc>
+                <a:spcPct val="100000"/>
+              </a:lnSpc>
+              <a:spcBef>
+                <a:spcPts val="95"/>
+              </a:spcBef>
+            </a:pPr>
+            <a:r>
+              <a:rPr sz="1300">
+                <a:solidFill>
+                  <a:srgbClr val="334154"/>
+                </a:solidFill>
+                <a:latin typeface="Raleway" pitchFamily="2" charset="77"/>
+                <a:cs typeface="Times New Roman" panose="02020603050405020304"/>
+              </a:rPr>
+              <a:t>Performance metrics indicate 96.7% of users are first-time visitors.</a:t>
+            </a:r>
+            <a:endParaRPr sz="1300">
+              <a:solidFill>
+                <a:srgbClr val="334154"/>
+              </a:solidFill>
+              <a:latin typeface="Raleway" pitchFamily="2" charset="77"/>
+              <a:cs typeface="Times New Roman" panose="02020603050405020304"/>
+            </a:endParaRPr>
+          </a:p>
+        </p:txBody>
+      </p:sp>
+      <p:grpSp>
+        <p:nvGrpSpPr>
+          <p:cNvPr id="5" name="object 5"/>
+          <p:cNvGrpSpPr/>
+          <p:nvPr/>
+        </p:nvGrpSpPr>
+        <p:grpSpPr>
+          <a:xfrm>
+            <a:off x="381000" y="1427480"/>
+            <a:ext cx="4291965" cy="2632710"/>
+            <a:chOff x="429768" y="1427683"/>
+            <a:chExt cx="3931920" cy="3523615"/>
+          </a:xfrm>
+        </p:grpSpPr>
+        <p:sp>
+          <p:nvSpPr>
+            <p:cNvPr id="6" name="object 6"/>
+            <p:cNvSpPr/>
+            <p:nvPr/>
+          </p:nvSpPr>
+          <p:spPr>
+            <a:xfrm>
+              <a:off x="429768" y="1427683"/>
+              <a:ext cx="3931920" cy="3523615"/>
+            </a:xfrm>
+            <a:custGeom>
+              <a:avLst/>
+              <a:gdLst/>
+              <a:ahLst/>
+              <a:cxnLst/>
+              <a:rect l="l" t="t" r="r" b="b"/>
+              <a:pathLst>
+                <a:path w="3931920" h="3523615">
+                  <a:moveTo>
+                    <a:pt x="3931920" y="0"/>
+                  </a:moveTo>
+                  <a:lnTo>
+                    <a:pt x="0" y="0"/>
+                  </a:lnTo>
+                  <a:lnTo>
+                    <a:pt x="0" y="3523614"/>
+                  </a:lnTo>
+                  <a:lnTo>
+                    <a:pt x="3931920" y="3523614"/>
+                  </a:lnTo>
+                  <a:lnTo>
+                    <a:pt x="3931920" y="0"/>
+                  </a:lnTo>
+                  <a:close/>
+                </a:path>
+              </a:pathLst>
+            </a:custGeom>
+            <a:solidFill>
+              <a:srgbClr val="F8F9FB"/>
+            </a:solidFill>
+          </p:spPr>
+          <p:txBody>
+            <a:bodyPr wrap="square" lIns="0" tIns="0" rIns="0" bIns="0" rtlCol="0"/>
+            <a:lstStyle/>
+            <a:p>
+              <a:endParaRPr>
+                <a:latin typeface="Raleway" pitchFamily="2" charset="77"/>
+                <a:cs typeface="Times New Roman" panose="02020603050405020304"/>
+              </a:endParaRPr>
+            </a:p>
+          </p:txBody>
+        </p:sp>
+        <p:sp>
+          <p:nvSpPr>
+            <p:cNvPr id="7" name="object 7"/>
+            <p:cNvSpPr/>
+            <p:nvPr/>
+          </p:nvSpPr>
+          <p:spPr>
+            <a:xfrm>
+              <a:off x="429768" y="1427683"/>
+              <a:ext cx="27940" cy="3523615"/>
+            </a:xfrm>
+            <a:custGeom>
+              <a:avLst/>
+              <a:gdLst/>
+              <a:ahLst/>
+              <a:cxnLst/>
+              <a:rect l="l" t="t" r="r" b="b"/>
+              <a:pathLst>
+                <a:path w="27940" h="3523615">
+                  <a:moveTo>
+                    <a:pt x="27431" y="0"/>
+                  </a:moveTo>
+                  <a:lnTo>
+                    <a:pt x="0" y="0"/>
+                  </a:lnTo>
+                  <a:lnTo>
+                    <a:pt x="0" y="3523614"/>
+                  </a:lnTo>
+                  <a:lnTo>
+                    <a:pt x="27431" y="3523614"/>
+                  </a:lnTo>
+                  <a:lnTo>
+                    <a:pt x="27431" y="0"/>
+                  </a:lnTo>
+                  <a:close/>
+                </a:path>
+              </a:pathLst>
+            </a:custGeom>
+            <a:solidFill>
+              <a:srgbClr val="1E3989"/>
+            </a:solidFill>
+          </p:spPr>
+          <p:txBody>
+            <a:bodyPr wrap="square" lIns="0" tIns="0" rIns="0" bIns="0" rtlCol="0"/>
+            <a:lstStyle/>
+            <a:p>
+              <a:endParaRPr>
+                <a:latin typeface="Raleway" pitchFamily="2" charset="77"/>
+                <a:cs typeface="Times New Roman" panose="02020603050405020304"/>
+              </a:endParaRPr>
+            </a:p>
+          </p:txBody>
+        </p:sp>
+      </p:grpSp>
+      <p:sp>
+        <p:nvSpPr>
+          <p:cNvPr id="8" name="object 8"/>
+          <p:cNvSpPr txBox="1">
+            <a:spLocks noGrp="1"/>
+          </p:cNvSpPr>
+          <p:nvPr>
+            <p:ph type="body" idx="1"/>
+          </p:nvPr>
+        </p:nvSpPr>
+        <p:spPr>
+          <a:xfrm>
+            <a:off x="477579" y="1431875"/>
+            <a:ext cx="4122007" cy="1704975"/>
+          </a:xfrm>
+          <a:prstGeom prst="rect">
+            <a:avLst/>
+          </a:prstGeom>
+        </p:spPr>
+        <p:txBody>
+          <a:bodyPr vert="horz" wrap="square" lIns="0" tIns="12700" rIns="0" bIns="0" rtlCol="0" anchor="t">
+            <a:spAutoFit/>
+          </a:bodyPr>
+          <a:lstStyle/>
+          <a:p>
+            <a:r>
+              <a:rPr lang="en-US" altLang="en-US" spc="-50">
+                <a:latin typeface="Raleway" pitchFamily="2" charset="77"/>
+                <a:cs typeface="Times New Roman" panose="02020603050405020304"/>
+              </a:rPr>
+              <a:t>The Dicomm website exhibited solid overall performance, attracting 633 active users, of whom 612 (96.7%) were new visitors. This substantial proportion of first-time users reflects effective audience acquisition and sustained brand visibility across digital channels.</a:t>
+            </a:r>
+            <a:endParaRPr lang="en-US" altLang="en-US" spc="-50">
+              <a:latin typeface="Raleway" pitchFamily="2" charset="77"/>
+              <a:cs typeface="Times New Roman" panose="02020603050405020304"/>
+            </a:endParaRPr>
+          </a:p>
+          <a:p>
+            <a:endParaRPr lang="en-US" altLang="en-US" spc="-50">
+              <a:latin typeface="Raleway" pitchFamily="2" charset="77"/>
+              <a:cs typeface="Times New Roman" panose="02020603050405020304"/>
+            </a:endParaRPr>
+          </a:p>
+          <a:p>
+            <a:r>
+              <a:rPr lang="en-US" altLang="en-US" spc="-50">
+                <a:latin typeface="Raleway" pitchFamily="2" charset="77"/>
+                <a:cs typeface="Times New Roman" panose="02020603050405020304"/>
+              </a:rPr>
+              <a:t>An average engagement time of 1m 08s signifies meaningful content interaction. Users are engaging with the platform's content rather than exiting promptly, demonstrating relevant and compelling material, irrespective of current audience size.</a:t>
+            </a:r>
+            <a:endParaRPr lang="en-US" altLang="en-US" spc="-50">
+              <a:latin typeface="Raleway" pitchFamily="2" charset="77"/>
+              <a:cs typeface="Times New Roman" panose="02020603050405020304"/>
+            </a:endParaRPr>
+          </a:p>
+          <a:p>
+            <a:endParaRPr lang="en-US" altLang="en-US" spc="-50">
+              <a:latin typeface="Raleway" pitchFamily="2" charset="77"/>
+              <a:cs typeface="Times New Roman" panose="02020603050405020304"/>
+            </a:endParaRPr>
+          </a:p>
+          <a:p>
+            <a:endParaRPr lang="en-US" altLang="en-US" spc="-50">
+              <a:latin typeface="Raleway" pitchFamily="2" charset="77"/>
+              <a:cs typeface="Times New Roman" panose="02020603050405020304"/>
+            </a:endParaRPr>
+          </a:p>
+        </p:txBody>
+      </p:sp>
+      <p:sp>
+        <p:nvSpPr>
+          <p:cNvPr id="9" name="object 9"/>
+          <p:cNvSpPr txBox="1"/>
+          <p:nvPr/>
+        </p:nvSpPr>
+        <p:spPr>
+          <a:xfrm>
+            <a:off x="5354314" y="1533290"/>
+            <a:ext cx="2266249" cy="666115"/>
+          </a:xfrm>
+          <a:prstGeom prst="rect">
+            <a:avLst/>
+          </a:prstGeom>
+          <a:solidFill>
+            <a:srgbClr val="1E3989"/>
+          </a:solidFill>
+        </p:spPr>
+        <p:txBody>
+          <a:bodyPr vert="horz" wrap="square" lIns="0" tIns="175260" rIns="0" bIns="0" rtlCol="0" anchor="t">
+            <a:spAutoFit/>
+          </a:bodyPr>
+          <a:lstStyle/>
+          <a:p>
+            <a:pPr marL="409575" algn="ctr">
+              <a:lnSpc>
+                <a:spcPct val="100000"/>
+              </a:lnSpc>
+              <a:spcBef>
+                <a:spcPts val="1380"/>
+              </a:spcBef>
+            </a:pPr>
+            <a:r>
+              <a:rPr lang="en-US" altLang="en-GB" b="1" spc="-25">
+                <a:solidFill>
+                  <a:srgbClr val="FFFFFF"/>
+                </a:solidFill>
+                <a:latin typeface="Raleway" pitchFamily="2" charset="77"/>
+                <a:cs typeface="Times New Roman" panose="02020603050405020304"/>
+              </a:rPr>
+              <a:t>633</a:t>
+            </a:r>
+            <a:endParaRPr lang="en-US" altLang="en-GB" b="1" spc="-25">
+              <a:solidFill>
+                <a:srgbClr val="FFFFFF"/>
+              </a:solidFill>
+              <a:latin typeface="Raleway" pitchFamily="2" charset="77"/>
+              <a:cs typeface="Times New Roman" panose="02020603050405020304"/>
+            </a:endParaRPr>
+          </a:p>
+          <a:p>
+            <a:pPr marL="347980" algn="ctr">
+              <a:lnSpc>
+                <a:spcPct val="100000"/>
+              </a:lnSpc>
+              <a:spcBef>
+                <a:spcPts val="830"/>
+              </a:spcBef>
+            </a:pPr>
+            <a:r>
+              <a:rPr sz="700">
+                <a:solidFill>
+                  <a:srgbClr val="FFFFFF"/>
+                </a:solidFill>
+                <a:latin typeface="Raleway" pitchFamily="2" charset="77"/>
+                <a:cs typeface="Times New Roman" panose="02020603050405020304"/>
+              </a:rPr>
+              <a:t>Active</a:t>
+            </a:r>
+            <a:r>
+              <a:rPr sz="700" spc="105">
+                <a:solidFill>
+                  <a:srgbClr val="FFFFFF"/>
+                </a:solidFill>
+                <a:latin typeface="Raleway" pitchFamily="2" charset="77"/>
+                <a:cs typeface="Times New Roman" panose="02020603050405020304"/>
+              </a:rPr>
+              <a:t> </a:t>
+            </a:r>
+            <a:r>
+              <a:rPr sz="700" spc="-10">
+                <a:solidFill>
+                  <a:srgbClr val="FFFFFF"/>
+                </a:solidFill>
+                <a:latin typeface="Raleway" pitchFamily="2" charset="77"/>
+                <a:cs typeface="Times New Roman" panose="02020603050405020304"/>
+              </a:rPr>
+              <a:t>Users</a:t>
+            </a:r>
+            <a:endParaRPr sz="700">
+              <a:latin typeface="Raleway" pitchFamily="2" charset="77"/>
+              <a:cs typeface="Times New Roman" panose="02020603050405020304"/>
+            </a:endParaRPr>
+          </a:p>
+        </p:txBody>
+      </p:sp>
+      <p:sp>
+        <p:nvSpPr>
+          <p:cNvPr id="10" name="object 10"/>
+          <p:cNvSpPr txBox="1"/>
+          <p:nvPr/>
+        </p:nvSpPr>
+        <p:spPr>
+          <a:xfrm>
+            <a:off x="5354857" y="2566308"/>
+            <a:ext cx="2269646" cy="666115"/>
+          </a:xfrm>
+          <a:prstGeom prst="rect">
+            <a:avLst/>
+          </a:prstGeom>
+          <a:solidFill>
+            <a:srgbClr val="1E3989"/>
+          </a:solidFill>
+        </p:spPr>
+        <p:txBody>
+          <a:bodyPr vert="horz" wrap="square" lIns="0" tIns="175260" rIns="0" bIns="0" rtlCol="0" anchor="t">
+            <a:spAutoFit/>
+          </a:bodyPr>
+          <a:lstStyle/>
+          <a:p>
+            <a:pPr marL="290830" algn="ctr">
+              <a:lnSpc>
+                <a:spcPct val="100000"/>
+              </a:lnSpc>
+              <a:spcBef>
+                <a:spcPts val="1380"/>
+              </a:spcBef>
+            </a:pPr>
+            <a:r>
+              <a:rPr lang="en-US" altLang="en-GB" b="1" spc="-10">
+                <a:solidFill>
+                  <a:srgbClr val="FFFFFF"/>
+                </a:solidFill>
+                <a:latin typeface="Raleway" pitchFamily="2" charset="77"/>
+                <a:cs typeface="Times New Roman" panose="02020603050405020304"/>
+              </a:rPr>
+              <a:t>96.7%</a:t>
+            </a:r>
+            <a:endParaRPr lang="en-US" altLang="en-GB" b="1" spc="-10">
+              <a:solidFill>
+                <a:srgbClr val="FFFFFF"/>
+              </a:solidFill>
+              <a:latin typeface="Raleway" pitchFamily="2" charset="77"/>
+              <a:cs typeface="Times New Roman" panose="02020603050405020304"/>
+            </a:endParaRPr>
+          </a:p>
+          <a:p>
+            <a:pPr marL="344805" algn="ctr">
+              <a:lnSpc>
+                <a:spcPct val="100000"/>
+              </a:lnSpc>
+              <a:spcBef>
+                <a:spcPts val="830"/>
+              </a:spcBef>
+            </a:pPr>
+            <a:r>
+              <a:rPr sz="700" spc="70">
+                <a:solidFill>
+                  <a:srgbClr val="FFFFFF"/>
+                </a:solidFill>
+                <a:latin typeface="Raleway" pitchFamily="2" charset="77"/>
+                <a:cs typeface="Times New Roman" panose="02020603050405020304"/>
+              </a:rPr>
+              <a:t>New</a:t>
+            </a:r>
+            <a:r>
+              <a:rPr sz="700" spc="-5">
+                <a:solidFill>
+                  <a:srgbClr val="FFFFFF"/>
+                </a:solidFill>
+                <a:latin typeface="Raleway" pitchFamily="2" charset="77"/>
+                <a:cs typeface="Times New Roman" panose="02020603050405020304"/>
+              </a:rPr>
+              <a:t> </a:t>
+            </a:r>
+            <a:r>
+              <a:rPr sz="700" spc="-10">
+                <a:solidFill>
+                  <a:srgbClr val="FFFFFF"/>
+                </a:solidFill>
+                <a:latin typeface="Raleway" pitchFamily="2" charset="77"/>
+                <a:cs typeface="Times New Roman" panose="02020603050405020304"/>
+              </a:rPr>
+              <a:t>Visitors</a:t>
+            </a:r>
+            <a:endParaRPr sz="700">
+              <a:latin typeface="Raleway" pitchFamily="2" charset="77"/>
+              <a:cs typeface="Times New Roman" panose="02020603050405020304"/>
+            </a:endParaRPr>
+          </a:p>
+        </p:txBody>
+      </p:sp>
+    </p:spTree>
+  </p:cSld>
+  <p:clrMapOvr>
+    <a:masterClrMapping/>
+  </p:clrMapOvr>
+</p:sld>
+</file>
+
+<file path=ppt/slides/slide4.xml><?xml version="1.0" encoding="utf-8"?>
+<p:sld xmlns:a="http://schemas.openxmlformats.org/drawingml/2006/main" xmlns:r="http://schemas.openxmlformats.org/officeDocument/2006/relationships" xmlns:p="http://schemas.openxmlformats.org/presentationml/2006/main" showMasterSp="0">
+  <p:cSld>
+    <p:spTree>
+      <p:nvGrpSpPr>
+        <p:cNvPr id="1" name=""/>
+        <p:cNvGrpSpPr/>
+        <p:nvPr/>
+      </p:nvGrpSpPr>
+      <p:grpSpPr>
+        <a:xfrm>
+          <a:off x="0" y="0"/>
+          <a:ext cx="0" cy="0"/>
+          <a:chOff x="0" y="0"/>
+          <a:chExt cx="0" cy="0"/>
+        </a:xfrm>
+      </p:grpSpPr>
+      <p:sp>
+        <p:nvSpPr>
+          <p:cNvPr id="2" name="object 2"/>
+          <p:cNvSpPr txBox="1">
+            <a:spLocks noGrp="1"/>
+          </p:cNvSpPr>
+          <p:nvPr>
+            <p:ph type="title"/>
+          </p:nvPr>
+        </p:nvSpPr>
+        <p:spPr>
+          <a:xfrm>
+            <a:off x="401612" y="165009"/>
+            <a:ext cx="4932464" cy="828040"/>
+          </a:xfrm>
+          <a:prstGeom prst="rect">
+            <a:avLst/>
+          </a:prstGeom>
+        </p:spPr>
+        <p:txBody>
+          <a:bodyPr vert="horz" wrap="square" lIns="0" tIns="69215" rIns="0" bIns="0" rtlCol="0" anchor="t">
+            <a:spAutoFit/>
+          </a:bodyPr>
+          <a:lstStyle/>
+          <a:p>
+            <a:pPr marL="226695">
+              <a:lnSpc>
+                <a:spcPct val="100000"/>
+              </a:lnSpc>
+              <a:spcBef>
+                <a:spcPts val="545"/>
+              </a:spcBef>
+            </a:pPr>
+            <a:r>
+              <a:rPr>
+                <a:latin typeface="Raleway" pitchFamily="2" charset="77"/>
+                <a:cs typeface="Times New Roman" panose="02020603050405020304"/>
+              </a:rPr>
+              <a:t>Site</a:t>
+            </a:r>
+            <a:r>
+              <a:rPr spc="40">
+                <a:latin typeface="Raleway" pitchFamily="2" charset="77"/>
+                <a:cs typeface="Times New Roman" panose="02020603050405020304"/>
+              </a:rPr>
+              <a:t> </a:t>
+            </a:r>
+            <a:r>
+              <a:rPr spc="-10">
+                <a:latin typeface="Raleway" pitchFamily="2" charset="77"/>
+                <a:cs typeface="Times New Roman" panose="02020603050405020304"/>
+              </a:rPr>
+              <a:t>Overview</a:t>
+            </a:r>
+            <a:endParaRPr lang="en-US">
+              <a:latin typeface="Raleway" pitchFamily="2" charset="77"/>
+            </a:endParaRPr>
+          </a:p>
+          <a:p>
+            <a:pPr marL="226695">
+              <a:spcBef>
+                <a:spcPts val="280"/>
+              </a:spcBef>
+            </a:pPr>
+            <a:r>
+              <a:rPr sz="1300" b="0">
+                <a:solidFill>
+                  <a:srgbClr val="334154"/>
+                </a:solidFill>
+                <a:latin typeface="Raleway" pitchFamily="2" charset="77"/>
+                <a:cs typeface="Times New Roman" panose="02020603050405020304"/>
+              </a:rPr>
+              <a:t>User engagement metrics confirm a baseline of 633 active users.</a:t>
+            </a:r>
+            <a:endParaRPr sz="1300" b="0">
+              <a:solidFill>
+                <a:srgbClr val="334154"/>
+              </a:solidFill>
+              <a:latin typeface="Raleway" pitchFamily="2" charset="77"/>
+              <a:cs typeface="Times New Roman" panose="02020603050405020304"/>
+            </a:endParaRPr>
+          </a:p>
+        </p:txBody>
+      </p:sp>
+      <p:grpSp>
+        <p:nvGrpSpPr>
+          <p:cNvPr id="3" name="object 3"/>
+          <p:cNvGrpSpPr/>
+          <p:nvPr/>
+        </p:nvGrpSpPr>
+        <p:grpSpPr>
+          <a:xfrm>
+            <a:off x="429768" y="1043355"/>
+            <a:ext cx="2670175" cy="942975"/>
+            <a:chOff x="429768" y="1043355"/>
+            <a:chExt cx="2670175" cy="942975"/>
+          </a:xfrm>
+        </p:grpSpPr>
+        <p:sp>
+          <p:nvSpPr>
+            <p:cNvPr id="4" name="object 4"/>
+            <p:cNvSpPr/>
+            <p:nvPr/>
+          </p:nvSpPr>
+          <p:spPr>
+            <a:xfrm>
+              <a:off x="429768" y="1043355"/>
+              <a:ext cx="2670175" cy="942975"/>
+            </a:xfrm>
+            <a:custGeom>
+              <a:avLst/>
+              <a:gdLst/>
+              <a:ahLst/>
+              <a:cxnLst/>
+              <a:rect l="l" t="t" r="r" b="b"/>
+              <a:pathLst>
+                <a:path w="2670175" h="942975">
+                  <a:moveTo>
+                    <a:pt x="2670048" y="0"/>
+                  </a:moveTo>
+                  <a:lnTo>
+                    <a:pt x="0" y="0"/>
+                  </a:lnTo>
+                  <a:lnTo>
+                    <a:pt x="0" y="942670"/>
+                  </a:lnTo>
+                  <a:lnTo>
+                    <a:pt x="2670048" y="942670"/>
+                  </a:lnTo>
+                  <a:lnTo>
+                    <a:pt x="2670048" y="0"/>
+                  </a:lnTo>
+                  <a:close/>
+                </a:path>
+              </a:pathLst>
+            </a:custGeom>
+            <a:solidFill>
+              <a:srgbClr val="F0F5F8"/>
+            </a:solidFill>
+          </p:spPr>
+          <p:txBody>
+            <a:bodyPr wrap="square" lIns="0" tIns="0" rIns="0" bIns="0" rtlCol="0"/>
+            <a:lstStyle/>
+            <a:p>
+              <a:endParaRPr>
+                <a:latin typeface="Raleway" pitchFamily="2" charset="77"/>
+                <a:cs typeface="Times New Roman" panose="02020603050405020304"/>
+              </a:endParaRPr>
+            </a:p>
+          </p:txBody>
+        </p:sp>
+        <p:sp>
+          <p:nvSpPr>
+            <p:cNvPr id="5" name="object 5"/>
+            <p:cNvSpPr/>
+            <p:nvPr/>
+          </p:nvSpPr>
+          <p:spPr>
+            <a:xfrm>
+              <a:off x="429768" y="1958569"/>
+              <a:ext cx="2670175" cy="27940"/>
+            </a:xfrm>
+            <a:custGeom>
+              <a:avLst/>
+              <a:gdLst/>
+              <a:ahLst/>
+              <a:cxnLst/>
+              <a:rect l="l" t="t" r="r" b="b"/>
+              <a:pathLst>
+                <a:path w="2670175" h="27939">
+                  <a:moveTo>
+                    <a:pt x="2670048" y="0"/>
+                  </a:moveTo>
+                  <a:lnTo>
+                    <a:pt x="0" y="0"/>
+                  </a:lnTo>
+                  <a:lnTo>
+                    <a:pt x="0" y="27456"/>
+                  </a:lnTo>
+                  <a:lnTo>
+                    <a:pt x="2670048" y="27456"/>
+                  </a:lnTo>
+                  <a:lnTo>
+                    <a:pt x="2670048" y="0"/>
+                  </a:lnTo>
+                  <a:close/>
+                </a:path>
+              </a:pathLst>
+            </a:custGeom>
+            <a:solidFill>
+              <a:srgbClr val="1E3989"/>
+            </a:solidFill>
+          </p:spPr>
+          <p:txBody>
+            <a:bodyPr wrap="square" lIns="0" tIns="0" rIns="0" bIns="0" rtlCol="0"/>
+            <a:lstStyle/>
+            <a:p>
+              <a:endParaRPr>
+                <a:latin typeface="Raleway" pitchFamily="2" charset="77"/>
+                <a:cs typeface="Times New Roman" panose="02020603050405020304"/>
+              </a:endParaRPr>
+            </a:p>
+          </p:txBody>
+        </p:sp>
+      </p:grpSp>
+      <p:sp>
+        <p:nvSpPr>
+          <p:cNvPr id="6" name="object 6"/>
+          <p:cNvSpPr txBox="1"/>
+          <p:nvPr/>
+        </p:nvSpPr>
+        <p:spPr>
+          <a:xfrm>
+            <a:off x="429768" y="1170634"/>
+            <a:ext cx="2670175" cy="616585"/>
+          </a:xfrm>
+          <a:prstGeom prst="rect">
+            <a:avLst/>
+          </a:prstGeom>
+        </p:spPr>
+        <p:txBody>
+          <a:bodyPr vert="horz" wrap="square" lIns="0" tIns="13335" rIns="0" bIns="0" rtlCol="0" anchor="t">
+            <a:spAutoFit/>
+          </a:bodyPr>
+          <a:lstStyle/>
+          <a:p>
+            <a:pPr marL="141605">
+              <a:lnSpc>
+                <a:spcPct val="100000"/>
+              </a:lnSpc>
+              <a:spcBef>
+                <a:spcPts val="105"/>
+              </a:spcBef>
+            </a:pPr>
+            <a:r>
+              <a:rPr lang="en-US" altLang="en-GB" sz="2450" b="1" spc="-10">
+                <a:solidFill>
+                  <a:srgbClr val="1E3989"/>
+                </a:solidFill>
+                <a:latin typeface="Raleway" pitchFamily="2" charset="77"/>
+                <a:cs typeface="Times New Roman" panose="02020603050405020304"/>
+              </a:rPr>
+              <a:t>633</a:t>
+            </a:r>
+            <a:endParaRPr lang="en-US" altLang="en-GB" sz="2450" b="1" spc="-10">
+              <a:solidFill>
+                <a:srgbClr val="1E3989"/>
+              </a:solidFill>
+              <a:latin typeface="Raleway" pitchFamily="2" charset="77"/>
+              <a:cs typeface="Times New Roman" panose="02020603050405020304"/>
+            </a:endParaRPr>
+          </a:p>
+          <a:p>
+            <a:pPr marL="141605">
+              <a:lnSpc>
+                <a:spcPct val="100000"/>
+              </a:lnSpc>
+              <a:spcBef>
+                <a:spcPts val="805"/>
+              </a:spcBef>
+            </a:pPr>
+            <a:r>
+              <a:rPr sz="800" b="1">
+                <a:solidFill>
+                  <a:srgbClr val="63748A"/>
+                </a:solidFill>
+                <a:latin typeface="Raleway" pitchFamily="2" charset="77"/>
+                <a:cs typeface="Times New Roman" panose="02020603050405020304"/>
+              </a:rPr>
+              <a:t>Total Active Users</a:t>
+            </a:r>
+            <a:endParaRPr sz="800" b="1">
+              <a:solidFill>
+                <a:srgbClr val="63748A"/>
+              </a:solidFill>
+              <a:latin typeface="Raleway" pitchFamily="2" charset="77"/>
+              <a:cs typeface="Times New Roman" panose="02020603050405020304"/>
+            </a:endParaRPr>
+          </a:p>
+        </p:txBody>
+      </p:sp>
+      <p:grpSp>
+        <p:nvGrpSpPr>
+          <p:cNvPr id="7" name="object 7"/>
+          <p:cNvGrpSpPr/>
+          <p:nvPr/>
+        </p:nvGrpSpPr>
+        <p:grpSpPr>
+          <a:xfrm>
+            <a:off x="3236976" y="1043355"/>
+            <a:ext cx="2670175" cy="942975"/>
+            <a:chOff x="3236976" y="1043355"/>
+            <a:chExt cx="2670175" cy="942975"/>
+          </a:xfrm>
+        </p:grpSpPr>
+        <p:sp>
+          <p:nvSpPr>
+            <p:cNvPr id="8" name="object 8"/>
+            <p:cNvSpPr/>
+            <p:nvPr/>
+          </p:nvSpPr>
+          <p:spPr>
+            <a:xfrm>
+              <a:off x="3236976" y="1043355"/>
+              <a:ext cx="2670175" cy="942975"/>
+            </a:xfrm>
+            <a:custGeom>
+              <a:avLst/>
+              <a:gdLst/>
+              <a:ahLst/>
+              <a:cxnLst/>
+              <a:rect l="l" t="t" r="r" b="b"/>
+              <a:pathLst>
+                <a:path w="2670175" h="942975">
+                  <a:moveTo>
+                    <a:pt x="2670048" y="0"/>
+                  </a:moveTo>
+                  <a:lnTo>
+                    <a:pt x="0" y="0"/>
+                  </a:lnTo>
+                  <a:lnTo>
+                    <a:pt x="0" y="942670"/>
+                  </a:lnTo>
+                  <a:lnTo>
+                    <a:pt x="2670048" y="942670"/>
+                  </a:lnTo>
+                  <a:lnTo>
+                    <a:pt x="2670048" y="0"/>
+                  </a:lnTo>
+                  <a:close/>
+                </a:path>
+              </a:pathLst>
+            </a:custGeom>
+            <a:solidFill>
+              <a:srgbClr val="F0F5F8"/>
+            </a:solidFill>
+          </p:spPr>
+          <p:txBody>
+            <a:bodyPr wrap="square" lIns="0" tIns="0" rIns="0" bIns="0" rtlCol="0"/>
+            <a:lstStyle/>
+            <a:p>
+              <a:endParaRPr>
+                <a:latin typeface="Raleway" pitchFamily="2" charset="77"/>
+                <a:cs typeface="Times New Roman" panose="02020603050405020304"/>
+              </a:endParaRPr>
+            </a:p>
+          </p:txBody>
+        </p:sp>
+        <p:sp>
+          <p:nvSpPr>
+            <p:cNvPr id="9" name="object 9"/>
+            <p:cNvSpPr/>
+            <p:nvPr/>
+          </p:nvSpPr>
+          <p:spPr>
+            <a:xfrm>
+              <a:off x="3236976" y="1958569"/>
+              <a:ext cx="2670175" cy="27940"/>
+            </a:xfrm>
+            <a:custGeom>
+              <a:avLst/>
+              <a:gdLst/>
+              <a:ahLst/>
+              <a:cxnLst/>
+              <a:rect l="l" t="t" r="r" b="b"/>
+              <a:pathLst>
+                <a:path w="2670175" h="27939">
+                  <a:moveTo>
+                    <a:pt x="2670048" y="0"/>
+                  </a:moveTo>
+                  <a:lnTo>
+                    <a:pt x="0" y="0"/>
+                  </a:lnTo>
+                  <a:lnTo>
+                    <a:pt x="0" y="27456"/>
+                  </a:lnTo>
+                  <a:lnTo>
+                    <a:pt x="2670048" y="27456"/>
+                  </a:lnTo>
+                  <a:lnTo>
+                    <a:pt x="2670048" y="0"/>
+                  </a:lnTo>
+                  <a:close/>
+                </a:path>
+              </a:pathLst>
+            </a:custGeom>
+            <a:solidFill>
+              <a:srgbClr val="1E3989"/>
+            </a:solidFill>
+          </p:spPr>
+          <p:txBody>
+            <a:bodyPr wrap="square" lIns="0" tIns="0" rIns="0" bIns="0" rtlCol="0"/>
+            <a:lstStyle/>
+            <a:p>
+              <a:endParaRPr>
+                <a:latin typeface="Raleway" pitchFamily="2" charset="77"/>
+                <a:cs typeface="Times New Roman" panose="02020603050405020304"/>
+              </a:endParaRPr>
+            </a:p>
+          </p:txBody>
+        </p:sp>
+      </p:grpSp>
+      <p:sp>
+        <p:nvSpPr>
+          <p:cNvPr id="10" name="object 10"/>
+          <p:cNvSpPr txBox="1"/>
+          <p:nvPr/>
+        </p:nvSpPr>
+        <p:spPr>
+          <a:xfrm>
+            <a:off x="3236976" y="1170634"/>
+            <a:ext cx="2670175" cy="616585"/>
+          </a:xfrm>
+          <a:prstGeom prst="rect">
+            <a:avLst/>
+          </a:prstGeom>
+        </p:spPr>
+        <p:txBody>
+          <a:bodyPr vert="horz" wrap="square" lIns="0" tIns="13335" rIns="0" bIns="0" rtlCol="0" anchor="t">
+            <a:spAutoFit/>
+          </a:bodyPr>
+          <a:lstStyle/>
+          <a:p>
+            <a:pPr marL="147320">
+              <a:lnSpc>
+                <a:spcPct val="100000"/>
+              </a:lnSpc>
+              <a:spcBef>
+                <a:spcPts val="105"/>
+              </a:spcBef>
+            </a:pPr>
+            <a:r>
+              <a:rPr lang="en-US" altLang="en-GB" sz="2450" b="1" spc="-10">
+                <a:solidFill>
+                  <a:srgbClr val="1E3989"/>
+                </a:solidFill>
+                <a:latin typeface="Raleway" pitchFamily="2" charset="77"/>
+                <a:cs typeface="Times New Roman" panose="02020603050405020304"/>
+              </a:rPr>
+              <a:t>613</a:t>
+            </a:r>
+            <a:endParaRPr lang="en-US" altLang="en-GB" sz="2450" b="1" spc="-10">
+              <a:solidFill>
+                <a:srgbClr val="1E3989"/>
+              </a:solidFill>
+              <a:latin typeface="Raleway" pitchFamily="2" charset="77"/>
+              <a:cs typeface="Times New Roman" panose="02020603050405020304"/>
+            </a:endParaRPr>
+          </a:p>
+          <a:p>
+            <a:pPr marL="147320">
+              <a:lnSpc>
+                <a:spcPct val="100000"/>
+              </a:lnSpc>
+              <a:spcBef>
+                <a:spcPts val="805"/>
+              </a:spcBef>
+            </a:pPr>
+            <a:r>
+              <a:rPr sz="800" b="1">
+                <a:solidFill>
+                  <a:srgbClr val="63748A"/>
+                </a:solidFill>
+                <a:latin typeface="Raleway" pitchFamily="2" charset="77"/>
+                <a:cs typeface="Times New Roman" panose="02020603050405020304"/>
+              </a:rPr>
+              <a:t>New Users (96.7%)</a:t>
+            </a:r>
+            <a:endParaRPr sz="800" b="1">
+              <a:solidFill>
+                <a:srgbClr val="63748A"/>
+              </a:solidFill>
+              <a:latin typeface="Raleway" pitchFamily="2" charset="77"/>
+              <a:cs typeface="Times New Roman" panose="02020603050405020304"/>
+            </a:endParaRPr>
+          </a:p>
+        </p:txBody>
+      </p:sp>
+      <p:grpSp>
+        <p:nvGrpSpPr>
+          <p:cNvPr id="11" name="object 11"/>
+          <p:cNvGrpSpPr/>
+          <p:nvPr/>
+        </p:nvGrpSpPr>
+        <p:grpSpPr>
+          <a:xfrm>
+            <a:off x="6044184" y="1043355"/>
+            <a:ext cx="2670175" cy="942975"/>
+            <a:chOff x="6044184" y="1043355"/>
+            <a:chExt cx="2670175" cy="942975"/>
+          </a:xfrm>
+        </p:grpSpPr>
+        <p:sp>
+          <p:nvSpPr>
+            <p:cNvPr id="12" name="object 12"/>
+            <p:cNvSpPr/>
+            <p:nvPr/>
+          </p:nvSpPr>
+          <p:spPr>
+            <a:xfrm>
+              <a:off x="6044184" y="1043355"/>
+              <a:ext cx="2670175" cy="942975"/>
+            </a:xfrm>
+            <a:custGeom>
+              <a:avLst/>
+              <a:gdLst/>
+              <a:ahLst/>
+              <a:cxnLst/>
+              <a:rect l="l" t="t" r="r" b="b"/>
+              <a:pathLst>
+                <a:path w="2670175" h="942975">
+                  <a:moveTo>
+                    <a:pt x="2670048" y="0"/>
+                  </a:moveTo>
+                  <a:lnTo>
+                    <a:pt x="0" y="0"/>
+                  </a:lnTo>
+                  <a:lnTo>
+                    <a:pt x="0" y="942670"/>
+                  </a:lnTo>
+                  <a:lnTo>
+                    <a:pt x="2670048" y="942670"/>
+                  </a:lnTo>
+                  <a:lnTo>
+                    <a:pt x="2670048" y="0"/>
+                  </a:lnTo>
+                  <a:close/>
+                </a:path>
+              </a:pathLst>
+            </a:custGeom>
+            <a:solidFill>
+              <a:srgbClr val="F0F5F8"/>
+            </a:solidFill>
+          </p:spPr>
+          <p:txBody>
+            <a:bodyPr wrap="square" lIns="0" tIns="0" rIns="0" bIns="0" rtlCol="0"/>
+            <a:lstStyle/>
+            <a:p>
+              <a:endParaRPr>
+                <a:latin typeface="Raleway" pitchFamily="2" charset="77"/>
+                <a:cs typeface="Times New Roman" panose="02020603050405020304"/>
+              </a:endParaRPr>
+            </a:p>
+          </p:txBody>
+        </p:sp>
+        <p:sp>
+          <p:nvSpPr>
+            <p:cNvPr id="13" name="object 13"/>
+            <p:cNvSpPr/>
+            <p:nvPr/>
+          </p:nvSpPr>
+          <p:spPr>
+            <a:xfrm>
+              <a:off x="6044184" y="1958569"/>
+              <a:ext cx="2670175" cy="27940"/>
+            </a:xfrm>
+            <a:custGeom>
+              <a:avLst/>
+              <a:gdLst/>
+              <a:ahLst/>
+              <a:cxnLst/>
+              <a:rect l="l" t="t" r="r" b="b"/>
+              <a:pathLst>
+                <a:path w="2670175" h="27939">
+                  <a:moveTo>
+                    <a:pt x="2670048" y="0"/>
+                  </a:moveTo>
+                  <a:lnTo>
+                    <a:pt x="0" y="0"/>
+                  </a:lnTo>
+                  <a:lnTo>
+                    <a:pt x="0" y="27456"/>
+                  </a:lnTo>
+                  <a:lnTo>
+                    <a:pt x="2670048" y="27456"/>
+                  </a:lnTo>
+                  <a:lnTo>
+                    <a:pt x="2670048" y="0"/>
+                  </a:lnTo>
+                  <a:close/>
+                </a:path>
+              </a:pathLst>
+            </a:custGeom>
+            <a:solidFill>
+              <a:srgbClr val="1E3989"/>
+            </a:solidFill>
+          </p:spPr>
+          <p:txBody>
+            <a:bodyPr wrap="square" lIns="0" tIns="0" rIns="0" bIns="0" rtlCol="0"/>
+            <a:lstStyle/>
+            <a:p>
+              <a:endParaRPr>
+                <a:latin typeface="Raleway" pitchFamily="2" charset="77"/>
+                <a:cs typeface="Times New Roman" panose="02020603050405020304"/>
+              </a:endParaRPr>
+            </a:p>
+          </p:txBody>
+        </p:sp>
+      </p:grpSp>
+      <p:sp>
+        <p:nvSpPr>
+          <p:cNvPr id="14" name="object 14"/>
+          <p:cNvSpPr txBox="1"/>
+          <p:nvPr/>
+        </p:nvSpPr>
+        <p:spPr>
+          <a:xfrm>
+            <a:off x="5969635" y="1170940"/>
+            <a:ext cx="2744470" cy="616585"/>
+          </a:xfrm>
+          <a:prstGeom prst="rect">
+            <a:avLst/>
+          </a:prstGeom>
+        </p:spPr>
+        <p:txBody>
+          <a:bodyPr vert="horz" wrap="square" lIns="0" tIns="13335" rIns="0" bIns="0" rtlCol="0" anchor="t">
+            <a:spAutoFit/>
+          </a:bodyPr>
+          <a:lstStyle/>
+          <a:p>
+            <a:pPr marL="153035">
+              <a:spcBef>
+                <a:spcPts val="105"/>
+              </a:spcBef>
+            </a:pPr>
+            <a:r>
+              <a:rPr lang="en-US" altLang="en-GB" sz="2450" b="1" spc="-25">
+                <a:solidFill>
+                  <a:srgbClr val="1E3989"/>
+                </a:solidFill>
+                <a:latin typeface="Raleway" pitchFamily="2" charset="77"/>
+                <a:cs typeface="Times New Roman" panose="02020603050405020304"/>
+              </a:rPr>
+              <a:t>1m 08s</a:t>
+            </a:r>
+            <a:endParaRPr lang="en-US" altLang="en-GB" sz="2450" b="1" spc="-25">
+              <a:solidFill>
+                <a:srgbClr val="1E3989"/>
+              </a:solidFill>
+              <a:latin typeface="Raleway" pitchFamily="2" charset="77"/>
+              <a:cs typeface="Times New Roman" panose="02020603050405020304"/>
+            </a:endParaRPr>
+          </a:p>
+          <a:p>
+            <a:pPr marL="153035">
+              <a:lnSpc>
+                <a:spcPct val="100000"/>
+              </a:lnSpc>
+              <a:spcBef>
+                <a:spcPts val="805"/>
+              </a:spcBef>
+            </a:pPr>
+            <a:r>
+              <a:rPr sz="800" b="1" spc="10">
+                <a:solidFill>
+                  <a:srgbClr val="63748A"/>
+                </a:solidFill>
+                <a:latin typeface="Raleway" pitchFamily="2" charset="77"/>
+                <a:cs typeface="Times New Roman" panose="02020603050405020304"/>
+              </a:rPr>
+              <a:t>Avg Engagement Time</a:t>
+            </a:r>
+            <a:endParaRPr sz="800" b="1" spc="10">
+              <a:solidFill>
+                <a:srgbClr val="63748A"/>
+              </a:solidFill>
+              <a:latin typeface="Raleway" pitchFamily="2" charset="77"/>
+              <a:cs typeface="Times New Roman" panose="02020603050405020304"/>
+            </a:endParaRPr>
+          </a:p>
+        </p:txBody>
+      </p:sp>
+      <p:sp>
+        <p:nvSpPr>
+          <p:cNvPr id="15" name="object 15"/>
+          <p:cNvSpPr txBox="1"/>
+          <p:nvPr/>
+        </p:nvSpPr>
+        <p:spPr>
+          <a:xfrm>
+            <a:off x="434340" y="2127897"/>
+            <a:ext cx="3816733" cy="1752600"/>
+          </a:xfrm>
+          <a:prstGeom prst="rect">
+            <a:avLst/>
+          </a:prstGeom>
+          <a:ln w="9152">
+            <a:solidFill>
+              <a:srgbClr val="E1E8EF"/>
+            </a:solidFill>
+          </a:ln>
+        </p:spPr>
+        <p:txBody>
+          <a:bodyPr vert="horz" wrap="square" lIns="0" tIns="60325" rIns="0" bIns="0" rtlCol="0" anchor="t">
+            <a:spAutoFit/>
+          </a:bodyPr>
+          <a:lstStyle/>
+          <a:p>
+            <a:r>
+              <a:rPr lang="en-US" altLang="en-US" sz="1000" spc="-10">
+                <a:solidFill>
+                  <a:srgbClr val="334154"/>
+                </a:solidFill>
+                <a:latin typeface="Raleway" pitchFamily="2" charset="77"/>
+                <a:cs typeface="Times New Roman" panose="02020603050405020304"/>
+              </a:rPr>
+              <a:t>The reporting period indicates solid and encouraging performance for the Dicomm website, with 633 active users documented. Of this total, 612 users (96.7%) were new visitors, emphasizing continued strong brand discovery and effective reach and awareness initiatives.</a:t>
+            </a:r>
+            <a:endParaRPr lang="en-US" altLang="en-US" sz="1000" spc="-10">
+              <a:solidFill>
+                <a:srgbClr val="334154"/>
+              </a:solidFill>
+              <a:latin typeface="Raleway" pitchFamily="2" charset="77"/>
+              <a:cs typeface="Times New Roman" panose="02020603050405020304"/>
+            </a:endParaRPr>
+          </a:p>
+          <a:p>
+            <a:endParaRPr lang="en-US" altLang="en-US" sz="1000" spc="-10">
+              <a:solidFill>
+                <a:srgbClr val="334154"/>
+              </a:solidFill>
+              <a:latin typeface="Raleway" pitchFamily="2" charset="77"/>
+              <a:cs typeface="Times New Roman" panose="02020603050405020304"/>
+            </a:endParaRPr>
+          </a:p>
+          <a:p>
+            <a:r>
+              <a:rPr lang="en-US" altLang="en-US" sz="1000" spc="-10">
+                <a:solidFill>
+                  <a:srgbClr val="334154"/>
+                </a:solidFill>
+                <a:latin typeface="Raleway" pitchFamily="2" charset="77"/>
+                <a:cs typeface="Times New Roman" panose="02020603050405020304"/>
+              </a:rPr>
+              <a:t>An average engagement time of 1m 08s signifies moderate yet meaningful user interaction. Although marginally below longer-form corporate engagement benchmarks, this duration indicates users are reviewing essential information instead of immediate departure.</a:t>
+            </a:r>
+            <a:endParaRPr lang="en-US" altLang="en-US" sz="1000" spc="-10">
+              <a:solidFill>
+                <a:srgbClr val="334154"/>
+              </a:solidFill>
+              <a:latin typeface="Raleway" pitchFamily="2" charset="77"/>
+              <a:cs typeface="Times New Roman" panose="02020603050405020304"/>
+            </a:endParaRPr>
+          </a:p>
+        </p:txBody>
+      </p:sp>
+      <p:grpSp>
+        <p:nvGrpSpPr>
+          <p:cNvPr id="16" name="object 16"/>
+          <p:cNvGrpSpPr/>
+          <p:nvPr/>
+        </p:nvGrpSpPr>
+        <p:grpSpPr>
+          <a:xfrm>
+            <a:off x="4251073" y="2127897"/>
+            <a:ext cx="4681855" cy="2892425"/>
+            <a:chOff x="4384547" y="2127897"/>
+            <a:chExt cx="4681855" cy="2892425"/>
+          </a:xfrm>
+        </p:grpSpPr>
+        <p:sp>
+          <p:nvSpPr>
+            <p:cNvPr id="17" name="object 17"/>
+            <p:cNvSpPr/>
+            <p:nvPr/>
+          </p:nvSpPr>
+          <p:spPr>
+            <a:xfrm>
+              <a:off x="4384547" y="2127897"/>
+              <a:ext cx="4681855" cy="2892425"/>
+            </a:xfrm>
+            <a:custGeom>
+              <a:avLst/>
+              <a:gdLst/>
+              <a:ahLst/>
+              <a:cxnLst/>
+              <a:rect l="l" t="t" r="r" b="b"/>
+              <a:pathLst>
+                <a:path w="4681855" h="2892425">
+                  <a:moveTo>
+                    <a:pt x="4681728" y="0"/>
+                  </a:moveTo>
+                  <a:lnTo>
+                    <a:pt x="0" y="0"/>
+                  </a:lnTo>
+                  <a:lnTo>
+                    <a:pt x="0" y="2892044"/>
+                  </a:lnTo>
+                  <a:lnTo>
+                    <a:pt x="4681728" y="2892044"/>
+                  </a:lnTo>
+                  <a:lnTo>
+                    <a:pt x="4681728" y="0"/>
+                  </a:lnTo>
+                  <a:close/>
+                </a:path>
+              </a:pathLst>
+            </a:custGeom>
+            <a:solidFill>
+              <a:srgbClr val="F8F9FB"/>
+            </a:solidFill>
+          </p:spPr>
+          <p:txBody>
+            <a:bodyPr wrap="square" lIns="0" tIns="0" rIns="0" bIns="0" rtlCol="0"/>
+            <a:lstStyle/>
+            <a:p>
+              <a:endParaRPr>
+                <a:latin typeface="Raleway" pitchFamily="2" charset="77"/>
+                <a:cs typeface="Times New Roman" panose="02020603050405020304"/>
+              </a:endParaRPr>
+            </a:p>
+          </p:txBody>
+        </p:sp>
+        <p:sp>
+          <p:nvSpPr>
+            <p:cNvPr id="18" name="object 18"/>
+            <p:cNvSpPr/>
+            <p:nvPr/>
+          </p:nvSpPr>
+          <p:spPr>
+            <a:xfrm>
+              <a:off x="4384547" y="2127897"/>
+              <a:ext cx="4681855" cy="2892425"/>
+            </a:xfrm>
+            <a:custGeom>
+              <a:avLst/>
+              <a:gdLst/>
+              <a:ahLst/>
+              <a:cxnLst/>
+              <a:rect l="l" t="t" r="r" b="b"/>
+              <a:pathLst>
+                <a:path w="4681855" h="2892425">
+                  <a:moveTo>
+                    <a:pt x="0" y="2892044"/>
+                  </a:moveTo>
+                  <a:lnTo>
+                    <a:pt x="4681728" y="2892044"/>
+                  </a:lnTo>
+                  <a:lnTo>
+                    <a:pt x="4681728" y="0"/>
+                  </a:lnTo>
+                  <a:lnTo>
+                    <a:pt x="0" y="0"/>
+                  </a:lnTo>
+                  <a:lnTo>
+                    <a:pt x="0" y="2892044"/>
+                  </a:lnTo>
+                  <a:close/>
+                </a:path>
+              </a:pathLst>
+            </a:custGeom>
+            <a:ln w="9152">
+              <a:solidFill>
+                <a:srgbClr val="E1E8EF"/>
+              </a:solidFill>
+            </a:ln>
+          </p:spPr>
+          <p:txBody>
+            <a:bodyPr wrap="square" lIns="0" tIns="0" rIns="0" bIns="0" rtlCol="0"/>
+            <a:lstStyle/>
+            <a:p>
+              <a:endParaRPr>
+                <a:latin typeface="Raleway" pitchFamily="2" charset="77"/>
+                <a:cs typeface="Times New Roman" panose="02020603050405020304"/>
+              </a:endParaRPr>
+            </a:p>
+          </p:txBody>
+        </p:sp>
+      </p:grpSp>
+      <p:pic>
+        <p:nvPicPr>
+          <p:cNvPr id="20" name="Picture 19" descr="Screenshot 2026-06-29 at 19.02.55"/>
+          <p:cNvPicPr>
+            <a:picLocks noChangeAspect="1"/>
+          </p:cNvPicPr>
+          <p:nvPr/>
+        </p:nvPicPr>
+        <p:blipFill>
+          <a:blip r:embed="rId1"/>
+          <a:stretch>
+            <a:fillRect/>
+          </a:stretch>
+        </p:blipFill>
+        <p:spPr>
+          <a:xfrm>
+            <a:off x="4495800" y="2433320"/>
+            <a:ext cx="4244975" cy="2413000"/>
+          </a:xfrm>
+          <a:prstGeom prst="rect">
+            <a:avLst/>
+          </a:prstGeom>
+        </p:spPr>
+      </p:pic>
+    </p:spTree>
+  </p:cSld>
+  <p:clrMapOvr>
+    <a:masterClrMapping/>
+  </p:clrMapOvr>
+</p:sld>
+</file>
+
+<file path=ppt/slides/slide5.xml><?xml version="1.0" encoding="utf-8"?>
+<p:sld xmlns:a="http://schemas.openxmlformats.org/drawingml/2006/main" xmlns:r="http://schemas.openxmlformats.org/officeDocument/2006/relationships" xmlns:p="http://schemas.openxmlformats.org/presentationml/2006/main" showMasterSp="0">
+  <p:cSld>
+    <p:spTree>
+      <p:nvGrpSpPr>
+        <p:cNvPr id="1" name=""/>
+        <p:cNvGrpSpPr/>
+        <p:nvPr/>
+      </p:nvGrpSpPr>
+      <p:grpSpPr>
+        <a:xfrm>
+          <a:off x="0" y="0"/>
+          <a:ext cx="0" cy="0"/>
+          <a:chOff x="0" y="0"/>
+          <a:chExt cx="0" cy="0"/>
+        </a:xfrm>
+      </p:grpSpPr>
+      <p:sp>
+        <p:nvSpPr>
+          <p:cNvPr id="2" name="object 2"/>
+          <p:cNvSpPr txBox="1">
+            <a:spLocks noGrp="1"/>
+          </p:cNvSpPr>
+          <p:nvPr>
+            <p:ph type="title"/>
+          </p:nvPr>
+        </p:nvSpPr>
+        <p:spPr>
+          <a:prstGeom prst="rect">
+            <a:avLst/>
+          </a:prstGeom>
+        </p:spPr>
+        <p:txBody>
+          <a:bodyPr vert="horz" wrap="square" lIns="0" tIns="70485" rIns="0" bIns="0" rtlCol="0" anchor="t">
+            <a:spAutoFit/>
+          </a:bodyPr>
+          <a:lstStyle/>
+          <a:p>
+            <a:pPr marL="26670">
+              <a:lnSpc>
+                <a:spcPct val="100000"/>
+              </a:lnSpc>
+              <a:spcBef>
+                <a:spcPts val="555"/>
+              </a:spcBef>
+            </a:pPr>
+            <a:r>
+              <a:rPr spc="65">
+                <a:latin typeface="Raleway" pitchFamily="2" charset="77"/>
+                <a:cs typeface="Times New Roman" panose="02020603050405020304"/>
+              </a:rPr>
+              <a:t>Geographic</a:t>
+            </a:r>
+            <a:r>
+              <a:rPr spc="-50">
+                <a:latin typeface="Raleway" pitchFamily="2" charset="77"/>
+                <a:cs typeface="Times New Roman" panose="02020603050405020304"/>
+              </a:rPr>
+              <a:t> </a:t>
+            </a:r>
+            <a:r>
+              <a:rPr spc="-10">
+                <a:latin typeface="Raleway" pitchFamily="2" charset="77"/>
+                <a:cs typeface="Times New Roman" panose="02020603050405020304"/>
+              </a:rPr>
+              <a:t>Performance</a:t>
+            </a:r>
+            <a:endParaRPr lang="en-US" spc="-10">
+              <a:latin typeface="Raleway" pitchFamily="2" charset="77"/>
+              <a:cs typeface="Times New Roman" panose="02020603050405020304"/>
+            </a:endParaRPr>
+          </a:p>
+          <a:p>
+            <a:pPr marL="26670">
+              <a:lnSpc>
+                <a:spcPct val="100000"/>
+              </a:lnSpc>
+              <a:spcBef>
+                <a:spcPts val="285"/>
+              </a:spcBef>
+            </a:pPr>
+            <a:r>
+              <a:rPr sz="1300" b="0">
+                <a:solidFill>
+                  <a:srgbClr val="334154"/>
+                </a:solidFill>
+                <a:latin typeface="Raleway" pitchFamily="2" charset="77"/>
+                <a:cs typeface="Times New Roman" panose="02020603050405020304"/>
+              </a:rPr>
+              <a:t>Zimbabwe's Market Dominance and International Growth Opportunity.</a:t>
+            </a:r>
+            <a:endParaRPr sz="1300" b="0">
+              <a:solidFill>
+                <a:srgbClr val="334154"/>
+              </a:solidFill>
+              <a:latin typeface="Raleway" pitchFamily="2" charset="77"/>
+              <a:cs typeface="Times New Roman" panose="02020603050405020304"/>
+            </a:endParaRPr>
+          </a:p>
+        </p:txBody>
+      </p:sp>
+      <p:grpSp>
+        <p:nvGrpSpPr>
+          <p:cNvPr id="3" name="object 3"/>
+          <p:cNvGrpSpPr/>
+          <p:nvPr/>
+        </p:nvGrpSpPr>
+        <p:grpSpPr>
+          <a:xfrm>
+            <a:off x="183515" y="984885"/>
+            <a:ext cx="3987165" cy="4080510"/>
+            <a:chOff x="228600" y="988466"/>
+            <a:chExt cx="3987165" cy="3752850"/>
+          </a:xfrm>
+        </p:grpSpPr>
+        <p:sp>
+          <p:nvSpPr>
+            <p:cNvPr id="4" name="object 4"/>
+            <p:cNvSpPr/>
+            <p:nvPr/>
+          </p:nvSpPr>
+          <p:spPr>
+            <a:xfrm>
+              <a:off x="228600" y="988466"/>
+              <a:ext cx="3987165" cy="3752850"/>
+            </a:xfrm>
+            <a:custGeom>
+              <a:avLst/>
+              <a:gdLst/>
+              <a:ahLst/>
+              <a:cxnLst/>
+              <a:rect l="l" t="t" r="r" b="b"/>
+              <a:pathLst>
+                <a:path w="3987165" h="3752850">
+                  <a:moveTo>
+                    <a:pt x="3986784" y="0"/>
+                  </a:moveTo>
+                  <a:lnTo>
+                    <a:pt x="0" y="0"/>
+                  </a:lnTo>
+                  <a:lnTo>
+                    <a:pt x="0" y="3752341"/>
+                  </a:lnTo>
+                  <a:lnTo>
+                    <a:pt x="3986784" y="3752341"/>
+                  </a:lnTo>
+                  <a:lnTo>
+                    <a:pt x="3986784" y="0"/>
+                  </a:lnTo>
+                  <a:close/>
+                </a:path>
+              </a:pathLst>
+            </a:custGeom>
+            <a:solidFill>
+              <a:srgbClr val="F8F9FB"/>
+            </a:solidFill>
+          </p:spPr>
+          <p:txBody>
+            <a:bodyPr wrap="square" lIns="0" tIns="0" rIns="0" bIns="0" rtlCol="0"/>
+            <a:lstStyle/>
+            <a:p>
+              <a:endParaRPr>
+                <a:latin typeface="Raleway" pitchFamily="2" charset="77"/>
+              </a:endParaRPr>
+            </a:p>
+          </p:txBody>
+        </p:sp>
+        <p:sp>
+          <p:nvSpPr>
+            <p:cNvPr id="5" name="object 5"/>
+            <p:cNvSpPr/>
+            <p:nvPr/>
+          </p:nvSpPr>
+          <p:spPr>
+            <a:xfrm>
+              <a:off x="228600" y="988466"/>
+              <a:ext cx="45720" cy="3752850"/>
+            </a:xfrm>
+            <a:custGeom>
+              <a:avLst/>
+              <a:gdLst/>
+              <a:ahLst/>
+              <a:cxnLst/>
+              <a:rect l="l" t="t" r="r" b="b"/>
+              <a:pathLst>
+                <a:path w="45720" h="3752850">
+                  <a:moveTo>
+                    <a:pt x="45720" y="0"/>
+                  </a:moveTo>
+                  <a:lnTo>
+                    <a:pt x="0" y="0"/>
+                  </a:lnTo>
+                  <a:lnTo>
+                    <a:pt x="0" y="3752341"/>
+                  </a:lnTo>
+                  <a:lnTo>
+                    <a:pt x="45720" y="3752341"/>
+                  </a:lnTo>
+                  <a:lnTo>
+                    <a:pt x="45720" y="0"/>
+                  </a:lnTo>
+                  <a:close/>
+                </a:path>
+              </a:pathLst>
+            </a:custGeom>
+            <a:solidFill>
+              <a:srgbClr val="1E3989"/>
+            </a:solidFill>
+          </p:spPr>
+          <p:txBody>
+            <a:bodyPr wrap="square" lIns="0" tIns="0" rIns="0" bIns="0" rtlCol="0"/>
+            <a:lstStyle/>
+            <a:p>
+              <a:endParaRPr>
+                <a:latin typeface="Raleway" pitchFamily="2" charset="77"/>
+              </a:endParaRPr>
+            </a:p>
+          </p:txBody>
+        </p:sp>
+      </p:grpSp>
+      <p:sp>
+        <p:nvSpPr>
+          <p:cNvPr id="6" name="object 6"/>
+          <p:cNvSpPr txBox="1"/>
+          <p:nvPr/>
+        </p:nvSpPr>
+        <p:spPr>
+          <a:xfrm>
+            <a:off x="295910" y="1508125"/>
+            <a:ext cx="3888105" cy="2678430"/>
+          </a:xfrm>
+          <a:prstGeom prst="rect">
+            <a:avLst/>
+          </a:prstGeom>
+        </p:spPr>
+        <p:txBody>
+          <a:bodyPr vert="horz" wrap="square" lIns="0" tIns="11430" rIns="0" bIns="0" rtlCol="0" anchor="t">
+            <a:noAutofit/>
+          </a:bodyPr>
+          <a:lstStyle/>
+          <a:p>
+            <a:r>
+              <a:rPr lang="en-US" altLang="en-US" sz="1000" spc="-10">
+                <a:solidFill>
+                  <a:srgbClr val="334154"/>
+                </a:solidFill>
+                <a:latin typeface="Raleway" pitchFamily="2" charset="77"/>
+                <a:cs typeface="Times New Roman" panose="02020603050405020304"/>
+              </a:rPr>
+              <a:t>Zimbabwe leads geographic performance as the dominant market, contributing 366 users (57.82% of total traffic), with a 60.88% engagement rate and 0.91 engaged sessions per active user, demonstrating substantial volume and consistent interaction.</a:t>
+            </a:r>
+            <a:endParaRPr lang="en-US" altLang="en-US" sz="1000" spc="-10">
+              <a:solidFill>
+                <a:srgbClr val="334154"/>
+              </a:solidFill>
+              <a:latin typeface="Raleway" pitchFamily="2" charset="77"/>
+              <a:cs typeface="Times New Roman" panose="02020603050405020304"/>
+            </a:endParaRPr>
+          </a:p>
+          <a:p>
+            <a:endParaRPr lang="en-US" altLang="en-US" sz="1000" spc="-10">
+              <a:solidFill>
+                <a:srgbClr val="334154"/>
+              </a:solidFill>
+              <a:latin typeface="Raleway" pitchFamily="2" charset="77"/>
+              <a:cs typeface="Times New Roman" panose="02020603050405020304"/>
+            </a:endParaRPr>
+          </a:p>
+          <a:p>
+            <a:r>
+              <a:rPr lang="en-US" altLang="en-US" sz="1000" spc="-10">
+                <a:solidFill>
+                  <a:srgbClr val="334154"/>
+                </a:solidFill>
+                <a:latin typeface="Raleway" pitchFamily="2" charset="77"/>
+                <a:cs typeface="Times New Roman" panose="02020603050405020304"/>
+              </a:rPr>
+              <a:t>The United States (78 users) achieved a 16.67% engagement rate, while Singapore (46 users) recorded 2.17%, indicating limited engagement from both markets.</a:t>
+            </a:r>
+            <a:endParaRPr lang="en-US" altLang="en-US" sz="1000" spc="-10">
+              <a:solidFill>
+                <a:srgbClr val="334154"/>
+              </a:solidFill>
+              <a:latin typeface="Raleway" pitchFamily="2" charset="77"/>
+              <a:cs typeface="Times New Roman" panose="02020603050405020304"/>
+            </a:endParaRPr>
+          </a:p>
+          <a:p>
+            <a:endParaRPr lang="en-US" altLang="en-US" sz="1000" spc="-10">
+              <a:solidFill>
+                <a:srgbClr val="334154"/>
+              </a:solidFill>
+              <a:latin typeface="Raleway" pitchFamily="2" charset="77"/>
+              <a:cs typeface="Times New Roman" panose="02020603050405020304"/>
+            </a:endParaRPr>
+          </a:p>
+          <a:p>
+            <a:r>
+              <a:rPr lang="en-US" altLang="en-US" sz="1000" spc="-10">
+                <a:solidFill>
+                  <a:srgbClr val="334154"/>
+                </a:solidFill>
+                <a:latin typeface="Raleway" pitchFamily="2" charset="77"/>
+                <a:cs typeface="Times New Roman" panose="02020603050405020304"/>
+              </a:rPr>
+              <a:t>Smaller markets, including India (66.67%), the United Kingdom (58.33%), and South Africa (58%), demonstrate strong engagement efficiency, although India’s result is based on limited traffic.</a:t>
+            </a:r>
+            <a:endParaRPr lang="en-US" altLang="en-US" sz="1000" spc="-10">
+              <a:solidFill>
+                <a:srgbClr val="334154"/>
+              </a:solidFill>
+              <a:latin typeface="Raleway" pitchFamily="2" charset="77"/>
+              <a:cs typeface="Times New Roman" panose="02020603050405020304"/>
+            </a:endParaRPr>
+          </a:p>
+        </p:txBody>
+      </p:sp>
+      <p:grpSp>
+        <p:nvGrpSpPr>
+          <p:cNvPr id="7" name="object 7"/>
+          <p:cNvGrpSpPr/>
+          <p:nvPr/>
+        </p:nvGrpSpPr>
+        <p:grpSpPr>
+          <a:xfrm>
+            <a:off x="4206550" y="1061384"/>
+            <a:ext cx="4552546" cy="3760704"/>
+            <a:chOff x="4402835" y="985184"/>
+            <a:chExt cx="4552546" cy="3760704"/>
+          </a:xfrm>
+        </p:grpSpPr>
+        <p:sp>
+          <p:nvSpPr>
+            <p:cNvPr id="8" name="object 8"/>
+            <p:cNvSpPr/>
+            <p:nvPr/>
+          </p:nvSpPr>
+          <p:spPr>
+            <a:xfrm>
+              <a:off x="4410686" y="985184"/>
+              <a:ext cx="4544695" cy="3752850"/>
+            </a:xfrm>
+            <a:custGeom>
+              <a:avLst/>
+              <a:gdLst/>
+              <a:ahLst/>
+              <a:cxnLst/>
+              <a:rect l="l" t="t" r="r" b="b"/>
+              <a:pathLst>
+                <a:path w="4544695" h="3752850">
+                  <a:moveTo>
+                    <a:pt x="4544568" y="0"/>
+                  </a:moveTo>
+                  <a:lnTo>
+                    <a:pt x="0" y="0"/>
+                  </a:lnTo>
+                  <a:lnTo>
+                    <a:pt x="0" y="3752342"/>
+                  </a:lnTo>
+                  <a:lnTo>
+                    <a:pt x="4544568" y="3752342"/>
+                  </a:lnTo>
+                  <a:lnTo>
+                    <a:pt x="4544568" y="0"/>
+                  </a:lnTo>
+                  <a:close/>
+                </a:path>
+              </a:pathLst>
+            </a:custGeom>
+            <a:solidFill>
+              <a:srgbClr val="F0F5F8"/>
+            </a:solidFill>
+          </p:spPr>
+          <p:txBody>
+            <a:bodyPr wrap="square" lIns="0" tIns="0" rIns="0" bIns="0" rtlCol="0"/>
+            <a:lstStyle/>
+            <a:p>
+              <a:endParaRPr>
+                <a:latin typeface="Raleway" pitchFamily="2" charset="77"/>
+              </a:endParaRPr>
+            </a:p>
+          </p:txBody>
+        </p:sp>
+        <p:sp>
+          <p:nvSpPr>
+            <p:cNvPr id="9" name="object 9"/>
+            <p:cNvSpPr/>
+            <p:nvPr/>
+          </p:nvSpPr>
+          <p:spPr>
+            <a:xfrm>
+              <a:off x="4402835" y="993038"/>
+              <a:ext cx="4544695" cy="3752850"/>
+            </a:xfrm>
+            <a:custGeom>
+              <a:avLst/>
+              <a:gdLst/>
+              <a:ahLst/>
+              <a:cxnLst/>
+              <a:rect l="l" t="t" r="r" b="b"/>
+              <a:pathLst>
+                <a:path w="4544695" h="3752850">
+                  <a:moveTo>
+                    <a:pt x="0" y="3752342"/>
+                  </a:moveTo>
+                  <a:lnTo>
+                    <a:pt x="4544568" y="3752342"/>
+                  </a:lnTo>
+                  <a:lnTo>
+                    <a:pt x="4544568" y="0"/>
+                  </a:lnTo>
+                  <a:lnTo>
+                    <a:pt x="0" y="0"/>
+                  </a:lnTo>
+                  <a:lnTo>
+                    <a:pt x="0" y="3752342"/>
+                  </a:lnTo>
+                  <a:close/>
+                </a:path>
+              </a:pathLst>
+            </a:custGeom>
+            <a:ln w="9152">
+              <a:solidFill>
+                <a:srgbClr val="E1E8EF"/>
+              </a:solidFill>
+            </a:ln>
+          </p:spPr>
+          <p:txBody>
+            <a:bodyPr wrap="square" lIns="0" tIns="0" rIns="0" bIns="0" rtlCol="0"/>
+            <a:lstStyle/>
+            <a:p>
+              <a:endParaRPr>
+                <a:latin typeface="Raleway" pitchFamily="2" charset="77"/>
+              </a:endParaRPr>
+            </a:p>
+          </p:txBody>
+        </p:sp>
+      </p:grpSp>
+      <p:pic>
+        <p:nvPicPr>
+          <p:cNvPr id="11" name="Picture 10" descr="Screenshot 2026-06-29 at 19.03.48"/>
+          <p:cNvPicPr>
+            <a:picLocks noChangeAspect="1"/>
+          </p:cNvPicPr>
+          <p:nvPr/>
+        </p:nvPicPr>
+        <p:blipFill>
+          <a:blip r:embed="rId1"/>
+          <a:stretch>
+            <a:fillRect/>
+          </a:stretch>
+        </p:blipFill>
+        <p:spPr>
+          <a:xfrm>
+            <a:off x="4335780" y="1508125"/>
+            <a:ext cx="4359910" cy="2760980"/>
+          </a:xfrm>
+          <a:prstGeom prst="rect">
+            <a:avLst/>
+          </a:prstGeom>
+        </p:spPr>
+      </p:pic>
+    </p:spTree>
+  </p:cSld>
+  <p:clrMapOvr>
+    <a:masterClrMapping/>
+  </p:clrMapOvr>
+</p:sld>
+</file>
+
+<file path=ppt/slides/slide6.xml><?xml version="1.0" encoding="utf-8"?>
+<p:sld xmlns:a="http://schemas.openxmlformats.org/drawingml/2006/main" xmlns:r="http://schemas.openxmlformats.org/officeDocument/2006/relationships" xmlns:p="http://schemas.openxmlformats.org/presentationml/2006/main" showMasterSp="0">
+  <p:cSld>
+    <p:spTree>
+      <p:nvGrpSpPr>
+        <p:cNvPr id="1" name=""/>
+        <p:cNvGrpSpPr/>
+        <p:nvPr/>
+      </p:nvGrpSpPr>
+      <p:grpSpPr>
+        <a:xfrm>
+          <a:off x="0" y="0"/>
+          <a:ext cx="0" cy="0"/>
+          <a:chOff x="0" y="0"/>
+          <a:chExt cx="0" cy="0"/>
+        </a:xfrm>
+      </p:grpSpPr>
+      <p:sp>
+        <p:nvSpPr>
+          <p:cNvPr id="2" name="object 2"/>
+          <p:cNvSpPr txBox="1">
+            <a:spLocks noGrp="1"/>
+          </p:cNvSpPr>
+          <p:nvPr>
+            <p:ph type="title"/>
+          </p:nvPr>
+        </p:nvSpPr>
+        <p:spPr>
+          <a:xfrm>
+            <a:off x="401612" y="165009"/>
+            <a:ext cx="4932464" cy="589867"/>
+          </a:xfrm>
+          <a:prstGeom prst="rect">
+            <a:avLst/>
+          </a:prstGeom>
+        </p:spPr>
+        <p:txBody>
+          <a:bodyPr vert="horz" wrap="square" lIns="0" tIns="264122" rIns="0" bIns="0" rtlCol="0" anchor="t">
+            <a:spAutoFit/>
+          </a:bodyPr>
+          <a:lstStyle/>
+          <a:p>
+            <a:pPr marL="27305">
+              <a:lnSpc>
+                <a:spcPct val="100000"/>
+              </a:lnSpc>
+              <a:spcBef>
+                <a:spcPts val="90"/>
+              </a:spcBef>
+            </a:pPr>
+            <a:r>
+              <a:rPr spc="120">
+                <a:latin typeface="Raleway" pitchFamily="2" charset="77"/>
+                <a:cs typeface="Times New Roman" panose="02020603050405020304"/>
+              </a:rPr>
+              <a:t>Page</a:t>
+            </a:r>
+            <a:r>
+              <a:rPr spc="-85">
+                <a:latin typeface="Raleway" pitchFamily="2" charset="77"/>
+                <a:cs typeface="Times New Roman" panose="02020603050405020304"/>
+              </a:rPr>
+              <a:t> </a:t>
+            </a:r>
+            <a:r>
+              <a:rPr spc="35">
+                <a:latin typeface="Raleway" pitchFamily="2" charset="77"/>
+                <a:cs typeface="Times New Roman" panose="02020603050405020304"/>
+              </a:rPr>
+              <a:t>Performance</a:t>
+            </a:r>
+            <a:endParaRPr lang="en-US" spc="35">
+              <a:latin typeface="Raleway" pitchFamily="2" charset="77"/>
+              <a:cs typeface="Times New Roman" panose="02020603050405020304"/>
+            </a:endParaRPr>
+          </a:p>
+        </p:txBody>
+      </p:sp>
+      <p:sp>
+        <p:nvSpPr>
+          <p:cNvPr id="3" name="object 3"/>
+          <p:cNvSpPr txBox="1"/>
+          <p:nvPr/>
+        </p:nvSpPr>
+        <p:spPr>
+          <a:xfrm>
+            <a:off x="428381" y="900929"/>
+            <a:ext cx="4219641" cy="377825"/>
+          </a:xfrm>
+          <a:prstGeom prst="rect">
+            <a:avLst/>
+          </a:prstGeom>
+        </p:spPr>
+        <p:txBody>
+          <a:bodyPr vert="horz" wrap="square" lIns="0" tIns="12065" rIns="0" bIns="0" rtlCol="0" anchor="t">
+            <a:spAutoFit/>
+          </a:bodyPr>
+          <a:lstStyle/>
+          <a:p>
+            <a:pPr algn="l"/>
+            <a:r>
+              <a:rPr lang="en-GB" sz="1000" spc="-10">
+                <a:solidFill>
+                  <a:srgbClr val="334154"/>
+                </a:solidFill>
+                <a:latin typeface="Raleway" pitchFamily="2" charset="77"/>
+                <a:cs typeface="Times New Roman" panose="02020603050405020304"/>
+              </a:rPr>
+              <a:t>The Homepage and Our Graft pages drive the most meaningful engagement.</a:t>
+            </a:r>
+            <a:endParaRPr lang="en-GB" sz="1000" spc="-10">
+              <a:solidFill>
+                <a:srgbClr val="334154"/>
+              </a:solidFill>
+              <a:latin typeface="Raleway" pitchFamily="2" charset="77"/>
+              <a:cs typeface="Times New Roman" panose="02020603050405020304"/>
+            </a:endParaRPr>
+          </a:p>
+          <a:p>
+            <a:pPr marL="12700">
+              <a:lnSpc>
+                <a:spcPct val="100000"/>
+              </a:lnSpc>
+              <a:spcBef>
+                <a:spcPts val="95"/>
+              </a:spcBef>
+            </a:pPr>
+            <a:endParaRPr sz="1300" spc="-10">
+              <a:solidFill>
+                <a:srgbClr val="334154"/>
+              </a:solidFill>
+              <a:latin typeface="Raleway" pitchFamily="2" charset="77"/>
+              <a:cs typeface="Times New Roman" panose="02020603050405020304"/>
+            </a:endParaRPr>
+          </a:p>
+        </p:txBody>
+      </p:sp>
+      <p:grpSp>
+        <p:nvGrpSpPr>
+          <p:cNvPr id="4" name="object 4"/>
+          <p:cNvGrpSpPr/>
+          <p:nvPr/>
+        </p:nvGrpSpPr>
+        <p:grpSpPr>
+          <a:xfrm>
+            <a:off x="303792" y="1342200"/>
+            <a:ext cx="3311476" cy="3659820"/>
+            <a:chOff x="429768" y="1090226"/>
+            <a:chExt cx="3438525" cy="3907338"/>
+          </a:xfrm>
+        </p:grpSpPr>
+        <p:sp>
+          <p:nvSpPr>
+            <p:cNvPr id="5" name="object 5"/>
+            <p:cNvSpPr/>
+            <p:nvPr/>
+          </p:nvSpPr>
+          <p:spPr>
+            <a:xfrm>
+              <a:off x="429768" y="1354569"/>
+              <a:ext cx="3438525" cy="3642995"/>
+            </a:xfrm>
+            <a:custGeom>
+              <a:avLst/>
+              <a:gdLst/>
+              <a:ahLst/>
+              <a:cxnLst/>
+              <a:rect l="l" t="t" r="r" b="b"/>
+              <a:pathLst>
+                <a:path w="3438525" h="3642995">
+                  <a:moveTo>
+                    <a:pt x="3438144" y="0"/>
+                  </a:moveTo>
+                  <a:lnTo>
+                    <a:pt x="0" y="0"/>
+                  </a:lnTo>
+                  <a:lnTo>
+                    <a:pt x="0" y="3642487"/>
+                  </a:lnTo>
+                  <a:lnTo>
+                    <a:pt x="3438144" y="3642487"/>
+                  </a:lnTo>
+                  <a:lnTo>
+                    <a:pt x="3438144" y="0"/>
+                  </a:lnTo>
+                  <a:close/>
+                </a:path>
+              </a:pathLst>
+            </a:custGeom>
+            <a:solidFill>
+              <a:srgbClr val="F8F9FB"/>
+            </a:solidFill>
+          </p:spPr>
+          <p:txBody>
+            <a:bodyPr wrap="square" lIns="0" tIns="0" rIns="0" bIns="0" rtlCol="0"/>
+            <a:lstStyle/>
+            <a:p>
+              <a:endParaRPr>
+                <a:latin typeface="Raleway" pitchFamily="2" charset="77"/>
+              </a:endParaRPr>
+            </a:p>
+          </p:txBody>
+        </p:sp>
+        <p:sp>
+          <p:nvSpPr>
+            <p:cNvPr id="6" name="object 6"/>
+            <p:cNvSpPr/>
+            <p:nvPr/>
+          </p:nvSpPr>
+          <p:spPr>
+            <a:xfrm>
+              <a:off x="576072" y="1090226"/>
+              <a:ext cx="3145790" cy="27940"/>
+            </a:xfrm>
+            <a:custGeom>
+              <a:avLst/>
+              <a:gdLst/>
+              <a:ahLst/>
+              <a:cxnLst/>
+              <a:rect l="l" t="t" r="r" b="b"/>
+              <a:pathLst>
+                <a:path w="3145790" h="27940">
+                  <a:moveTo>
+                    <a:pt x="3145536" y="0"/>
+                  </a:moveTo>
+                  <a:lnTo>
+                    <a:pt x="0" y="0"/>
+                  </a:lnTo>
+                  <a:lnTo>
+                    <a:pt x="0" y="27456"/>
+                  </a:lnTo>
+                  <a:lnTo>
+                    <a:pt x="3145536" y="27456"/>
+                  </a:lnTo>
+                  <a:lnTo>
+                    <a:pt x="3145536" y="0"/>
+                  </a:lnTo>
+                  <a:close/>
+                </a:path>
+              </a:pathLst>
+            </a:custGeom>
+            <a:solidFill>
+              <a:srgbClr val="1E3989"/>
+            </a:solidFill>
+          </p:spPr>
+          <p:txBody>
+            <a:bodyPr wrap="square" lIns="0" tIns="0" rIns="0" bIns="0" rtlCol="0"/>
+            <a:lstStyle/>
+            <a:p>
+              <a:endParaRPr>
+                <a:latin typeface="Raleway" pitchFamily="2" charset="77"/>
+              </a:endParaRPr>
+            </a:p>
+          </p:txBody>
+        </p:sp>
+      </p:grpSp>
+      <p:sp>
+        <p:nvSpPr>
+          <p:cNvPr id="7" name="object 7"/>
+          <p:cNvSpPr txBox="1"/>
+          <p:nvPr/>
+        </p:nvSpPr>
+        <p:spPr>
+          <a:xfrm>
+            <a:off x="429895" y="1501140"/>
+            <a:ext cx="3610610" cy="2382520"/>
+          </a:xfrm>
+          <a:prstGeom prst="rect">
+            <a:avLst/>
+          </a:prstGeom>
+        </p:spPr>
+        <p:txBody>
+          <a:bodyPr vert="horz" wrap="square" lIns="0" tIns="29209" rIns="0" bIns="0" rtlCol="0" anchor="t">
+            <a:spAutoFit/>
+          </a:bodyPr>
+          <a:lstStyle/>
+          <a:p>
+            <a:r>
+              <a:rPr lang="en-US" altLang="en-US" sz="900" spc="-10">
+                <a:solidFill>
+                  <a:schemeClr val="tx1"/>
+                </a:solidFill>
+                <a:latin typeface="Raleway" pitchFamily="2" charset="77"/>
+                <a:cs typeface="Times New Roman" panose="02020603050405020304"/>
+              </a:rPr>
+              <a:t>Overall Insight:</a:t>
+            </a:r>
+            <a:endParaRPr lang="en-US" altLang="en-US" sz="900" spc="-10">
+              <a:solidFill>
+                <a:schemeClr val="tx1"/>
+              </a:solidFill>
+              <a:latin typeface="Raleway" pitchFamily="2" charset="77"/>
+              <a:cs typeface="Times New Roman" panose="02020603050405020304"/>
+            </a:endParaRPr>
+          </a:p>
+          <a:p>
+            <a:endParaRPr lang="en-US" altLang="en-US" sz="900" spc="-10">
+              <a:solidFill>
+                <a:schemeClr val="tx1"/>
+              </a:solidFill>
+              <a:latin typeface="Raleway" pitchFamily="2" charset="77"/>
+              <a:cs typeface="Times New Roman" panose="02020603050405020304"/>
+            </a:endParaRPr>
+          </a:p>
+          <a:p>
+            <a:r>
+              <a:rPr lang="en-US" altLang="en-US" sz="900" spc="-10">
+                <a:solidFill>
+                  <a:schemeClr val="tx1"/>
+                </a:solidFill>
+                <a:latin typeface="Raleway" pitchFamily="2" charset="77"/>
+                <a:cs typeface="Times New Roman" panose="02020603050405020304"/>
+              </a:rPr>
+              <a:t>The Homepage drives the highest traffic, accounting for 37.73% of total views (595 views), with 1.36 views per active user and an average engagement time of 26 seconds.</a:t>
+            </a:r>
+            <a:endParaRPr lang="en-US" altLang="en-US" sz="900" spc="-10">
+              <a:solidFill>
+                <a:schemeClr val="tx1"/>
+              </a:solidFill>
+              <a:latin typeface="Raleway" pitchFamily="2" charset="77"/>
+              <a:cs typeface="Times New Roman" panose="02020603050405020304"/>
+            </a:endParaRPr>
+          </a:p>
+          <a:p>
+            <a:endParaRPr lang="en-US" altLang="en-US" sz="900" spc="-10">
+              <a:solidFill>
+                <a:schemeClr val="tx1"/>
+              </a:solidFill>
+              <a:latin typeface="Raleway" pitchFamily="2" charset="77"/>
+              <a:cs typeface="Times New Roman" panose="02020603050405020304"/>
+            </a:endParaRPr>
+          </a:p>
+          <a:p>
+            <a:r>
+              <a:rPr lang="en-US" altLang="en-US" sz="900" spc="-10">
+                <a:solidFill>
+                  <a:schemeClr val="tx1"/>
+                </a:solidFill>
+                <a:latin typeface="Raleway" pitchFamily="2" charset="77"/>
+                <a:cs typeface="Times New Roman" panose="02020603050405020304"/>
+              </a:rPr>
+              <a:t>Secondary pages such as About (120 views) and Our Graft (116 views) contribute meaningful traffic and record solid engagement.</a:t>
+            </a:r>
+            <a:endParaRPr lang="en-US" altLang="en-US" sz="900" spc="-10">
+              <a:solidFill>
+                <a:schemeClr val="tx1"/>
+              </a:solidFill>
+              <a:latin typeface="Raleway" pitchFamily="2" charset="77"/>
+              <a:cs typeface="Times New Roman" panose="02020603050405020304"/>
+            </a:endParaRPr>
+          </a:p>
+          <a:p>
+            <a:endParaRPr lang="en-US" altLang="en-US" sz="900" spc="-10">
+              <a:solidFill>
+                <a:schemeClr val="tx1"/>
+              </a:solidFill>
+              <a:latin typeface="Raleway" pitchFamily="2" charset="77"/>
+              <a:cs typeface="Times New Roman" panose="02020603050405020304"/>
+            </a:endParaRPr>
+          </a:p>
+          <a:p>
+            <a:r>
+              <a:rPr lang="en-US" altLang="en-US" sz="900" spc="-10">
+                <a:solidFill>
+                  <a:schemeClr val="tx1"/>
+                </a:solidFill>
+                <a:latin typeface="Raleway" pitchFamily="2" charset="77"/>
+                <a:cs typeface="Times New Roman" panose="02020603050405020304"/>
+              </a:rPr>
+              <a:t>Pages with the deepest browsing engagement include Blog (3.44 views per user), Work (2.65), and About (1.60), indicating stronger exploration and content interest.</a:t>
+            </a:r>
+            <a:endParaRPr lang="en-US" altLang="en-US" sz="900" spc="-10">
+              <a:solidFill>
+                <a:schemeClr val="tx1"/>
+              </a:solidFill>
+              <a:latin typeface="Raleway" pitchFamily="2" charset="77"/>
+              <a:cs typeface="Times New Roman" panose="02020603050405020304"/>
+            </a:endParaRPr>
+          </a:p>
+          <a:p>
+            <a:endParaRPr lang="en-US" altLang="en-US" sz="900" spc="-10">
+              <a:solidFill>
+                <a:schemeClr val="tx1"/>
+              </a:solidFill>
+              <a:latin typeface="Raleway" pitchFamily="2" charset="77"/>
+              <a:cs typeface="Times New Roman" panose="02020603050405020304"/>
+            </a:endParaRPr>
+          </a:p>
+          <a:p>
+            <a:r>
+              <a:rPr lang="en-US" altLang="en-US" sz="900" spc="-10">
+                <a:solidFill>
+                  <a:schemeClr val="tx1"/>
+                </a:solidFill>
+                <a:latin typeface="Raleway" pitchFamily="2" charset="77"/>
+                <a:cs typeface="Times New Roman" panose="02020603050405020304"/>
+              </a:rPr>
+              <a:t>Overall, the website generated 1,577 views from 633 active users, averaging 2.49 views per user and 1 minute 8 seconds of engagement. However, the Page Not Found screen received 122 views, highlighting a need to identify and repair broken links.</a:t>
+            </a:r>
+            <a:endParaRPr lang="en-US" altLang="en-US" sz="900" spc="-10">
+              <a:solidFill>
+                <a:schemeClr val="tx1"/>
+              </a:solidFill>
+              <a:latin typeface="Raleway" pitchFamily="2" charset="77"/>
+              <a:cs typeface="Times New Roman" panose="02020603050405020304"/>
+            </a:endParaRPr>
+          </a:p>
+        </p:txBody>
+      </p:sp>
+      <p:grpSp>
+        <p:nvGrpSpPr>
+          <p:cNvPr id="8" name="object 8"/>
+          <p:cNvGrpSpPr/>
+          <p:nvPr/>
+        </p:nvGrpSpPr>
+        <p:grpSpPr>
+          <a:xfrm>
+            <a:off x="4155947" y="1283380"/>
+            <a:ext cx="4948181" cy="3718640"/>
+            <a:chOff x="4155947" y="1377441"/>
+            <a:chExt cx="4846320" cy="3624579"/>
+          </a:xfrm>
+        </p:grpSpPr>
+        <p:sp>
+          <p:nvSpPr>
+            <p:cNvPr id="9" name="object 9"/>
+            <p:cNvSpPr/>
+            <p:nvPr/>
+          </p:nvSpPr>
+          <p:spPr>
+            <a:xfrm>
+              <a:off x="4155947" y="1377441"/>
+              <a:ext cx="4846320" cy="3624579"/>
+            </a:xfrm>
+            <a:custGeom>
+              <a:avLst/>
+              <a:gdLst/>
+              <a:ahLst/>
+              <a:cxnLst/>
+              <a:rect l="l" t="t" r="r" b="b"/>
+              <a:pathLst>
+                <a:path w="4846320" h="3624579">
+                  <a:moveTo>
+                    <a:pt x="4846320" y="0"/>
+                  </a:moveTo>
+                  <a:lnTo>
+                    <a:pt x="0" y="0"/>
+                  </a:lnTo>
+                  <a:lnTo>
+                    <a:pt x="0" y="3624199"/>
+                  </a:lnTo>
+                  <a:lnTo>
+                    <a:pt x="4846320" y="3624199"/>
+                  </a:lnTo>
+                  <a:lnTo>
+                    <a:pt x="4846320" y="0"/>
+                  </a:lnTo>
+                  <a:close/>
+                </a:path>
+              </a:pathLst>
+            </a:custGeom>
+            <a:solidFill>
+              <a:srgbClr val="F0F5F8"/>
+            </a:solidFill>
+          </p:spPr>
+          <p:txBody>
+            <a:bodyPr wrap="square" lIns="0" tIns="0" rIns="0" bIns="0" rtlCol="0"/>
+            <a:lstStyle/>
+            <a:p>
+              <a:endParaRPr>
+                <a:latin typeface="Raleway" pitchFamily="2" charset="77"/>
+              </a:endParaRPr>
+            </a:p>
+          </p:txBody>
+        </p:sp>
+        <p:sp>
+          <p:nvSpPr>
+            <p:cNvPr id="10" name="object 10"/>
+            <p:cNvSpPr/>
+            <p:nvPr/>
+          </p:nvSpPr>
+          <p:spPr>
+            <a:xfrm>
+              <a:off x="4155947" y="1377441"/>
+              <a:ext cx="4846320" cy="3624579"/>
+            </a:xfrm>
+            <a:custGeom>
+              <a:avLst/>
+              <a:gdLst/>
+              <a:ahLst/>
+              <a:cxnLst/>
+              <a:rect l="l" t="t" r="r" b="b"/>
+              <a:pathLst>
+                <a:path w="4846320" h="3624579">
+                  <a:moveTo>
+                    <a:pt x="0" y="3624199"/>
+                  </a:moveTo>
+                  <a:lnTo>
+                    <a:pt x="4846320" y="3624199"/>
+                  </a:lnTo>
+                  <a:lnTo>
+                    <a:pt x="4846320" y="0"/>
+                  </a:lnTo>
+                  <a:lnTo>
+                    <a:pt x="0" y="0"/>
+                  </a:lnTo>
+                  <a:lnTo>
+                    <a:pt x="0" y="3624199"/>
+                  </a:lnTo>
+                  <a:close/>
+                </a:path>
+              </a:pathLst>
+            </a:custGeom>
+            <a:ln w="9152">
+              <a:solidFill>
+                <a:srgbClr val="E1E8EF"/>
+              </a:solidFill>
+            </a:ln>
+          </p:spPr>
+          <p:txBody>
+            <a:bodyPr wrap="square" lIns="0" tIns="0" rIns="0" bIns="0" rtlCol="0"/>
+            <a:lstStyle/>
+            <a:p>
+              <a:endParaRPr>
+                <a:latin typeface="Raleway" pitchFamily="2" charset="77"/>
+              </a:endParaRPr>
+            </a:p>
+          </p:txBody>
+        </p:sp>
+      </p:grpSp>
+      <p:pic>
+        <p:nvPicPr>
+          <p:cNvPr id="12" name="Picture 11" descr="Screenshot 2026-06-29 at 19.05.49"/>
+          <p:cNvPicPr>
+            <a:picLocks noChangeAspect="1"/>
+          </p:cNvPicPr>
+          <p:nvPr/>
+        </p:nvPicPr>
+        <p:blipFill>
+          <a:blip r:embed="rId1"/>
+          <a:stretch>
+            <a:fillRect/>
+          </a:stretch>
+        </p:blipFill>
+        <p:spPr>
+          <a:xfrm>
+            <a:off x="4343400" y="1660525"/>
+            <a:ext cx="4672965" cy="2521585"/>
+          </a:xfrm>
+          <a:prstGeom prst="rect">
+            <a:avLst/>
+          </a:prstGeom>
+        </p:spPr>
+      </p:pic>
+    </p:spTree>
+  </p:cSld>
+  <p:clrMapOvr>
+    <a:masterClrMapping/>
+  </p:clrMapOvr>
+</p:sld>
+</file>
+
+<file path=ppt/slides/slide7.xml><?xml version="1.0" encoding="utf-8"?>
+<p:sld xmlns:a="http://schemas.openxmlformats.org/drawingml/2006/main" xmlns:p="http://schemas.openxmlformats.org/presentationml/2006/main" xmlns:r="http://schemas.openxmlformats.org/officeDocument/2006/relationships">
+  <p:cSld>
+    <p:spTree>
+      <p:nvGrpSpPr>
+        <p:cNvPr id="1" name=""/>
+        <p:cNvGrpSpPr/>
+        <p:nvPr/>
+      </p:nvGrpSpPr>
+      <p:grpSpPr/>
+      <p:sp>
+        <p:nvSpPr>
+          <p:cNvPr id="13" name="object 2"/>
+          <p:cNvSpPr txBox="1">
+            <a:spLocks noGrp="1"/>
+          </p:cNvSpPr>
+          <p:nvPr>
+            <p:ph type="title"/>
+          </p:nvPr>
+        </p:nvSpPr>
+        <p:spPr>
+          <a:xfrm>
+            <a:off x="401612" y="165009"/>
+            <a:ext cx="4932464" cy="586105"/>
+          </a:xfrm>
+          <a:prstGeom prst="rect">
+            <a:avLst/>
+          </a:prstGeom>
+        </p:spPr>
+        <p:txBody>
+          <a:bodyPr vert="horz" wrap="square" lIns="0" tIns="264122" rIns="0" bIns="0" rtlCol="0" anchor="t">
+            <a:spAutoFit/>
+          </a:bodyPr>
+          <a:lstStyle/>
+          <a:p>
+            <a:pPr marL="27305">
+              <a:lnSpc>
+                <a:spcPct val="100000"/>
+              </a:lnSpc>
+              <a:spcBef>
+                <a:spcPts val="90"/>
+              </a:spcBef>
+            </a:pPr>
+            <a:r>
+              <a:rPr lang="en-US" spc="35">
+                <a:latin typeface="Raleway" pitchFamily="2" charset="77"/>
+                <a:cs typeface="Times New Roman" panose="02020603050405020304"/>
+              </a:rPr>
+              <a:t>Traffic Acquisition</a:t>
+            </a:r>
+            <a:endParaRPr lang="en-US" spc="35">
+              <a:latin typeface="Raleway" pitchFamily="2" charset="77"/>
+              <a:cs typeface="Times New Roman" panose="02020603050405020304"/>
+            </a:endParaRPr>
+          </a:p>
+        </p:txBody>
+      </p:sp>
+      <p:sp>
+        <p:nvSpPr>
+          <p:cNvPr id="14" name="object 3"/>
+          <p:cNvSpPr txBox="1"/>
+          <p:nvPr/>
+        </p:nvSpPr>
+        <p:spPr>
+          <a:xfrm>
+            <a:off x="428381" y="900929"/>
+            <a:ext cx="4219641" cy="319405"/>
+          </a:xfrm>
+          <a:prstGeom prst="rect">
+            <a:avLst/>
+          </a:prstGeom>
+        </p:spPr>
+        <p:txBody>
+          <a:bodyPr vert="horz" wrap="square" lIns="0" tIns="12065" rIns="0" bIns="0" rtlCol="0" anchor="t">
+            <a:spAutoFit/>
+          </a:bodyPr>
+          <a:lstStyle/>
+          <a:p>
+            <a:pPr marL="12700">
+              <a:lnSpc>
+                <a:spcPct val="100000"/>
+              </a:lnSpc>
+              <a:spcBef>
+                <a:spcPts val="95"/>
+              </a:spcBef>
+            </a:pPr>
+            <a:endParaRPr lang="en-US" altLang="en-GB" sz="1300" spc="-10">
+              <a:solidFill>
+                <a:srgbClr val="334154"/>
+              </a:solidFill>
+              <a:latin typeface="Raleway" pitchFamily="2" charset="77"/>
+              <a:cs typeface="Times New Roman" panose="02020603050405020304"/>
+            </a:endParaRPr>
+          </a:p>
+        </p:txBody>
+      </p:sp>
+      <p:grpSp>
+        <p:nvGrpSpPr>
+          <p:cNvPr id="15" name="object 4"/>
+          <p:cNvGrpSpPr/>
+          <p:nvPr/>
+        </p:nvGrpSpPr>
+        <p:grpSpPr>
+          <a:xfrm>
+            <a:off x="303792" y="1342200"/>
+            <a:ext cx="3311476" cy="3659820"/>
+            <a:chOff x="429768" y="1090226"/>
+            <a:chExt cx="3438525" cy="3907338"/>
+          </a:xfrm>
+        </p:grpSpPr>
+        <p:sp>
+          <p:nvSpPr>
+            <p:cNvPr id="16" name="object 5"/>
+            <p:cNvSpPr/>
+            <p:nvPr/>
+          </p:nvSpPr>
+          <p:spPr>
+            <a:xfrm>
+              <a:off x="429768" y="1354569"/>
+              <a:ext cx="3438525" cy="3642995"/>
+            </a:xfrm>
+            <a:custGeom>
+              <a:avLst/>
+              <a:gdLst/>
+              <a:ahLst/>
+              <a:cxnLst/>
+              <a:rect l="l" t="t" r="r" b="b"/>
+              <a:pathLst>
+                <a:path w="3438525" h="3642995">
+                  <a:moveTo>
+                    <a:pt x="3438144" y="0"/>
+                  </a:moveTo>
+                  <a:lnTo>
+                    <a:pt x="0" y="0"/>
+                  </a:lnTo>
+                  <a:lnTo>
+                    <a:pt x="0" y="3642487"/>
+                  </a:lnTo>
+                  <a:lnTo>
+                    <a:pt x="3438144" y="3642487"/>
+                  </a:lnTo>
+                  <a:lnTo>
+                    <a:pt x="3438144" y="0"/>
+                  </a:lnTo>
+                  <a:close/>
+                </a:path>
+              </a:pathLst>
+            </a:custGeom>
+            <a:solidFill>
+              <a:srgbClr val="F8F9FB"/>
+            </a:solidFill>
+          </p:spPr>
+          <p:txBody>
+            <a:bodyPr wrap="square" lIns="0" tIns="0" rIns="0" bIns="0" rtlCol="0"/>
+            <a:lstStyle/>
+            <a:p>
+              <a:endParaRPr>
+                <a:latin typeface="Raleway" pitchFamily="2" charset="77"/>
+              </a:endParaRPr>
+            </a:p>
+          </p:txBody>
+        </p:sp>
+        <p:sp>
+          <p:nvSpPr>
+            <p:cNvPr id="17" name="object 6"/>
+            <p:cNvSpPr/>
+            <p:nvPr/>
+          </p:nvSpPr>
+          <p:spPr>
+            <a:xfrm>
+              <a:off x="576072" y="1090226"/>
+              <a:ext cx="3145790" cy="27940"/>
+            </a:xfrm>
+            <a:custGeom>
+              <a:avLst/>
+              <a:gdLst/>
+              <a:ahLst/>
+              <a:cxnLst/>
+              <a:rect l="l" t="t" r="r" b="b"/>
+              <a:pathLst>
+                <a:path w="3145790" h="27940">
+                  <a:moveTo>
+                    <a:pt x="3145536" y="0"/>
+                  </a:moveTo>
+                  <a:lnTo>
+                    <a:pt x="0" y="0"/>
+                  </a:lnTo>
+                  <a:lnTo>
+                    <a:pt x="0" y="27456"/>
+                  </a:lnTo>
+                  <a:lnTo>
+                    <a:pt x="3145536" y="27456"/>
+                  </a:lnTo>
+                  <a:lnTo>
+                    <a:pt x="3145536" y="0"/>
+                  </a:lnTo>
+                  <a:close/>
+                </a:path>
+              </a:pathLst>
+            </a:custGeom>
+            <a:solidFill>
+              <a:srgbClr val="1E3989"/>
+            </a:solidFill>
+          </p:spPr>
+          <p:txBody>
+            <a:bodyPr wrap="square" lIns="0" tIns="0" rIns="0" bIns="0" rtlCol="0"/>
+            <a:lstStyle/>
+            <a:p>
+              <a:endParaRPr>
+                <a:latin typeface="Raleway" pitchFamily="2" charset="77"/>
+              </a:endParaRPr>
+            </a:p>
+          </p:txBody>
+        </p:sp>
+      </p:grpSp>
+      <p:sp>
+        <p:nvSpPr>
+          <p:cNvPr id="18" name="object 7"/>
+          <p:cNvSpPr txBox="1"/>
+          <p:nvPr/>
+        </p:nvSpPr>
+        <p:spPr>
+          <a:xfrm>
+            <a:off x="429895" y="1501140"/>
+            <a:ext cx="3610610" cy="3629660"/>
+          </a:xfrm>
+          <a:prstGeom prst="rect">
+            <a:avLst/>
+          </a:prstGeom>
+        </p:spPr>
+        <p:txBody>
+          <a:bodyPr vert="horz" wrap="square" lIns="0" tIns="29209" rIns="0" bIns="0" rtlCol="0" anchor="t">
+            <a:spAutoFit/>
+          </a:bodyPr>
+          <a:lstStyle/>
+          <a:p>
+            <a:r>
+              <a:t>Overall Insight:</a:t>
+            </a:r>
+            <a:endParaRPr lang="en-US" sz="900" b="1">
+              <a:solidFill>
+                <a:schemeClr val="tx1"/>
+              </a:solidFill>
+              <a:latin typeface="Raleway" pitchFamily="2" charset="77"/>
+            </a:endParaRPr>
+          </a:p>
+          <a:p>
+            <a:endParaRPr lang="en-US" altLang="en-US" sz="900" b="0">
+              <a:solidFill>
+                <a:schemeClr val="tx1"/>
+              </a:solidFill>
+              <a:latin typeface="Raleway" charset="0"/>
+              <a:cs typeface="Raleway" charset="0"/>
+            </a:endParaRPr>
+          </a:p>
+          <a:p>
+            <a:endParaRPr lang="en-US" altLang="en-US" sz="900" b="0">
+              <a:solidFill>
+                <a:schemeClr val="tx1"/>
+              </a:solidFill>
+              <a:latin typeface="Raleway" charset="0"/>
+              <a:cs typeface="Raleway" charset="0"/>
+            </a:endParaRPr>
+          </a:p>
+          <a:p>
+            <a:endParaRPr lang="en-US" altLang="en-US" sz="900" b="0">
+              <a:solidFill>
+                <a:schemeClr val="tx1"/>
+              </a:solidFill>
+              <a:latin typeface="Raleway" charset="0"/>
+              <a:cs typeface="Raleway" charset="0"/>
+            </a:endParaRPr>
+          </a:p>
+          <a:p>
+            <a:endParaRPr lang="en-US" altLang="en-US" sz="900" b="0">
+              <a:solidFill>
+                <a:schemeClr val="tx1"/>
+              </a:solidFill>
+              <a:latin typeface="Raleway" charset="0"/>
+              <a:cs typeface="Raleway" charset="0"/>
+            </a:endParaRPr>
+          </a:p>
+          <a:p>
+            <a:endParaRPr lang="en-US" altLang="en-US" sz="900" b="0">
+              <a:solidFill>
+                <a:schemeClr val="tx1"/>
+              </a:solidFill>
+              <a:latin typeface="Raleway" charset="0"/>
+              <a:cs typeface="Raleway" charset="0"/>
+            </a:endParaRPr>
+          </a:p>
+          <a:p>
+            <a:endParaRPr lang="en-US" altLang="en-US" sz="900" b="0">
+              <a:solidFill>
+                <a:schemeClr val="tx1"/>
+              </a:solidFill>
+              <a:latin typeface="Raleway" charset="0"/>
+              <a:cs typeface="Raleway" charset="0"/>
+            </a:endParaRPr>
+          </a:p>
+          <a:p>
+            <a:endParaRPr lang="en-US" altLang="en-US" sz="900" b="0">
+              <a:solidFill>
+                <a:schemeClr val="tx1"/>
+              </a:solidFill>
+              <a:latin typeface="Raleway" charset="0"/>
+              <a:cs typeface="Raleway" charset="0"/>
+            </a:endParaRPr>
+          </a:p>
+        </p:txBody>
+      </p:sp>
+      <p:grpSp>
+        <p:nvGrpSpPr>
+          <p:cNvPr id="19" name="object 8"/>
+          <p:cNvGrpSpPr/>
+          <p:nvPr/>
+        </p:nvGrpSpPr>
+        <p:grpSpPr>
+          <a:xfrm>
+            <a:off x="4155947" y="1283380"/>
+            <a:ext cx="4948181" cy="3718640"/>
+            <a:chOff x="4155947" y="1377441"/>
+            <a:chExt cx="4846320" cy="3624579"/>
+          </a:xfrm>
+        </p:grpSpPr>
+        <p:sp>
+          <p:nvSpPr>
+            <p:cNvPr id="20" name="object 9"/>
+            <p:cNvSpPr/>
+            <p:nvPr/>
+          </p:nvSpPr>
+          <p:spPr>
+            <a:xfrm>
+              <a:off x="4155947" y="1377441"/>
+              <a:ext cx="4846320" cy="3624579"/>
+            </a:xfrm>
+            <a:custGeom>
+              <a:avLst/>
+              <a:gdLst/>
+              <a:ahLst/>
+              <a:cxnLst/>
+              <a:rect l="l" t="t" r="r" b="b"/>
+              <a:pathLst>
+                <a:path w="4846320" h="3624579">
+                  <a:moveTo>
+                    <a:pt x="4846320" y="0"/>
+                  </a:moveTo>
+                  <a:lnTo>
+                    <a:pt x="0" y="0"/>
+                  </a:lnTo>
+                  <a:lnTo>
+                    <a:pt x="0" y="3624199"/>
+                  </a:lnTo>
+                  <a:lnTo>
+                    <a:pt x="4846320" y="3624199"/>
+                  </a:lnTo>
+                  <a:lnTo>
+                    <a:pt x="4846320" y="0"/>
+                  </a:lnTo>
+                  <a:close/>
+                </a:path>
+              </a:pathLst>
+            </a:custGeom>
+            <a:solidFill>
+              <a:srgbClr val="F0F5F8"/>
+            </a:solidFill>
+          </p:spPr>
+          <p:txBody>
+            <a:bodyPr wrap="square" lIns="0" tIns="0" rIns="0" bIns="0" rtlCol="0"/>
+            <a:lstStyle/>
+            <a:p>
+              <a:endParaRPr>
+                <a:latin typeface="Raleway" pitchFamily="2" charset="77"/>
+              </a:endParaRPr>
+            </a:p>
+          </p:txBody>
+        </p:sp>
+        <p:sp>
+          <p:nvSpPr>
+            <p:cNvPr id="21" name="object 10"/>
+            <p:cNvSpPr/>
+            <p:nvPr/>
+          </p:nvSpPr>
+          <p:spPr>
+            <a:xfrm>
+              <a:off x="4155947" y="1377441"/>
+              <a:ext cx="4846320" cy="3624579"/>
+            </a:xfrm>
+            <a:custGeom>
+              <a:avLst/>
+              <a:gdLst/>
+              <a:ahLst/>
+              <a:cxnLst/>
+              <a:rect l="l" t="t" r="r" b="b"/>
+              <a:pathLst>
+                <a:path w="4846320" h="3624579">
+                  <a:moveTo>
+                    <a:pt x="0" y="3624199"/>
+                  </a:moveTo>
+                  <a:lnTo>
+                    <a:pt x="4846320" y="3624199"/>
+                  </a:lnTo>
+                  <a:lnTo>
+                    <a:pt x="4846320" y="0"/>
+                  </a:lnTo>
+                  <a:lnTo>
+                    <a:pt x="0" y="0"/>
+                  </a:lnTo>
+                  <a:lnTo>
+                    <a:pt x="0" y="3624199"/>
+                  </a:lnTo>
+                  <a:close/>
+                </a:path>
+              </a:pathLst>
+            </a:custGeom>
+            <a:ln w="9152">
+              <a:solidFill>
+                <a:srgbClr val="E1E8EF"/>
+              </a:solidFill>
+            </a:ln>
+          </p:spPr>
+          <p:txBody>
+            <a:bodyPr wrap="square" lIns="0" tIns="0" rIns="0" bIns="0" rtlCol="0"/>
+            <a:lstStyle/>
+            <a:p>
+              <a:endParaRPr>
+                <a:latin typeface="Raleway" pitchFamily="2" charset="77"/>
+              </a:endParaRPr>
+            </a:p>
+          </p:txBody>
+        </p:sp>
+      </p:grpSp>
+      <p:pic>
+        <p:nvPicPr>
+          <p:cNvPr id="22" name="Picture 32" descr="image.png"/>
+          <p:cNvPicPr>
+            <a:picLocks noChangeAspect="1"/>
+          </p:cNvPicPr>
+          <p:nvPr/>
+        </p:nvPicPr>
+        <p:blipFill>
+          <a:blip r:embed="rId2"/>
+          <a:stretch>
+            <a:fillRect/>
+          </a:stretch>
+        </p:blipFill>
+        <p:spPr>
+          <a:xfrm>
+            <a:off x="4258310" y="1501140"/>
+            <a:ext cx="4742815" cy="2962275"/>
+          </a:xfrm>
+          <a:prstGeom prst="rect">
+            <a:avLst/>
+          </a:prstGeom>
+        </p:spPr>
+      </p:pic>
+    </p:spTree>
+  </p:cSld>
+  <p:clrMapOvr>
+    <a:masterClrMapping/>
+  </p:clrMapOvr>
+</p:sld>
+</file>
+
+<file path=ppt/slides/slide8.xml><?xml version="1.0" encoding="utf-8"?>
+<p:sld xmlns:a="http://schemas.openxmlformats.org/drawingml/2006/main" xmlns:r="http://schemas.openxmlformats.org/officeDocument/2006/relationships" xmlns:p="http://schemas.openxmlformats.org/presentationml/2006/main">
+  <p:cSld>
+    <p:spTree>
+      <p:nvGrpSpPr>
+        <p:cNvPr id="1" name=""/>
+        <p:cNvGrpSpPr/>
+        <p:nvPr/>
+      </p:nvGrpSpPr>
+      <p:grpSpPr>
+        <a:xfrm>
+          <a:off x="0" y="0"/>
+          <a:ext cx="0" cy="0"/>
+          <a:chOff x="0" y="0"/>
+          <a:chExt cx="0" cy="0"/>
+        </a:xfrm>
+      </p:grpSpPr>
+      <p:sp>
+        <p:nvSpPr>
+          <p:cNvPr id="22" name="object 2"/>
+          <p:cNvSpPr/>
+          <p:nvPr/>
+        </p:nvSpPr>
+        <p:spPr>
+          <a:xfrm>
+            <a:off x="428625" y="428866"/>
+            <a:ext cx="57150" cy="609600"/>
+          </a:xfrm>
+          <a:custGeom>
+            <a:avLst/>
+            <a:gdLst/>
+            <a:ahLst/>
+            <a:cxnLst/>
+            <a:rect l="l" t="t" r="r" b="b"/>
+            <a:pathLst>
+              <a:path w="57150" h="609600">
+                <a:moveTo>
+                  <a:pt x="56756" y="0"/>
+                </a:moveTo>
+                <a:lnTo>
+                  <a:pt x="0" y="0"/>
+                </a:lnTo>
+                <a:lnTo>
+                  <a:pt x="0" y="609485"/>
+                </a:lnTo>
+                <a:lnTo>
+                  <a:pt x="56756" y="609485"/>
+                </a:lnTo>
+                <a:lnTo>
+                  <a:pt x="56756" y="0"/>
+                </a:lnTo>
+                <a:close/>
+              </a:path>
+            </a:pathLst>
+          </a:custGeom>
+          <a:solidFill>
+            <a:srgbClr val="1E3988"/>
+          </a:solidFill>
+        </p:spPr>
+        <p:txBody>
+          <a:bodyPr wrap="square" lIns="0" tIns="0" rIns="0" bIns="0" rtlCol="0"/>
+          <a:lstStyle/>
+          <a:p>
+            <a:endParaRPr>
+              <a:latin typeface="Raleway Regular" charset="0"/>
+              <a:cs typeface="Raleway Regular" charset="0"/>
+            </a:endParaRPr>
+          </a:p>
+        </p:txBody>
+      </p:sp>
+      <p:sp>
+        <p:nvSpPr>
+          <p:cNvPr id="23" name="object 3"/>
+          <p:cNvSpPr txBox="1">
+            <a:spLocks noGrp="1"/>
+          </p:cNvSpPr>
+          <p:nvPr>
+            <p:ph type="title"/>
+          </p:nvPr>
+        </p:nvSpPr>
+        <p:spPr>
+          <a:xfrm>
+            <a:off x="631190" y="381000"/>
+            <a:ext cx="3439795" cy="335915"/>
+          </a:xfrm>
+          <a:prstGeom prst="rect">
+            <a:avLst/>
+          </a:prstGeom>
+        </p:spPr>
+        <p:txBody>
+          <a:bodyPr vert="horz" wrap="square" lIns="0" tIns="13335" rIns="0" bIns="0" rtlCol="0">
+            <a:spAutoFit/>
+          </a:bodyPr>
+          <a:lstStyle/>
+          <a:p>
+            <a:pPr marL="12700">
+              <a:lnSpc>
+                <a:spcPct val="100000"/>
+              </a:lnSpc>
+              <a:spcBef>
+                <a:spcPts val="105"/>
+              </a:spcBef>
+            </a:pPr>
+            <a:r>
+              <a:rPr lang="en-US" dirty="0">
+                <a:latin typeface="Raleway Regular" charset="0"/>
+                <a:cs typeface="Raleway Regular" charset="0"/>
+              </a:rPr>
+              <a:t>SEO</a:t>
+            </a:r>
+            <a:endParaRPr lang="en-US" spc="-10" dirty="0">
+              <a:latin typeface="Raleway Regular" charset="0"/>
+              <a:cs typeface="Raleway Regular" charset="0"/>
+            </a:endParaRPr>
+          </a:p>
+        </p:txBody>
+      </p:sp>
+      <p:sp>
+        <p:nvSpPr>
+          <p:cNvPr id="24" name="object 5"/>
+          <p:cNvSpPr txBox="1"/>
+          <p:nvPr/>
+        </p:nvSpPr>
+        <p:spPr>
+          <a:xfrm>
+            <a:off x="176212" y="1815838"/>
+            <a:ext cx="3590925" cy="901065"/>
+          </a:xfrm>
+          <a:prstGeom prst="rect">
+            <a:avLst/>
+          </a:prstGeom>
+          <a:solidFill>
+            <a:srgbClr val="F8F8FA"/>
+          </a:solidFill>
+          <a:ln w="9157">
+            <a:solidFill>
+              <a:srgbClr val="E0E8EE"/>
+            </a:solidFill>
+          </a:ln>
+        </p:spPr>
+        <p:txBody>
+          <a:bodyPr vert="horz" wrap="square" lIns="0" tIns="12065" rIns="0" bIns="0" rtlCol="0">
+            <a:spAutoFit/>
+          </a:bodyPr>
+          <a:lstStyle/>
+          <a:p>
+            <a:pPr marL="171450" indent="-171450">
+              <a:lnSpc>
+                <a:spcPct val="100000"/>
+              </a:lnSpc>
+              <a:spcBef>
+                <a:spcPts val="95"/>
+              </a:spcBef>
+              <a:buFont typeface="Arial" panose="020B0704020202020204" pitchFamily="34" charset="0"/>
+              <a:buChar char="•"/>
+            </a:pPr>
+            <a:r>
+              <a:rPr lang="en-US" altLang="en-US" sz="950" dirty="0">
+                <a:solidFill>
+                  <a:srgbClr val="334153"/>
+                </a:solidFill>
+                <a:latin typeface="Raleway Regular" charset="0"/>
+                <a:cs typeface="Raleway Regular" charset="0"/>
+              </a:rPr>
+              <a:t>The search results for Dicomm are correctly pulling through relevant brand-owned and associated pages, with the official Dicomm website appearing prominently as the top result. This indicates that the brand has strong search visibility and is discoverable when users search for Dicomm directly. ​</a:t>
+            </a:r>
+            <a:endParaRPr lang="en-US" altLang="en-US" sz="950" dirty="0">
+              <a:solidFill>
+                <a:srgbClr val="334153"/>
+              </a:solidFill>
+              <a:latin typeface="Raleway Regular" charset="0"/>
+              <a:cs typeface="Raleway Regular" charset="0"/>
+            </a:endParaRPr>
+          </a:p>
+          <a:p>
+            <a:pPr marL="0" indent="0">
+              <a:lnSpc>
+                <a:spcPct val="100000"/>
+              </a:lnSpc>
+              <a:spcBef>
+                <a:spcPts val="95"/>
+              </a:spcBef>
+              <a:buFont typeface="Arial" panose="020B0704020202020204" pitchFamily="34" charset="0"/>
+              <a:buNone/>
+            </a:pPr>
+            <a:endParaRPr lang="en-US" altLang="en-US" sz="950" dirty="0">
+              <a:solidFill>
+                <a:srgbClr val="334153"/>
+              </a:solidFill>
+              <a:latin typeface="Raleway Regular" charset="0"/>
+              <a:cs typeface="Raleway Regular" charset="0"/>
+            </a:endParaRPr>
+          </a:p>
+        </p:txBody>
+      </p:sp>
+      <p:sp>
+        <p:nvSpPr>
+          <p:cNvPr id="25" name="object 3"/>
+          <p:cNvSpPr txBox="1">
+            <a:spLocks noGrp="1"/>
+          </p:cNvSpPr>
+          <p:nvPr/>
+        </p:nvSpPr>
+        <p:spPr>
+          <a:xfrm>
+            <a:off x="631190" y="749300"/>
+            <a:ext cx="3439795" cy="228600"/>
+          </a:xfrm>
+          <a:prstGeom prst="rect">
+            <a:avLst/>
+          </a:prstGeom>
+        </p:spPr>
+        <p:txBody>
+          <a:bodyPr vert="horz" wrap="square" lIns="0" tIns="13335" rIns="0" bIns="0" rtlCol="0">
+            <a:spAutoFit/>
+          </a:bodyPr>
+          <a:lstStyle>
+            <a:lvl1pPr>
+              <a:defRPr sz="2100" b="1" i="0">
+                <a:solidFill>
+                  <a:srgbClr val="1E3988"/>
+                </a:solidFill>
+                <a:latin typeface="Times New Roman" panose="02020603050405020304"/>
+                <a:ea typeface="+mj-ea"/>
+                <a:cs typeface="Times New Roman" panose="02020603050405020304"/>
+              </a:defRPr>
+            </a:lvl1pPr>
+          </a:lstStyle>
+          <a:p>
+            <a:pPr marL="12700">
+              <a:lnSpc>
+                <a:spcPct val="100000"/>
+              </a:lnSpc>
+              <a:spcBef>
+                <a:spcPts val="105"/>
+              </a:spcBef>
+            </a:pPr>
+            <a:r>
+              <a:rPr lang="en-US" sz="1400" dirty="0">
+                <a:solidFill>
+                  <a:schemeClr val="tx1"/>
+                </a:solidFill>
+                <a:latin typeface="Raleway Regular" charset="0"/>
+                <a:cs typeface="Raleway Regular" charset="0"/>
+              </a:rPr>
+              <a:t>Dicomm</a:t>
+            </a:r>
+            <a:endParaRPr lang="en-US" sz="1400" spc="-10" dirty="0">
+              <a:solidFill>
+                <a:schemeClr val="tx1"/>
+              </a:solidFill>
+              <a:latin typeface="Raleway Regular" charset="0"/>
+              <a:cs typeface="Raleway Regular" charset="0"/>
+            </a:endParaRPr>
+          </a:p>
+        </p:txBody>
+      </p:sp>
+      <p:pic>
+        <p:nvPicPr>
+          <p:cNvPr id="27" name="Picture 26" descr="Screenshot 2026-05-29 at 11.10.49"/>
+          <p:cNvPicPr>
+            <a:picLocks noChangeAspect="1"/>
+          </p:cNvPicPr>
+          <p:nvPr/>
+        </p:nvPicPr>
+        <p:blipFill>
+          <a:blip r:embed="rId1"/>
+          <a:stretch>
+            <a:fillRect/>
+          </a:stretch>
+        </p:blipFill>
+        <p:spPr>
+          <a:xfrm>
+            <a:off x="3962400" y="1203325"/>
+            <a:ext cx="5014595" cy="2670810"/>
+          </a:xfrm>
+          <a:prstGeom prst="rect">
+            <a:avLst/>
+          </a:prstGeom>
+        </p:spPr>
+      </p:pic>
+    </p:spTree>
+  </p:cSld>
+  <p:clrMapOvr>
+    <a:masterClrMapping/>
+  </p:clrMapOvr>
+</p:sld>
+</file>
+
+<file path=ppt/slides/slide9.xml><?xml version="1.0" encoding="utf-8"?>
+<p:sld xmlns:a="http://schemas.openxmlformats.org/drawingml/2006/main" xmlns:p="http://schemas.openxmlformats.org/presentationml/2006/main" xmlns:r="http://schemas.openxmlformats.org/officeDocument/2006/relationships">
+  <p:cSld>
+    <p:spTree>
+      <p:nvGrpSpPr>
+        <p:cNvPr id="1" name=""/>
+        <p:cNvGrpSpPr/>
+        <p:nvPr/>
+      </p:nvGrpSpPr>
+      <p:grpSpPr/>
+      <p:sp>
+        <p:nvSpPr>
+          <p:cNvPr id="6" name="object 2"/>
+          <p:cNvSpPr/>
+          <p:nvPr/>
+        </p:nvSpPr>
+        <p:spPr>
+          <a:xfrm>
+            <a:off x="428625" y="428866"/>
+            <a:ext cx="57150" cy="609600"/>
+          </a:xfrm>
+          <a:custGeom>
+            <a:avLst/>
+            <a:gdLst/>
+            <a:ahLst/>
+            <a:cxnLst/>
+            <a:rect l="l" t="t" r="r" b="b"/>
+            <a:pathLst>
+              <a:path w="57150" h="609600">
+                <a:moveTo>
+                  <a:pt x="56756" y="0"/>
+                </a:moveTo>
+                <a:lnTo>
+                  <a:pt x="0" y="0"/>
+                </a:lnTo>
+                <a:lnTo>
+                  <a:pt x="0" y="609485"/>
+                </a:lnTo>
+                <a:lnTo>
+                  <a:pt x="56756" y="609485"/>
+                </a:lnTo>
+                <a:lnTo>
+                  <a:pt x="56756" y="0"/>
+                </a:lnTo>
+                <a:close/>
+              </a:path>
+            </a:pathLst>
+          </a:custGeom>
+          <a:solidFill>
+            <a:srgbClr val="1E3988"/>
+          </a:solidFill>
+        </p:spPr>
+        <p:txBody>
+          <a:bodyPr wrap="square" lIns="0" tIns="0" rIns="0" bIns="0" rtlCol="0"/>
+          <a:lstStyle/>
+          <a:p>
+            <a:endParaRPr>
+              <a:latin typeface="Raleway Regular" charset="0"/>
+              <a:cs typeface="Raleway Regular" charset="0"/>
+            </a:endParaRPr>
+          </a:p>
+        </p:txBody>
+      </p:sp>
+      <p:sp>
+        <p:nvSpPr>
+          <p:cNvPr id="7" name="object 3"/>
+          <p:cNvSpPr txBox="1">
+            <a:spLocks noGrp="1"/>
+          </p:cNvSpPr>
+          <p:nvPr>
+            <p:ph type="title"/>
+          </p:nvPr>
+        </p:nvSpPr>
+        <p:spPr>
+          <a:xfrm>
+            <a:off x="631190" y="381000"/>
+            <a:ext cx="3439795" cy="659130"/>
+          </a:xfrm>
+          <a:prstGeom prst="rect">
+            <a:avLst/>
+          </a:prstGeom>
+        </p:spPr>
+        <p:txBody>
+          <a:bodyPr vert="horz" wrap="square" lIns="0" tIns="13335" rIns="0" bIns="0" rtlCol="0">
+            <a:spAutoFit/>
+          </a:bodyPr>
+          <a:lstStyle/>
+          <a:p>
+            <a:pPr marL="12700">
+              <a:lnSpc>
+                <a:spcPct val="100000"/>
+              </a:lnSpc>
+              <a:spcBef>
+                <a:spcPts val="105"/>
+              </a:spcBef>
+            </a:pPr>
+            <a:r>
+              <a:rPr lang="en-US" dirty="0">
+                <a:latin typeface="Raleway Bold" charset="0"/>
+                <a:cs typeface="Raleway Bold" charset="0"/>
+              </a:rPr>
+              <a:t>Uptime and System Reliability Insight</a:t>
+            </a:r>
+            <a:endParaRPr lang="en-US" spc="-10" dirty="0">
+              <a:latin typeface="Raleway Bold" charset="0"/>
+              <a:cs typeface="Raleway Bold" charset="0"/>
+            </a:endParaRPr>
+          </a:p>
+        </p:txBody>
+      </p:sp>
+      <p:sp>
+        <p:nvSpPr>
+          <p:cNvPr id="9" name="object 5"/>
+          <p:cNvSpPr txBox="1"/>
+          <p:nvPr/>
+        </p:nvSpPr>
+        <p:spPr>
+          <a:xfrm>
+            <a:off x="305117" y="1434838"/>
+            <a:ext cx="3590925" cy="2216785"/>
+          </a:xfrm>
+          <a:prstGeom prst="rect">
+            <a:avLst/>
+          </a:prstGeom>
+          <a:solidFill>
+            <a:srgbClr val="F8F8FA"/>
+          </a:solidFill>
+          <a:ln w="9157">
+            <a:solidFill>
+              <a:srgbClr val="E0E8EE"/>
+            </a:solidFill>
+          </a:ln>
+        </p:spPr>
+        <p:txBody>
+          <a:bodyPr vert="horz" wrap="square" lIns="0" tIns="12065" rIns="0" bIns="0" rtlCol="0">
+            <a:spAutoFit/>
+          </a:bodyPr>
+          <a:lstStyle/>
+          <a:p>
+            <a:pPr marL="0" indent="0">
+              <a:lnSpc>
+                <a:spcPct val="100000"/>
+              </a:lnSpc>
+              <a:spcBef>
+                <a:spcPts val="95"/>
+              </a:spcBef>
+              <a:buFont typeface="Arial" panose="020B0704020202020204" pitchFamily="34" charset="0"/>
+              <a:buNone/>
+            </a:pPr>
+            <a:r>
+              <a:rPr lang="en-US" altLang="en-US" sz="950" dirty="0">
+                <a:solidFill>
+                  <a:srgbClr val="334153"/>
+                </a:solidFill>
+                <a:latin typeface="Raleway Regular" charset="0"/>
+                <a:cs typeface="Raleway Regular" charset="0"/>
+              </a:rPr>
+              <a:t>    ​</a:t>
+            </a:r>
+            <a:endParaRPr lang="en-US" altLang="en-US" sz="950" dirty="0">
+              <a:solidFill>
+                <a:srgbClr val="334153"/>
+              </a:solidFill>
+              <a:latin typeface="Raleway Regular" charset="0"/>
+              <a:cs typeface="Raleway Regular" charset="0"/>
+            </a:endParaRPr>
+          </a:p>
+          <a:p>
+            <a:pPr marL="0" indent="0">
+              <a:lnSpc>
+                <a:spcPct val="100000"/>
+              </a:lnSpc>
+              <a:spcBef>
+                <a:spcPts val="95"/>
+              </a:spcBef>
+              <a:buFont typeface="Arial" panose="020B0704020202020204" pitchFamily="34" charset="0"/>
+              <a:buNone/>
+            </a:pPr>
+            <a:endParaRPr lang="en-US" altLang="en-US" sz="950" dirty="0">
+              <a:solidFill>
+                <a:srgbClr val="334153"/>
+              </a:solidFill>
+              <a:latin typeface="Raleway Regular" charset="0"/>
+              <a:cs typeface="Raleway Regular" charset="0"/>
+            </a:endParaRPr>
+          </a:p>
+          <a:p>
+            <a:pPr marL="0" indent="0">
+              <a:lnSpc>
+                <a:spcPct val="100000"/>
+              </a:lnSpc>
+              <a:spcBef>
+                <a:spcPts val="95"/>
+              </a:spcBef>
+              <a:buFont typeface="Arial" panose="020B0704020202020204" pitchFamily="34" charset="0"/>
+              <a:buNone/>
+            </a:pPr>
+            <a:r>
+              <a:rPr lang="en-US" altLang="en-US" sz="950" dirty="0">
+                <a:solidFill>
+                  <a:srgbClr val="334153"/>
+                </a:solidFill>
+                <a:latin typeface="Raleway Regular" charset="0"/>
+                <a:cs typeface="Raleway Regular" charset="0"/>
+              </a:rPr>
+              <a:t>    The website demonstrates strong operational stability,</a:t>
+            </a:r>
+            <a:endParaRPr lang="en-US" altLang="en-US" sz="950" dirty="0">
+              <a:solidFill>
+                <a:srgbClr val="334153"/>
+              </a:solidFill>
+              <a:latin typeface="Raleway Regular" charset="0"/>
+              <a:cs typeface="Raleway Regular" charset="0"/>
+            </a:endParaRPr>
+          </a:p>
+          <a:p>
+            <a:pPr marL="0" indent="0">
+              <a:lnSpc>
+                <a:spcPct val="100000"/>
+              </a:lnSpc>
+              <a:spcBef>
+                <a:spcPts val="95"/>
+              </a:spcBef>
+              <a:buFont typeface="Arial" panose="020B0704020202020204" pitchFamily="34" charset="0"/>
+              <a:buNone/>
+            </a:pPr>
+            <a:r>
+              <a:rPr lang="en-US" altLang="en-US" sz="950" dirty="0">
+                <a:solidFill>
+                  <a:srgbClr val="334153"/>
+                </a:solidFill>
+                <a:latin typeface="Raleway Regular" charset="0"/>
+                <a:cs typeface="Raleway Regular" charset="0"/>
+              </a:rPr>
+              <a:t>    maintaining a 100% uptime over the past 24 hours and</a:t>
+            </a:r>
+            <a:endParaRPr lang="en-US" altLang="en-US" sz="950" dirty="0">
+              <a:solidFill>
+                <a:srgbClr val="334153"/>
+              </a:solidFill>
+              <a:latin typeface="Raleway Regular" charset="0"/>
+              <a:cs typeface="Raleway Regular" charset="0"/>
+            </a:endParaRPr>
+          </a:p>
+          <a:p>
+            <a:pPr marL="0" indent="0">
+              <a:lnSpc>
+                <a:spcPct val="100000"/>
+              </a:lnSpc>
+              <a:spcBef>
+                <a:spcPts val="95"/>
+              </a:spcBef>
+              <a:buFont typeface="Arial" panose="020B0704020202020204" pitchFamily="34" charset="0"/>
+              <a:buNone/>
+            </a:pPr>
+            <a:r>
+              <a:rPr lang="en-US" altLang="en-US" sz="950" dirty="0">
+                <a:solidFill>
+                  <a:srgbClr val="334153"/>
+                </a:solidFill>
+                <a:latin typeface="Raleway Regular" charset="0"/>
+                <a:cs typeface="Raleway Regular" charset="0"/>
+              </a:rPr>
+              <a:t>    99.92% uptime over the last 30 days, indicating highly</a:t>
+            </a:r>
+            <a:endParaRPr lang="en-US" altLang="en-US" sz="950" dirty="0">
+              <a:solidFill>
+                <a:srgbClr val="334153"/>
+              </a:solidFill>
+              <a:latin typeface="Raleway Regular" charset="0"/>
+              <a:cs typeface="Raleway Regular" charset="0"/>
+            </a:endParaRPr>
+          </a:p>
+          <a:p>
+            <a:pPr marL="0" indent="0">
+              <a:lnSpc>
+                <a:spcPct val="100000"/>
+              </a:lnSpc>
+              <a:spcBef>
+                <a:spcPts val="95"/>
+              </a:spcBef>
+              <a:buFont typeface="Arial" panose="020B0704020202020204" pitchFamily="34" charset="0"/>
+              <a:buNone/>
+            </a:pPr>
+            <a:r>
+              <a:rPr lang="en-US" altLang="en-US" sz="950" dirty="0">
+                <a:solidFill>
+                  <a:srgbClr val="334153"/>
+                </a:solidFill>
+                <a:latin typeface="Raleway Regular" charset="0"/>
+                <a:cs typeface="Raleway Regular" charset="0"/>
+              </a:rPr>
+              <a:t>    reliable service availability.​</a:t>
+            </a:r>
+            <a:endParaRPr lang="en-US" altLang="en-US" sz="950" dirty="0">
+              <a:solidFill>
+                <a:srgbClr val="334153"/>
+              </a:solidFill>
+              <a:latin typeface="Raleway Regular" charset="0"/>
+              <a:cs typeface="Raleway Regular" charset="0"/>
+            </a:endParaRPr>
+          </a:p>
+          <a:p>
+            <a:pPr marL="0" indent="0">
+              <a:lnSpc>
+                <a:spcPct val="100000"/>
+              </a:lnSpc>
+              <a:spcBef>
+                <a:spcPts val="95"/>
+              </a:spcBef>
+              <a:buFont typeface="Arial" panose="020B0704020202020204" pitchFamily="34" charset="0"/>
+              <a:buNone/>
+            </a:pPr>
+            <a:r>
+              <a:rPr lang="en-US" altLang="en-US" sz="950" dirty="0">
+                <a:solidFill>
+                  <a:srgbClr val="334153"/>
+                </a:solidFill>
+                <a:latin typeface="Raleway Regular" charset="0"/>
+                <a:cs typeface="Raleway Regular" charset="0"/>
+              </a:rPr>
+              <a:t>    The average response time of 1671ms reflects</a:t>
+            </a:r>
+            <a:endParaRPr lang="en-US" altLang="en-US" sz="950" dirty="0">
+              <a:solidFill>
+                <a:srgbClr val="334153"/>
+              </a:solidFill>
+              <a:latin typeface="Raleway Regular" charset="0"/>
+              <a:cs typeface="Raleway Regular" charset="0"/>
+            </a:endParaRPr>
+          </a:p>
+          <a:p>
+            <a:pPr marL="0" indent="0">
+              <a:lnSpc>
+                <a:spcPct val="100000"/>
+              </a:lnSpc>
+              <a:spcBef>
+                <a:spcPts val="95"/>
+              </a:spcBef>
+              <a:buFont typeface="Arial" panose="020B0704020202020204" pitchFamily="34" charset="0"/>
+              <a:buNone/>
+            </a:pPr>
+            <a:r>
+              <a:rPr lang="en-US" altLang="en-US" sz="950" dirty="0">
+                <a:solidFill>
+                  <a:srgbClr val="334153"/>
+                </a:solidFill>
+                <a:latin typeface="Raleway Regular" charset="0"/>
+                <a:cs typeface="Raleway Regular" charset="0"/>
+              </a:rPr>
+              <a:t>    acceptable performance, though there is an opportunity</a:t>
+            </a:r>
+            <a:endParaRPr lang="en-US" altLang="en-US" sz="950" dirty="0">
+              <a:solidFill>
+                <a:srgbClr val="334153"/>
+              </a:solidFill>
+              <a:latin typeface="Raleway Regular" charset="0"/>
+              <a:cs typeface="Raleway Regular" charset="0"/>
+            </a:endParaRPr>
+          </a:p>
+          <a:p>
+            <a:pPr marL="0" indent="0">
+              <a:lnSpc>
+                <a:spcPct val="100000"/>
+              </a:lnSpc>
+              <a:spcBef>
+                <a:spcPts val="95"/>
+              </a:spcBef>
+              <a:buFont typeface="Arial" panose="020B0704020202020204" pitchFamily="34" charset="0"/>
+              <a:buNone/>
+            </a:pPr>
+            <a:r>
+              <a:rPr lang="en-US" altLang="en-US" sz="950" dirty="0">
+                <a:solidFill>
+                  <a:srgbClr val="334153"/>
+                </a:solidFill>
+                <a:latin typeface="Raleway Regular" charset="0"/>
+                <a:cs typeface="Raleway Regular" charset="0"/>
+              </a:rPr>
+              <a:t>    to further optimize speed for an improved user</a:t>
+            </a:r>
+            <a:endParaRPr lang="en-US" altLang="en-US" sz="950" dirty="0">
+              <a:solidFill>
+                <a:srgbClr val="334153"/>
+              </a:solidFill>
+              <a:latin typeface="Raleway Regular" charset="0"/>
+              <a:cs typeface="Raleway Regular" charset="0"/>
+            </a:endParaRPr>
+          </a:p>
+          <a:p>
+            <a:pPr marL="0" indent="0">
+              <a:lnSpc>
+                <a:spcPct val="100000"/>
+              </a:lnSpc>
+              <a:spcBef>
+                <a:spcPts val="95"/>
+              </a:spcBef>
+              <a:buFont typeface="Arial" panose="020B0704020202020204" pitchFamily="34" charset="0"/>
+              <a:buNone/>
+            </a:pPr>
+            <a:r>
+              <a:rPr lang="en-US" altLang="en-US" sz="950" dirty="0">
+                <a:solidFill>
+                  <a:srgbClr val="334153"/>
+                </a:solidFill>
+                <a:latin typeface="Raleway Regular" charset="0"/>
+                <a:cs typeface="Raleway Regular" charset="0"/>
+              </a:rPr>
+              <a:t>    experience.​   ​</a:t>
+            </a:r>
+            <a:endParaRPr lang="en-US" altLang="en-US" sz="950" dirty="0">
+              <a:solidFill>
+                <a:srgbClr val="334153"/>
+              </a:solidFill>
+              <a:latin typeface="Raleway Regular" charset="0"/>
+              <a:cs typeface="Raleway Regular" charset="0"/>
+            </a:endParaRPr>
+          </a:p>
+          <a:p>
+            <a:pPr marL="0" indent="0">
+              <a:lnSpc>
+                <a:spcPct val="100000"/>
+              </a:lnSpc>
+              <a:spcBef>
+                <a:spcPts val="95"/>
+              </a:spcBef>
+              <a:buFont typeface="Arial" panose="020B0704020202020204" pitchFamily="34" charset="0"/>
+              <a:buNone/>
+            </a:pPr>
+            <a:r>
+              <a:rPr lang="en-US" altLang="en-US" sz="950" dirty="0">
+                <a:solidFill>
+                  <a:srgbClr val="334153"/>
+                </a:solidFill>
+                <a:latin typeface="Raleway Regular" charset="0"/>
+                <a:cs typeface="Raleway Regular" charset="0"/>
+              </a:rPr>
+              <a:t>    Overall, the system is stable, reliable, and performing</a:t>
+            </a:r>
+            <a:endParaRPr lang="en-US" altLang="en-US" sz="950" dirty="0">
+              <a:solidFill>
+                <a:srgbClr val="334153"/>
+              </a:solidFill>
+              <a:latin typeface="Raleway Regular" charset="0"/>
+              <a:cs typeface="Raleway Regular" charset="0"/>
+            </a:endParaRPr>
+          </a:p>
+          <a:p>
+            <a:pPr marL="0" indent="0">
+              <a:lnSpc>
+                <a:spcPct val="100000"/>
+              </a:lnSpc>
+              <a:spcBef>
+                <a:spcPts val="95"/>
+              </a:spcBef>
+              <a:buFont typeface="Arial" panose="020B0704020202020204" pitchFamily="34" charset="0"/>
+              <a:buNone/>
+            </a:pPr>
+            <a:r>
+              <a:rPr lang="en-US" altLang="en-US" sz="950" dirty="0">
+                <a:solidFill>
+                  <a:srgbClr val="334153"/>
+                </a:solidFill>
+                <a:latin typeface="Raleway Regular" charset="0"/>
+                <a:cs typeface="Raleway Regular" charset="0"/>
+              </a:rPr>
+              <a:t>    well, with minimal downtime and no active incidents.</a:t>
+            </a:r>
+            <a:endParaRPr lang="en-US" altLang="en-US" sz="950" dirty="0">
+              <a:solidFill>
+                <a:srgbClr val="334153"/>
+              </a:solidFill>
+              <a:latin typeface="Raleway Regular" charset="0"/>
+              <a:cs typeface="Raleway Regular" charset="0"/>
+            </a:endParaRPr>
+          </a:p>
+          <a:p>
+            <a:pPr marL="0" indent="0">
+              <a:lnSpc>
+                <a:spcPct val="100000"/>
+              </a:lnSpc>
+              <a:spcBef>
+                <a:spcPts val="95"/>
+              </a:spcBef>
+              <a:buFont typeface="Arial" panose="020B0704020202020204" pitchFamily="34" charset="0"/>
+              <a:buNone/>
+            </a:pPr>
+            <a:r>
+              <a:rPr lang="en-US" altLang="en-US" sz="950" dirty="0">
+                <a:solidFill>
+                  <a:srgbClr val="334153"/>
+                </a:solidFill>
+                <a:latin typeface="Raleway Regular" charset="0"/>
+                <a:cs typeface="Raleway Regular" charset="0"/>
+              </a:rPr>
+              <a:t>    Continued monitoring and performance optimization</a:t>
+            </a:r>
+            <a:endParaRPr lang="en-US" altLang="en-US" sz="950" dirty="0">
+              <a:solidFill>
+                <a:srgbClr val="334153"/>
+              </a:solidFill>
+              <a:latin typeface="Raleway Regular" charset="0"/>
+              <a:cs typeface="Raleway Regular" charset="0"/>
+            </a:endParaRPr>
+          </a:p>
+          <a:p>
+            <a:pPr marL="0" indent="0">
+              <a:lnSpc>
+                <a:spcPct val="100000"/>
+              </a:lnSpc>
+              <a:spcBef>
+                <a:spcPts val="95"/>
+              </a:spcBef>
+              <a:buFont typeface="Arial" panose="020B0704020202020204" pitchFamily="34" charset="0"/>
+              <a:buNone/>
+            </a:pPr>
+            <a:r>
+              <a:rPr lang="en-US" altLang="en-US" sz="950" dirty="0">
+                <a:solidFill>
+                  <a:srgbClr val="334153"/>
+                </a:solidFill>
+                <a:latin typeface="Raleway Regular" charset="0"/>
+                <a:cs typeface="Raleway Regular" charset="0"/>
+              </a:rPr>
+              <a:t>    will help maintain and further enhance service quality.​</a:t>
+            </a:r>
+            <a:endParaRPr lang="en-US" altLang="en-US" sz="950" dirty="0">
+              <a:solidFill>
+                <a:srgbClr val="334153"/>
+              </a:solidFill>
+              <a:latin typeface="Raleway Regular" charset="0"/>
+              <a:cs typeface="Raleway Regular" charset="0"/>
+            </a:endParaRPr>
+          </a:p>
+        </p:txBody>
+      </p:sp>
+      <p:pic>
+        <p:nvPicPr>
+          <p:cNvPr id="10" name="Picture 9" descr="image.png"/>
+          <p:cNvPicPr>
+            <a:picLocks noChangeAspect="1"/>
+          </p:cNvPicPr>
+          <p:nvPr/>
+        </p:nvPicPr>
+        <p:blipFill>
+          <a:blip r:embed="rId2"/>
+          <a:stretch>
+            <a:fillRect/>
+          </a:stretch>
+        </p:blipFill>
+        <p:spPr>
+          <a:xfrm>
+            <a:off x="4495800" y="1774825"/>
+            <a:ext cx="4097020" cy="1537970"/>
+          </a:xfrm>
+          <a:prstGeom prst="rect">
+            <a:avLst/>
+          </a:prstGeom>
+        </p:spPr>
+      </p:pic>
     </p:spTree>
   </p:cSld>
   <p:clrMapOvr>
